--- a/lecons/F1/07_F1_M2_L04_The_Notion_of_the_Environment.pptx
+++ b/lecons/F1/07_F1_M2_L04_The_Notion_of_the_Environment.pptx
@@ -57,9 +57,15 @@
     <p:sldId id="305" r:id="rId51"/>
     <p:sldId id="306" r:id="rId52"/>
     <p:sldId id="307" r:id="rId53"/>
+    <p:sldId id="308" r:id="rId54"/>
+    <p:sldId id="309" r:id="rId55"/>
+    <p:sldId id="310" r:id="rId56"/>
+    <p:sldId id="311" r:id="rId57"/>
+    <p:sldId id="312" r:id="rId58"/>
+    <p:sldId id="313" r:id="rId59"/>
   </p:sldIdLst>
   <p:notesMasterIdLst>
-    <p:notesMasterId r:id="rId54"/>
+    <p:notesMasterId r:id="rId60"/>
   </p:notesMasterIdLst>
   <p:sldSz cx="12192000" cy="6858000"/>
   <p:notesSz cx="6858000" cy="12192000"/>
@@ -729,7 +735,7 @@
           <a:p>
             <a:r>
               <a:rPr lang="en-US" dirty="0"/>
-              <a:t>Good. Fadimatou wants to know what the natural environment is made of.</a:t>
+              <a:t>Good. Fadimatou does not know what the natural environment is made of.</a:t>
             </a:r>
             <a:endParaRPr lang="en-US" dirty="0"/>
           </a:p>
@@ -905,7 +911,7 @@
           <a:p>
             <a:r>
               <a:rPr lang="en-US" dirty="0"/>
-              <a:t>Good. Trees and birds (also fish, grass).</a:t>
+              <a:t>Good. Trees and birds (also fish and grass).</a:t>
             </a:r>
             <a:endParaRPr lang="en-US" dirty="0"/>
           </a:p>
@@ -1609,7 +1615,7 @@
           <a:p>
             <a:r>
               <a:rPr lang="en-US" dirty="0"/>
-              <a:t>Let us check the answer together. Grass, trees, animals, the soil and the sky (air and climate).</a:t>
+              <a:t>Let us check the answer together. Grass, trees, animals, the soil and the sky.</a:t>
             </a:r>
             <a:endParaRPr lang="en-US" dirty="0"/>
           </a:p>
@@ -1697,7 +1703,7 @@
           <a:p>
             <a:r>
               <a:rPr lang="en-US" dirty="0"/>
-              <a:t>Activity 2. Look carefully at this picture: the River Benue. Observe every detail before I ask the question.</a:t>
+              <a:t>Activity 2. Look carefully at this picture: a natural environment in the savanna. Observe every detail before I ask the question.</a:t>
             </a:r>
             <a:endParaRPr lang="en-US" dirty="0"/>
           </a:p>
@@ -1785,7 +1791,7 @@
           <a:p>
             <a:r>
               <a:rPr lang="en-US" dirty="0"/>
-              <a:t>Here is the question for Activity 2: Rivers, lakes and seas form which component of the environment? Take one minute to think and write your answer in your rough notebook.</a:t>
+              <a:t>Here is the question for Activity 2: Were these things made by people? Take one minute to think and write your answer in your rough notebook.</a:t>
             </a:r>
             <a:endParaRPr lang="en-US" dirty="0"/>
           </a:p>
@@ -1873,7 +1879,7 @@
           <a:p>
             <a:r>
               <a:rPr lang="en-US" dirty="0"/>
-              <a:t>Let us check the answer together. Drainage (water bodies).</a:t>
+              <a:t>Let us check the answer together. No, they are natural: together they form the natural environment.</a:t>
             </a:r>
             <a:endParaRPr lang="en-US" dirty="0"/>
           </a:p>
@@ -1961,7 +1967,7 @@
           <a:p>
             <a:r>
               <a:rPr lang="en-US" dirty="0"/>
-              <a:t>Activity 3. Look carefully at this picture: soil. Observe every detail before I ask the question.</a:t>
+              <a:t>Activity 3. Look carefully at this picture: a river. Observe every detail before I ask the question.</a:t>
             </a:r>
             <a:endParaRPr lang="en-US" dirty="0"/>
           </a:p>
@@ -2049,7 +2055,7 @@
           <a:p>
             <a:r>
               <a:rPr lang="en-US" dirty="0"/>
-              <a:t>Here is the question for Activity 3: Why is the soil an important component of the environment? Take one minute to think and write your answer in your rough notebook.</a:t>
+              <a:t>Here is the question for Activity 3: Rivers, lakes and seas form which component of the environment? Take one minute to think and write your answer in your rough notebook.</a:t>
             </a:r>
             <a:endParaRPr lang="en-US" dirty="0"/>
           </a:p>
@@ -2137,7 +2143,7 @@
           <a:p>
             <a:r>
               <a:rPr lang="en-US" dirty="0"/>
-              <a:t>Let us check the answer together. Plants grow in it and it gives food to people and animals.</a:t>
+              <a:t>Let us check the answer together. Drainage (water bodies).</a:t>
             </a:r>
             <a:endParaRPr lang="en-US" dirty="0"/>
           </a:p>
@@ -2313,7 +2319,7 @@
           <a:p>
             <a:r>
               <a:rPr lang="en-US" dirty="0"/>
-              <a:t>Here is the question for Activity 4: What do we call all the plants of a place? And all the animals? Take one minute to think and write your answer in your rough notebook.</a:t>
+              <a:t>Here is the question for Activity 4: What do we call all the animals of a place? Take one minute to think and write your answer in your rough notebook.</a:t>
             </a:r>
             <a:endParaRPr lang="en-US" dirty="0"/>
           </a:p>
@@ -2401,7 +2407,7 @@
           <a:p>
             <a:r>
               <a:rPr lang="en-US" dirty="0"/>
-              <a:t>Let us check the answer together. Flora (plants) and fauna (animals).</a:t>
+              <a:t>Let us check the answer together. Fauna.</a:t>
             </a:r>
             <a:endParaRPr lang="en-US" dirty="0"/>
           </a:p>
@@ -2577,7 +2583,7 @@
           <a:p>
             <a:r>
               <a:rPr lang="en-US" dirty="0"/>
-              <a:t>Activity 5. Look carefully at this diagram: the components of an ecosystem. Observe every detail before I ask the question.</a:t>
+              <a:t>Activity 5. Look carefully at this diagram: living and non-living things together. Observe every detail before I ask the question.</a:t>
             </a:r>
             <a:endParaRPr lang="en-US" dirty="0"/>
           </a:p>
@@ -2665,7 +2671,7 @@
           <a:p>
             <a:r>
               <a:rPr lang="en-US" dirty="0"/>
-              <a:t>Here is the question for Activity 5: What is an ecosystem? Take one minute to think and write your answer in your rough notebook.</a:t>
+              <a:t>Here is the question for Activity 5: How do the animals depend on the plants and the soil? Take one minute to think and write your answer in your rough notebook.</a:t>
             </a:r>
             <a:endParaRPr lang="en-US" dirty="0"/>
           </a:p>
@@ -2753,7 +2759,7 @@
           <a:p>
             <a:r>
               <a:rPr lang="en-US" dirty="0"/>
-              <a:t>Let us check the answer together. A community of living things and their non-living surroundings that depend on one another.</a:t>
+              <a:t>Let us check the answer together. Animals eat plants, and plants grow in the soil: they depend on one another in an ecosystem.</a:t>
             </a:r>
             <a:endParaRPr lang="en-US" dirty="0"/>
           </a:p>
@@ -2929,7 +2935,7 @@
           <a:p>
             <a:r>
               <a:rPr lang="en-US" dirty="0"/>
-              <a:t>Let us copy Meaning of the Natural Environment. The natural environment is defined as follows. On this slide we have Natural environment. Write each point on a new line, with the key term first, and explain it in your own words when we revise.</a:t>
+              <a:t>Let us copy the definitions. The key terms of this lesson are defined as follows. On this slide we have Environment and Natural environment. Write each point on a new line, with the key term first, and explain it in your own words when we revise. When you finish, we go to the next slide.</a:t>
             </a:r>
             <a:endParaRPr lang="en-US" dirty="0"/>
           </a:p>
@@ -3017,7 +3023,7 @@
           <a:p>
             <a:r>
               <a:rPr lang="en-US" dirty="0"/>
-              <a:t>Let us copy Components of the Natural Environment. The natural environment has the following components. On this slide we have Climate. Write each point on a new line, with the key term first, and explain it in your own words when we revise. When you finish, we go to the next slide.</a:t>
+              <a:t>We continue with the definitions. On this slide we have Resources. Write each point on a new line, with the key term first, and explain it in your own words when we revise.</a:t>
             </a:r>
             <a:endParaRPr lang="en-US" dirty="0"/>
           </a:p>
@@ -3105,7 +3111,7 @@
           <a:p>
             <a:r>
               <a:rPr lang="en-US" dirty="0"/>
-              <a:t>We continue with Components of the Natural Environment. On this slide we have Relief and soil, Drainage and Flora. Write each point on a new line, with the key term first, and explain it in your own words when we revise. When you finish, we go to the next slide.</a:t>
+              <a:t>Let us copy Components of the Natural Environment. The natural environment has the following components. Copy the point on Climate on the left, then draw the diagram on the right: the climates of Cameroon. Give it a title and label it clearly.</a:t>
             </a:r>
             <a:endParaRPr lang="en-US" dirty="0"/>
           </a:p>
@@ -3193,7 +3199,7 @@
           <a:p>
             <a:r>
               <a:rPr lang="en-US" dirty="0"/>
-              <a:t>We continue with Components of the Natural Environment. On this slide we have Fauna. Write each point on a new line, with the key term first, and explain it in your own words when we revise.</a:t>
+              <a:t>Copy the point on Relief on the left, then draw the diagram on the right: the relief of Cameroon. Give it a title and label it clearly.</a:t>
             </a:r>
             <a:endParaRPr lang="en-US" dirty="0"/>
           </a:p>
@@ -3281,7 +3287,7 @@
           <a:p>
             <a:r>
               <a:rPr lang="en-US" dirty="0"/>
-              <a:t>Let us copy Ecosystems. Ecosystems are explained as follows. On this slide we have Ecosystem and Examples. Write each point on a new line, with the key term first, and explain it in your own words when we revise.</a:t>
+              <a:t>Copy the point on Soil on the left, then draw the diagram on the right: soil. Give it a title and label it clearly.</a:t>
             </a:r>
             <a:endParaRPr lang="en-US" dirty="0"/>
           </a:p>
@@ -3369,7 +3375,7 @@
           <a:p>
             <a:r>
               <a:rPr lang="en-US" dirty="0"/>
-              <a:t>Now draw this illustration in your notebook: the components of an ecosystem. Give it a title and label it clearly.</a:t>
+              <a:t>Copy the point on Drainage on the left, then draw the diagram on the right: a river. Give it a title and label it clearly.</a:t>
             </a:r>
             <a:endParaRPr lang="en-US" dirty="0"/>
           </a:p>
@@ -3545,7 +3551,7 @@
           <a:p>
             <a:r>
               <a:rPr lang="en-US" dirty="0"/>
-              <a:t>Now let us check what you have understood. Question 1: Name four components of the natural environment. Answer in your exercise book.</a:t>
+              <a:t>Copy the point on Flora on the left, then draw the diagram on the right: forest vegetation. Give it a title and label it clearly.</a:t>
             </a:r>
             <a:endParaRPr lang="en-US" dirty="0"/>
           </a:p>
@@ -3633,7 +3639,7 @@
           <a:p>
             <a:r>
               <a:rPr lang="en-US" dirty="0"/>
-              <a:t>The expected answer is: climate, soil, drainage, flora (also fauna, relief). If you got it right, well done.</a:t>
+              <a:t>Copy the point on Fauna on the left, then draw the diagram on the right: animals of the savanna. Give it a title and label it clearly.</a:t>
             </a:r>
             <a:endParaRPr lang="en-US" dirty="0"/>
           </a:p>
@@ -3721,7 +3727,7 @@
           <a:p>
             <a:r>
               <a:rPr lang="en-US" dirty="0"/>
-              <a:t>Now let us check what you have understood. Question 2: What is an ecosystem? Answer in your exercise book.</a:t>
+              <a:t>Let us copy Ecosystems. Ecosystems are explained as follows. Copy the point on Ecosystem on the left, then draw the diagram on the right: the components of an ecosystem. Give it a title and label it clearly.</a:t>
             </a:r>
             <a:endParaRPr lang="en-US" dirty="0"/>
           </a:p>
@@ -3809,7 +3815,7 @@
           <a:p>
             <a:r>
               <a:rPr lang="en-US" dirty="0"/>
-              <a:t>The expected answer is: a community of living things and their surroundings that depend on one another. If you got it right, well done.</a:t>
+              <a:t>We continue with Ecosystems. On this slide we have Living components and Non-living components. Write each point on a new line, with the key term first, and explain it in your own words when we revise.</a:t>
             </a:r>
             <a:endParaRPr lang="en-US" dirty="0"/>
           </a:p>
@@ -3897,7 +3903,7 @@
           <a:p>
             <a:r>
               <a:rPr lang="en-US" dirty="0"/>
-              <a:t>Take your time to copy this part; we will continue together.</a:t>
+              <a:t>Copy the point on Examples on the left, then draw the diagram on the right: lake Chad, an ecosystem. Give it a title and label it clearly.</a:t>
             </a:r>
             <a:endParaRPr lang="en-US" dirty="0"/>
           </a:p>
@@ -3985,7 +3991,7 @@
           <a:p>
             <a:r>
               <a:rPr lang="en-US" dirty="0"/>
-              <a:t>For those who need more practice, fill in the blanks in your exercise book. The answers are: number 1, flora; number 2, fauna; number 3, drainage.</a:t>
+              <a:t>Now let us check what you have understood. Question 1: Name four components of the natural environment. Answer in your exercise book.</a:t>
             </a:r>
             <a:endParaRPr lang="en-US" dirty="0"/>
           </a:p>
@@ -4073,7 +4079,7 @@
           <a:p>
             <a:r>
               <a:rPr lang="en-US" dirty="0"/>
-              <a:t>For your homework: List five living things and five non-living things in your school compound. We shall correct it at the beginning of our next lesson.</a:t>
+              <a:t>The expected answer is: climate, soil, drainage and flora (also relief and fauna). If you got it right, well done.</a:t>
             </a:r>
             <a:endParaRPr lang="en-US" dirty="0"/>
           </a:p>
@@ -4161,7 +4167,7 @@
           <a:p>
             <a:r>
               <a:rPr lang="en-US" dirty="0"/>
-              <a:t>Our next lesson will be on Lesson 5: Natural Regions (Bio-climatic Zones) of Cameroon. Thank you for your attention, and see you next time.</a:t>
+              <a:t>Now let us check what you have understood. Question 2: What is an ecosystem? Answer in your exercise book.</a:t>
             </a:r>
             <a:endParaRPr lang="en-US" dirty="0"/>
           </a:p>
@@ -4249,7 +4255,7 @@
           <a:p>
             <a:r>
               <a:rPr lang="en-US" dirty="0"/>
-              <a:t>Let us play the bilingual game. I say a word in English, and you give me the French word. Then we do the reverse.</a:t>
+              <a:t>The expected answer is: a community of living things and their surroundings that depend on one another. If you got it right, well done.</a:t>
             </a:r>
             <a:endParaRPr lang="en-US" dirty="0"/>
           </a:p>
@@ -4337,7 +4343,7 @@
           <a:p>
             <a:r>
               <a:rPr lang="en-US" dirty="0"/>
-              <a:t>I record this information in the official logbook of the class after the lesson.</a:t>
+              <a:t>Take your time to copy this part; we will continue together.</a:t>
             </a:r>
             <a:endParaRPr lang="en-US" dirty="0"/>
           </a:p>
@@ -4513,7 +4519,7 @@
           <a:p>
             <a:r>
               <a:rPr lang="en-US" dirty="0"/>
-              <a:t>I complete the second page of the logbook: the matter taught, the evaluation, the homework and the attendance.</a:t>
+              <a:t>For those who need more practice, fill in the blanks in your exercise book. The answers are: number 1, flora; number 2, fauna; number 3, drainage.</a:t>
             </a:r>
             <a:endParaRPr lang="en-US" dirty="0"/>
           </a:p>
@@ -4601,7 +4607,7 @@
           <a:p>
             <a:r>
               <a:rPr lang="en-US" dirty="0"/>
-              <a:t>This slide is for me, the teacher: it gives the timing of the lesson and what to do if the projector is not available.</a:t>
+              <a:t>For your homework: List five living things and five non-living things in your school compound. We shall correct it at the beginning of our next lesson.</a:t>
             </a:r>
             <a:endParaRPr lang="en-US" dirty="0"/>
           </a:p>
@@ -4689,7 +4695,7 @@
           <a:p>
             <a:r>
               <a:rPr lang="en-US" dirty="0"/>
-              <a:t>These are the references and picture credits used to prepare this lesson.</a:t>
+              <a:t>Our next lesson will be on Lesson 5: Natural Regions (Bio-climatic Zones) of Cameroon. Thank you for your attention, and see you next time.</a:t>
             </a:r>
             <a:endParaRPr lang="en-US" dirty="0"/>
           </a:p>
@@ -4713,6 +4719,534 @@
             <a:fld id="{F7021451-1387-4CA6-816F-3879F97B5CBC}" type="slidenum">
               <a:rPr lang="en-US"/>
               <a:t>52</a:t>
+            </a:fld>
+            <a:endParaRPr lang="en-US"/>
+          </a:p>
+        </p:txBody>
+      </p:sp>
+    </p:spTree>
+    <p:extLst>
+      <p:ext uri="{BB962C8B-B14F-4D97-AF65-F5344CB8AC3E}">
+        <p14:creationId xmlns:p14="http://schemas.microsoft.com/office/powerpoint/2010/main" val="1024086991"/>
+      </p:ext>
+    </p:extLst>
+  </p:cSld>
+  <p:clrMapOvr>
+    <a:masterClrMapping/>
+  </p:clrMapOvr>
+</p:notes>
+</file>
+
+<file path=ppt/notesSlides/notesSlide53.xml><?xml version="1.0" encoding="utf-8"?>
+<p:notes xmlns:a="http://schemas.openxmlformats.org/drawingml/2006/main" xmlns:r="http://schemas.openxmlformats.org/officeDocument/2006/relationships" xmlns:p="http://schemas.openxmlformats.org/presentationml/2006/main">
+  <p:cSld>
+    <p:spTree>
+      <p:nvGrpSpPr>
+        <p:cNvPr id="1" name=""/>
+        <p:cNvGrpSpPr/>
+        <p:nvPr/>
+      </p:nvGrpSpPr>
+      <p:grpSpPr>
+        <a:xfrm>
+          <a:off x="0" y="0"/>
+          <a:ext cx="0" cy="0"/>
+          <a:chOff x="0" y="0"/>
+          <a:chExt cx="0" cy="0"/>
+        </a:xfrm>
+      </p:grpSpPr>
+      <p:sp>
+        <p:nvSpPr>
+          <p:cNvPr id="2" name="Slide Image Placeholder 1"/>
+          <p:cNvSpPr>
+            <a:spLocks noGrp="1" noRot="1" noChangeAspect="1"/>
+          </p:cNvSpPr>
+          <p:nvPr>
+            <p:ph type="sldImg"/>
+          </p:nvPr>
+        </p:nvSpPr>
+        <p:spPr/>
+      </p:sp>
+      <p:sp>
+        <p:nvSpPr>
+          <p:cNvPr id="3" name="Notes Placeholder 2"/>
+          <p:cNvSpPr>
+            <a:spLocks noGrp="1"/>
+          </p:cNvSpPr>
+          <p:nvPr>
+            <p:ph type="body" idx="1"/>
+          </p:nvPr>
+        </p:nvSpPr>
+        <p:spPr/>
+        <p:txBody>
+          <a:bodyPr/>
+          <a:lstStyle/>
+          <a:p>
+            <a:r>
+              <a:rPr lang="en-US" dirty="0"/>
+              <a:t>Let us play the bilingual game. I say a word in English, and you give me the French word. Then we do the reverse.</a:t>
+            </a:r>
+            <a:endParaRPr lang="en-US" dirty="0"/>
+          </a:p>
+        </p:txBody>
+      </p:sp>
+      <p:sp>
+        <p:nvSpPr>
+          <p:cNvPr id="4" name="Slide Number Placeholder 3"/>
+          <p:cNvSpPr>
+            <a:spLocks noGrp="1"/>
+          </p:cNvSpPr>
+          <p:nvPr>
+            <p:ph type="sldNum" sz="quarter" idx="10"/>
+          </p:nvPr>
+        </p:nvSpPr>
+        <p:spPr/>
+        <p:txBody>
+          <a:bodyPr/>
+          <a:lstStyle/>
+          <a:p>
+            <a:fld id="{F7021451-1387-4CA6-816F-3879F97B5CBC}" type="slidenum">
+              <a:rPr lang="en-US"/>
+              <a:t>53</a:t>
+            </a:fld>
+            <a:endParaRPr lang="en-US"/>
+          </a:p>
+        </p:txBody>
+      </p:sp>
+    </p:spTree>
+    <p:extLst>
+      <p:ext uri="{BB962C8B-B14F-4D97-AF65-F5344CB8AC3E}">
+        <p14:creationId xmlns:p14="http://schemas.microsoft.com/office/powerpoint/2010/main" val="1024086991"/>
+      </p:ext>
+    </p:extLst>
+  </p:cSld>
+  <p:clrMapOvr>
+    <a:masterClrMapping/>
+  </p:clrMapOvr>
+</p:notes>
+</file>
+
+<file path=ppt/notesSlides/notesSlide54.xml><?xml version="1.0" encoding="utf-8"?>
+<p:notes xmlns:a="http://schemas.openxmlformats.org/drawingml/2006/main" xmlns:r="http://schemas.openxmlformats.org/officeDocument/2006/relationships" xmlns:p="http://schemas.openxmlformats.org/presentationml/2006/main">
+  <p:cSld>
+    <p:spTree>
+      <p:nvGrpSpPr>
+        <p:cNvPr id="1" name=""/>
+        <p:cNvGrpSpPr/>
+        <p:nvPr/>
+      </p:nvGrpSpPr>
+      <p:grpSpPr>
+        <a:xfrm>
+          <a:off x="0" y="0"/>
+          <a:ext cx="0" cy="0"/>
+          <a:chOff x="0" y="0"/>
+          <a:chExt cx="0" cy="0"/>
+        </a:xfrm>
+      </p:grpSpPr>
+      <p:sp>
+        <p:nvSpPr>
+          <p:cNvPr id="2" name="Slide Image Placeholder 1"/>
+          <p:cNvSpPr>
+            <a:spLocks noGrp="1" noRot="1" noChangeAspect="1"/>
+          </p:cNvSpPr>
+          <p:nvPr>
+            <p:ph type="sldImg"/>
+          </p:nvPr>
+        </p:nvSpPr>
+        <p:spPr/>
+      </p:sp>
+      <p:sp>
+        <p:nvSpPr>
+          <p:cNvPr id="3" name="Notes Placeholder 2"/>
+          <p:cNvSpPr>
+            <a:spLocks noGrp="1"/>
+          </p:cNvSpPr>
+          <p:nvPr>
+            <p:ph type="body" idx="1"/>
+          </p:nvPr>
+        </p:nvSpPr>
+        <p:spPr/>
+        <p:txBody>
+          <a:bodyPr/>
+          <a:lstStyle/>
+          <a:p>
+            <a:r>
+              <a:rPr lang="en-US" dirty="0"/>
+              <a:t>I record this information in the official logbook of the class after the lesson.</a:t>
+            </a:r>
+            <a:endParaRPr lang="en-US" dirty="0"/>
+          </a:p>
+        </p:txBody>
+      </p:sp>
+      <p:sp>
+        <p:nvSpPr>
+          <p:cNvPr id="4" name="Slide Number Placeholder 3"/>
+          <p:cNvSpPr>
+            <a:spLocks noGrp="1"/>
+          </p:cNvSpPr>
+          <p:nvPr>
+            <p:ph type="sldNum" sz="quarter" idx="10"/>
+          </p:nvPr>
+        </p:nvSpPr>
+        <p:spPr/>
+        <p:txBody>
+          <a:bodyPr/>
+          <a:lstStyle/>
+          <a:p>
+            <a:fld id="{F7021451-1387-4CA6-816F-3879F97B5CBC}" type="slidenum">
+              <a:rPr lang="en-US"/>
+              <a:t>54</a:t>
+            </a:fld>
+            <a:endParaRPr lang="en-US"/>
+          </a:p>
+        </p:txBody>
+      </p:sp>
+    </p:spTree>
+    <p:extLst>
+      <p:ext uri="{BB962C8B-B14F-4D97-AF65-F5344CB8AC3E}">
+        <p14:creationId xmlns:p14="http://schemas.microsoft.com/office/powerpoint/2010/main" val="1024086991"/>
+      </p:ext>
+    </p:extLst>
+  </p:cSld>
+  <p:clrMapOvr>
+    <a:masterClrMapping/>
+  </p:clrMapOvr>
+</p:notes>
+</file>
+
+<file path=ppt/notesSlides/notesSlide55.xml><?xml version="1.0" encoding="utf-8"?>
+<p:notes xmlns:a="http://schemas.openxmlformats.org/drawingml/2006/main" xmlns:r="http://schemas.openxmlformats.org/officeDocument/2006/relationships" xmlns:p="http://schemas.openxmlformats.org/presentationml/2006/main">
+  <p:cSld>
+    <p:spTree>
+      <p:nvGrpSpPr>
+        <p:cNvPr id="1" name=""/>
+        <p:cNvGrpSpPr/>
+        <p:nvPr/>
+      </p:nvGrpSpPr>
+      <p:grpSpPr>
+        <a:xfrm>
+          <a:off x="0" y="0"/>
+          <a:ext cx="0" cy="0"/>
+          <a:chOff x="0" y="0"/>
+          <a:chExt cx="0" cy="0"/>
+        </a:xfrm>
+      </p:grpSpPr>
+      <p:sp>
+        <p:nvSpPr>
+          <p:cNvPr id="2" name="Slide Image Placeholder 1"/>
+          <p:cNvSpPr>
+            <a:spLocks noGrp="1" noRot="1" noChangeAspect="1"/>
+          </p:cNvSpPr>
+          <p:nvPr>
+            <p:ph type="sldImg"/>
+          </p:nvPr>
+        </p:nvSpPr>
+        <p:spPr/>
+      </p:sp>
+      <p:sp>
+        <p:nvSpPr>
+          <p:cNvPr id="3" name="Notes Placeholder 2"/>
+          <p:cNvSpPr>
+            <a:spLocks noGrp="1"/>
+          </p:cNvSpPr>
+          <p:nvPr>
+            <p:ph type="body" idx="1"/>
+          </p:nvPr>
+        </p:nvSpPr>
+        <p:spPr/>
+        <p:txBody>
+          <a:bodyPr/>
+          <a:lstStyle/>
+          <a:p>
+            <a:r>
+              <a:rPr lang="en-US" dirty="0"/>
+              <a:t>I complete the second page of the logbook: the matter taught, the evaluation, the homework and the attendance.</a:t>
+            </a:r>
+            <a:endParaRPr lang="en-US" dirty="0"/>
+          </a:p>
+        </p:txBody>
+      </p:sp>
+      <p:sp>
+        <p:nvSpPr>
+          <p:cNvPr id="4" name="Slide Number Placeholder 3"/>
+          <p:cNvSpPr>
+            <a:spLocks noGrp="1"/>
+          </p:cNvSpPr>
+          <p:nvPr>
+            <p:ph type="sldNum" sz="quarter" idx="10"/>
+          </p:nvPr>
+        </p:nvSpPr>
+        <p:spPr/>
+        <p:txBody>
+          <a:bodyPr/>
+          <a:lstStyle/>
+          <a:p>
+            <a:fld id="{F7021451-1387-4CA6-816F-3879F97B5CBC}" type="slidenum">
+              <a:rPr lang="en-US"/>
+              <a:t>55</a:t>
+            </a:fld>
+            <a:endParaRPr lang="en-US"/>
+          </a:p>
+        </p:txBody>
+      </p:sp>
+    </p:spTree>
+    <p:extLst>
+      <p:ext uri="{BB962C8B-B14F-4D97-AF65-F5344CB8AC3E}">
+        <p14:creationId xmlns:p14="http://schemas.microsoft.com/office/powerpoint/2010/main" val="1024086991"/>
+      </p:ext>
+    </p:extLst>
+  </p:cSld>
+  <p:clrMapOvr>
+    <a:masterClrMapping/>
+  </p:clrMapOvr>
+</p:notes>
+</file>
+
+<file path=ppt/notesSlides/notesSlide56.xml><?xml version="1.0" encoding="utf-8"?>
+<p:notes xmlns:a="http://schemas.openxmlformats.org/drawingml/2006/main" xmlns:r="http://schemas.openxmlformats.org/officeDocument/2006/relationships" xmlns:p="http://schemas.openxmlformats.org/presentationml/2006/main">
+  <p:cSld>
+    <p:spTree>
+      <p:nvGrpSpPr>
+        <p:cNvPr id="1" name=""/>
+        <p:cNvGrpSpPr/>
+        <p:nvPr/>
+      </p:nvGrpSpPr>
+      <p:grpSpPr>
+        <a:xfrm>
+          <a:off x="0" y="0"/>
+          <a:ext cx="0" cy="0"/>
+          <a:chOff x="0" y="0"/>
+          <a:chExt cx="0" cy="0"/>
+        </a:xfrm>
+      </p:grpSpPr>
+      <p:sp>
+        <p:nvSpPr>
+          <p:cNvPr id="2" name="Slide Image Placeholder 1"/>
+          <p:cNvSpPr>
+            <a:spLocks noGrp="1" noRot="1" noChangeAspect="1"/>
+          </p:cNvSpPr>
+          <p:nvPr>
+            <p:ph type="sldImg"/>
+          </p:nvPr>
+        </p:nvSpPr>
+        <p:spPr/>
+      </p:sp>
+      <p:sp>
+        <p:nvSpPr>
+          <p:cNvPr id="3" name="Notes Placeholder 2"/>
+          <p:cNvSpPr>
+            <a:spLocks noGrp="1"/>
+          </p:cNvSpPr>
+          <p:nvPr>
+            <p:ph type="body" idx="1"/>
+          </p:nvPr>
+        </p:nvSpPr>
+        <p:spPr/>
+        <p:txBody>
+          <a:bodyPr/>
+          <a:lstStyle/>
+          <a:p>
+            <a:r>
+              <a:rPr lang="en-US" dirty="0"/>
+              <a:t>This slide is for me, the teacher: it gives the timing of the lesson and what to do if the projector is not available.</a:t>
+            </a:r>
+            <a:endParaRPr lang="en-US" dirty="0"/>
+          </a:p>
+        </p:txBody>
+      </p:sp>
+      <p:sp>
+        <p:nvSpPr>
+          <p:cNvPr id="4" name="Slide Number Placeholder 3"/>
+          <p:cNvSpPr>
+            <a:spLocks noGrp="1"/>
+          </p:cNvSpPr>
+          <p:nvPr>
+            <p:ph type="sldNum" sz="quarter" idx="10"/>
+          </p:nvPr>
+        </p:nvSpPr>
+        <p:spPr/>
+        <p:txBody>
+          <a:bodyPr/>
+          <a:lstStyle/>
+          <a:p>
+            <a:fld id="{F7021451-1387-4CA6-816F-3879F97B5CBC}" type="slidenum">
+              <a:rPr lang="en-US"/>
+              <a:t>56</a:t>
+            </a:fld>
+            <a:endParaRPr lang="en-US"/>
+          </a:p>
+        </p:txBody>
+      </p:sp>
+    </p:spTree>
+    <p:extLst>
+      <p:ext uri="{BB962C8B-B14F-4D97-AF65-F5344CB8AC3E}">
+        <p14:creationId xmlns:p14="http://schemas.microsoft.com/office/powerpoint/2010/main" val="1024086991"/>
+      </p:ext>
+    </p:extLst>
+  </p:cSld>
+  <p:clrMapOvr>
+    <a:masterClrMapping/>
+  </p:clrMapOvr>
+</p:notes>
+</file>
+
+<file path=ppt/notesSlides/notesSlide57.xml><?xml version="1.0" encoding="utf-8"?>
+<p:notes xmlns:a="http://schemas.openxmlformats.org/drawingml/2006/main" xmlns:r="http://schemas.openxmlformats.org/officeDocument/2006/relationships" xmlns:p="http://schemas.openxmlformats.org/presentationml/2006/main">
+  <p:cSld>
+    <p:spTree>
+      <p:nvGrpSpPr>
+        <p:cNvPr id="1" name=""/>
+        <p:cNvGrpSpPr/>
+        <p:nvPr/>
+      </p:nvGrpSpPr>
+      <p:grpSpPr>
+        <a:xfrm>
+          <a:off x="0" y="0"/>
+          <a:ext cx="0" cy="0"/>
+          <a:chOff x="0" y="0"/>
+          <a:chExt cx="0" cy="0"/>
+        </a:xfrm>
+      </p:grpSpPr>
+      <p:sp>
+        <p:nvSpPr>
+          <p:cNvPr id="2" name="Slide Image Placeholder 1"/>
+          <p:cNvSpPr>
+            <a:spLocks noGrp="1" noRot="1" noChangeAspect="1"/>
+          </p:cNvSpPr>
+          <p:nvPr>
+            <p:ph type="sldImg"/>
+          </p:nvPr>
+        </p:nvSpPr>
+        <p:spPr/>
+      </p:sp>
+      <p:sp>
+        <p:nvSpPr>
+          <p:cNvPr id="3" name="Notes Placeholder 2"/>
+          <p:cNvSpPr>
+            <a:spLocks noGrp="1"/>
+          </p:cNvSpPr>
+          <p:nvPr>
+            <p:ph type="body" idx="1"/>
+          </p:nvPr>
+        </p:nvSpPr>
+        <p:spPr/>
+        <p:txBody>
+          <a:bodyPr/>
+          <a:lstStyle/>
+          <a:p>
+            <a:r>
+              <a:rPr lang="en-US" dirty="0"/>
+              <a:t>Take your time to copy this part; we will continue together.</a:t>
+            </a:r>
+            <a:endParaRPr lang="en-US" dirty="0"/>
+          </a:p>
+        </p:txBody>
+      </p:sp>
+      <p:sp>
+        <p:nvSpPr>
+          <p:cNvPr id="4" name="Slide Number Placeholder 3"/>
+          <p:cNvSpPr>
+            <a:spLocks noGrp="1"/>
+          </p:cNvSpPr>
+          <p:nvPr>
+            <p:ph type="sldNum" sz="quarter" idx="10"/>
+          </p:nvPr>
+        </p:nvSpPr>
+        <p:spPr/>
+        <p:txBody>
+          <a:bodyPr/>
+          <a:lstStyle/>
+          <a:p>
+            <a:fld id="{F7021451-1387-4CA6-816F-3879F97B5CBC}" type="slidenum">
+              <a:rPr lang="en-US"/>
+              <a:t>57</a:t>
+            </a:fld>
+            <a:endParaRPr lang="en-US"/>
+          </a:p>
+        </p:txBody>
+      </p:sp>
+    </p:spTree>
+    <p:extLst>
+      <p:ext uri="{BB962C8B-B14F-4D97-AF65-F5344CB8AC3E}">
+        <p14:creationId xmlns:p14="http://schemas.microsoft.com/office/powerpoint/2010/main" val="1024086991"/>
+      </p:ext>
+    </p:extLst>
+  </p:cSld>
+  <p:clrMapOvr>
+    <a:masterClrMapping/>
+  </p:clrMapOvr>
+</p:notes>
+</file>
+
+<file path=ppt/notesSlides/notesSlide58.xml><?xml version="1.0" encoding="utf-8"?>
+<p:notes xmlns:a="http://schemas.openxmlformats.org/drawingml/2006/main" xmlns:r="http://schemas.openxmlformats.org/officeDocument/2006/relationships" xmlns:p="http://schemas.openxmlformats.org/presentationml/2006/main">
+  <p:cSld>
+    <p:spTree>
+      <p:nvGrpSpPr>
+        <p:cNvPr id="1" name=""/>
+        <p:cNvGrpSpPr/>
+        <p:nvPr/>
+      </p:nvGrpSpPr>
+      <p:grpSpPr>
+        <a:xfrm>
+          <a:off x="0" y="0"/>
+          <a:ext cx="0" cy="0"/>
+          <a:chOff x="0" y="0"/>
+          <a:chExt cx="0" cy="0"/>
+        </a:xfrm>
+      </p:grpSpPr>
+      <p:sp>
+        <p:nvSpPr>
+          <p:cNvPr id="2" name="Slide Image Placeholder 1"/>
+          <p:cNvSpPr>
+            <a:spLocks noGrp="1" noRot="1" noChangeAspect="1"/>
+          </p:cNvSpPr>
+          <p:nvPr>
+            <p:ph type="sldImg"/>
+          </p:nvPr>
+        </p:nvSpPr>
+        <p:spPr/>
+      </p:sp>
+      <p:sp>
+        <p:nvSpPr>
+          <p:cNvPr id="3" name="Notes Placeholder 2"/>
+          <p:cNvSpPr>
+            <a:spLocks noGrp="1"/>
+          </p:cNvSpPr>
+          <p:nvPr>
+            <p:ph type="body" idx="1"/>
+          </p:nvPr>
+        </p:nvSpPr>
+        <p:spPr/>
+        <p:txBody>
+          <a:bodyPr/>
+          <a:lstStyle/>
+          <a:p>
+            <a:r>
+              <a:rPr lang="en-US" dirty="0"/>
+              <a:t>These are the references and picture credits used to prepare this lesson.</a:t>
+            </a:r>
+            <a:endParaRPr lang="en-US" dirty="0"/>
+          </a:p>
+        </p:txBody>
+      </p:sp>
+      <p:sp>
+        <p:nvSpPr>
+          <p:cNvPr id="4" name="Slide Number Placeholder 3"/>
+          <p:cNvSpPr>
+            <a:spLocks noGrp="1"/>
+          </p:cNvSpPr>
+          <p:nvPr>
+            <p:ph type="sldNum" sz="quarter" idx="10"/>
+          </p:nvPr>
+        </p:nvSpPr>
+        <p:spPr/>
+        <p:txBody>
+          <a:bodyPr/>
+          <a:lstStyle/>
+          <a:p>
+            <a:fld id="{F7021451-1387-4CA6-816F-3879F97B5CBC}" type="slidenum">
+              <a:rPr lang="en-US"/>
+              <a:t>58</a:t>
             </a:fld>
             <a:endParaRPr lang="en-US"/>
           </a:p>
@@ -5041,7 +5575,7 @@
           <a:p>
             <a:r>
               <a:rPr lang="en-US" dirty="0"/>
-              <a:t>Listen carefully to this situation from real life. During a walk near the River Benue, Fadimatou sees trees, grass, birds, fish, sand and water. Her teacher tells her that all these things together form the natural environment and that they depend on one another. Think about it, because I am going to ask you some questions.</a:t>
+              <a:t>Listen carefully to this situation from real life. During a walk near the River Benue, Fadimatou sees trees, grass, birds, fish, sand and water. Her teacher says that all these things form the natural environment. Fadimatou asks: "What is the natural environment made of, and how do its parts depend on one another?" Think about it, because I am going to ask you some questions.</a:t>
             </a:r>
             <a:endParaRPr lang="en-US" dirty="0"/>
           </a:p>
@@ -6724,7 +7258,7 @@
                 <a:ea typeface="Times New Roman" pitchFamily="34" charset="-122"/>
                 <a:cs typeface="Times New Roman" pitchFamily="34" charset="-120"/>
               </a:rPr>
-              <a:t>Fadimatou wants to know what the natural environment is made of.</a:t>
+              <a:t>Fadimatou does not know what the natural environment is made of.</a:t>
             </a:r>
             <a:endParaRPr lang="en-US" sz="4000" dirty="0"/>
           </a:p>
@@ -7162,7 +7696,7 @@
                 <a:ea typeface="Times New Roman" pitchFamily="34" charset="-122"/>
                 <a:cs typeface="Times New Roman" pitchFamily="34" charset="-120"/>
               </a:rPr>
-              <a:t>Trees and birds (also fish, grass).</a:t>
+              <a:t>Trees and birds (also fish and grass).</a:t>
             </a:r>
             <a:endParaRPr lang="en-US" sz="4000" dirty="0"/>
           </a:p>
@@ -9285,7 +9819,7 @@
                 <a:ea typeface="Times New Roman" pitchFamily="34" charset="-122"/>
                 <a:cs typeface="Times New Roman" pitchFamily="34" charset="-120"/>
               </a:rPr>
-              <a:t>Grass, trees, animals, the soil and the sky (air and climate).</a:t>
+              <a:t>Grass, trees, animals, the soil and the sky.</a:t>
             </a:r>
             <a:endParaRPr lang="en-US" sz="4000" dirty="0"/>
           </a:p>
@@ -9397,7 +9931,7 @@
                 <a:ea typeface="Calibri" pitchFamily="34" charset="-122"/>
                 <a:cs typeface="Calibri" pitchFamily="34" charset="-120"/>
               </a:rPr>
-              <a:t>2. COMPONENTS: CLIMATE AND DRAINAGE</a:t>
+              <a:t>1. MEANING OF THE ENVIRONMENT</a:t>
             </a:r>
             <a:endParaRPr lang="en-US" sz="1400" dirty="0"/>
           </a:p>
@@ -9444,7 +9978,7 @@
       </p:sp>
       <p:pic>
         <p:nvPicPr>
-          <p:cNvPr id="4" name="Image 0" descr="/home/claude/f4/img/v2/f2t_benue.jpg">    </p:cNvPr>
+          <p:cNvPr id="4" name="Image 0" descr="/home/claude/f4/img/v2/f2t_savanna.jpg">    </p:cNvPr>
           <p:cNvPicPr>
             <a:picLocks noChangeAspect="1"/>
           </p:cNvPicPr>
@@ -9458,8 +9992,8 @@
         </p:blipFill>
         <p:spPr>
           <a:xfrm>
-            <a:off x="2246610" y="1783080"/>
-            <a:ext cx="7698475" cy="4270248"/>
+            <a:off x="281042" y="1783080"/>
+            <a:ext cx="11629612" cy="4270248"/>
           </a:xfrm>
           <a:prstGeom prst="rect">
             <a:avLst/>
@@ -9499,7 +10033,7 @@
                 <a:ea typeface="Times New Roman" pitchFamily="34" charset="-122"/>
                 <a:cs typeface="Times New Roman" pitchFamily="34" charset="-120"/>
               </a:rPr>
-              <a:t>The River Benue.</a:t>
+              <a:t>A natural environment in the savanna.</a:t>
             </a:r>
             <a:endParaRPr lang="en-US" sz="1800" dirty="0"/>
           </a:p>
@@ -9611,7 +10145,7 @@
                 <a:ea typeface="Calibri" pitchFamily="34" charset="-122"/>
                 <a:cs typeface="Calibri" pitchFamily="34" charset="-120"/>
               </a:rPr>
-              <a:t>2. COMPONENTS: CLIMATE AND DRAINAGE</a:t>
+              <a:t>1. MEANING OF THE ENVIRONMENT</a:t>
             </a:r>
             <a:endParaRPr lang="en-US" sz="1400" dirty="0"/>
           </a:p>
@@ -9718,7 +10252,7 @@
                 <a:ea typeface="Times New Roman" pitchFamily="34" charset="-122"/>
                 <a:cs typeface="Times New Roman" pitchFamily="34" charset="-120"/>
               </a:rPr>
-              <a:t>Rivers, lakes and seas form which component of the environment?</a:t>
+              <a:t>Were these things made by people?</a:t>
             </a:r>
             <a:endParaRPr lang="en-US" sz="4000" dirty="0"/>
           </a:p>
@@ -9830,7 +10364,7 @@
                 <a:ea typeface="Calibri" pitchFamily="34" charset="-122"/>
                 <a:cs typeface="Calibri" pitchFamily="34" charset="-120"/>
               </a:rPr>
-              <a:t>2. COMPONENTS: CLIMATE AND DRAINAGE</a:t>
+              <a:t>1. MEANING OF THE ENVIRONMENT</a:t>
             </a:r>
             <a:endParaRPr lang="en-US" sz="1400" dirty="0"/>
           </a:p>
@@ -9937,7 +10471,7 @@
                 <a:ea typeface="Times New Roman" pitchFamily="34" charset="-122"/>
                 <a:cs typeface="Times New Roman" pitchFamily="34" charset="-120"/>
               </a:rPr>
-              <a:t>Drainage (water bodies).</a:t>
+              <a:t>No, they are natural: together they form the natural environment.</a:t>
             </a:r>
             <a:endParaRPr lang="en-US" sz="4000" dirty="0"/>
           </a:p>
@@ -10049,7 +10583,7 @@
                 <a:ea typeface="Calibri" pitchFamily="34" charset="-122"/>
                 <a:cs typeface="Calibri" pitchFamily="34" charset="-120"/>
               </a:rPr>
-              <a:t>2. COMPONENTS: SOIL</a:t>
+              <a:t>2. COMPONENTS: DRAINAGE</a:t>
             </a:r>
             <a:endParaRPr lang="en-US" sz="1400" dirty="0"/>
           </a:p>
@@ -10096,7 +10630,7 @@
       </p:sp>
       <p:pic>
         <p:nvPicPr>
-          <p:cNvPr id="4" name="Image 0" descr="/home/claude/f4/img/v2/f2t_black_soil.jpg">    </p:cNvPr>
+          <p:cNvPr id="4" name="Image 0" descr="/home/claude/f4/img/v2/f2t_benue.jpg">    </p:cNvPr>
           <p:cNvPicPr>
             <a:picLocks noChangeAspect="1"/>
           </p:cNvPicPr>
@@ -10151,7 +10685,7 @@
                 <a:ea typeface="Times New Roman" pitchFamily="34" charset="-122"/>
                 <a:cs typeface="Times New Roman" pitchFamily="34" charset="-120"/>
               </a:rPr>
-              <a:t>Soil.</a:t>
+              <a:t>A river.</a:t>
             </a:r>
             <a:endParaRPr lang="en-US" sz="1800" dirty="0"/>
           </a:p>
@@ -10263,7 +10797,7 @@
                 <a:ea typeface="Calibri" pitchFamily="34" charset="-122"/>
                 <a:cs typeface="Calibri" pitchFamily="34" charset="-120"/>
               </a:rPr>
-              <a:t>2. COMPONENTS: SOIL</a:t>
+              <a:t>2. COMPONENTS: DRAINAGE</a:t>
             </a:r>
             <a:endParaRPr lang="en-US" sz="1400" dirty="0"/>
           </a:p>
@@ -10370,7 +10904,7 @@
                 <a:ea typeface="Times New Roman" pitchFamily="34" charset="-122"/>
                 <a:cs typeface="Times New Roman" pitchFamily="34" charset="-120"/>
               </a:rPr>
-              <a:t>Why is the soil an important component of the environment?</a:t>
+              <a:t>Rivers, lakes and seas form which component of the environment?</a:t>
             </a:r>
             <a:endParaRPr lang="en-US" sz="4000" dirty="0"/>
           </a:p>
@@ -10482,7 +11016,7 @@
                 <a:ea typeface="Calibri" pitchFamily="34" charset="-122"/>
                 <a:cs typeface="Calibri" pitchFamily="34" charset="-120"/>
               </a:rPr>
-              <a:t>2. COMPONENTS: SOIL</a:t>
+              <a:t>2. COMPONENTS: DRAINAGE</a:t>
             </a:r>
             <a:endParaRPr lang="en-US" sz="1400" dirty="0"/>
           </a:p>
@@ -10589,7 +11123,7 @@
                 <a:ea typeface="Times New Roman" pitchFamily="34" charset="-122"/>
                 <a:cs typeface="Times New Roman" pitchFamily="34" charset="-120"/>
               </a:rPr>
-              <a:t>Plants grow in it and it gives food to people and animals.</a:t>
+              <a:t>Drainage (water bodies).</a:t>
             </a:r>
             <a:endParaRPr lang="en-US" sz="4000" dirty="0"/>
           </a:p>
@@ -11022,7 +11556,7 @@
                 <a:ea typeface="Times New Roman" pitchFamily="34" charset="-122"/>
                 <a:cs typeface="Times New Roman" pitchFamily="34" charset="-120"/>
               </a:rPr>
-              <a:t>What do we call all the plants of a place? And all the animals?</a:t>
+              <a:t>What do we call all the animals of a place?</a:t>
             </a:r>
             <a:endParaRPr lang="en-US" sz="4000" dirty="0"/>
           </a:p>
@@ -11241,7 +11775,7 @@
                 <a:ea typeface="Times New Roman" pitchFamily="34" charset="-122"/>
                 <a:cs typeface="Times New Roman" pitchFamily="34" charset="-120"/>
               </a:rPr>
-              <a:t>Flora (plants) and fauna (animals).</a:t>
+              <a:t>Fauna.</a:t>
             </a:r>
             <a:endParaRPr lang="en-US" sz="4000" dirty="0"/>
           </a:p>
@@ -12062,7 +12596,7 @@
                           <a:ea typeface="Calibri" pitchFamily="34" charset="-122"/>
                           <a:cs typeface="Calibri" pitchFamily="34" charset="-120"/>
                         </a:rPr>
-                        <a:t>Definition of the natural environment; its components; ecosystems.</a:t>
+                        <a:t>Definition of the natural environment; components; ecosystems.</a:t>
                       </a:r>
                       <a:endParaRPr lang="en-US" sz="1700" dirty="0">
                         <a:latin typeface="Calibri" charset="0"/>
@@ -12464,7 +12998,7 @@
                 <a:ea typeface="Times New Roman" pitchFamily="34" charset="-122"/>
                 <a:cs typeface="Times New Roman" pitchFamily="34" charset="-120"/>
               </a:rPr>
-              <a:t>The components of an ecosystem.</a:t>
+              <a:t>Living and non-living things together.</a:t>
             </a:r>
             <a:endParaRPr lang="en-US" sz="1800" dirty="0"/>
           </a:p>
@@ -12683,7 +13217,7 @@
                 <a:ea typeface="Times New Roman" pitchFamily="34" charset="-122"/>
                 <a:cs typeface="Times New Roman" pitchFamily="34" charset="-120"/>
               </a:rPr>
-              <a:t>What is an ecosystem?</a:t>
+              <a:t>How do the animals depend on the plants and the soil?</a:t>
             </a:r>
             <a:endParaRPr lang="en-US" sz="4000" dirty="0"/>
           </a:p>
@@ -12902,7 +13436,7 @@
                 <a:ea typeface="Times New Roman" pitchFamily="34" charset="-122"/>
                 <a:cs typeface="Times New Roman" pitchFamily="34" charset="-120"/>
               </a:rPr>
-              <a:t>A community of living things and their non-living surroundings that depend on one another.</a:t>
+              <a:t>Animals eat plants, and plants grow in the soil: they depend on one another in an ecosystem.</a:t>
             </a:r>
             <a:endParaRPr lang="en-US" sz="4000" dirty="0"/>
           </a:p>
@@ -13296,7 +13830,7 @@
         <p:spPr>
           <a:xfrm>
             <a:off x="0" y="658368"/>
-            <a:ext cx="5120640" cy="5833872"/>
+            <a:ext cx="1463040" cy="5833872"/>
           </a:xfrm>
           <a:prstGeom prst="rect">
             <a:avLst/>
@@ -13311,8 +13845,8 @@
         </p:nvSpPr>
         <p:spPr>
           <a:xfrm>
-            <a:off x="5349240" y="1005840"/>
-            <a:ext cx="6522415" cy="731520"/>
+            <a:off x="1691640" y="1005840"/>
+            <a:ext cx="10180015" cy="731520"/>
           </a:xfrm>
           <a:prstGeom prst="rect">
             <a:avLst/>
@@ -13338,7 +13872,7 @@
                 <a:ea typeface="Times New Roman" pitchFamily="34" charset="-122"/>
                 <a:cs typeface="Times New Roman" pitchFamily="34" charset="-120"/>
               </a:rPr>
-              <a:t>1. Meaning of the Natural Environment</a:t>
+              <a:t>DEFINITIONS</a:t>
             </a:r>
             <a:endParaRPr lang="en-US" sz="3600" dirty="0"/>
           </a:p>
@@ -13352,8 +13886,8 @@
         </p:nvSpPr>
         <p:spPr>
           <a:xfrm>
-            <a:off x="5349240" y="1783080"/>
-            <a:ext cx="6522415" cy="4663440"/>
+            <a:off x="1691640" y="1783080"/>
+            <a:ext cx="10180015" cy="4663440"/>
           </a:xfrm>
           <a:prstGeom prst="rect">
             <a:avLst/>
@@ -13380,7 +13914,44 @@
                 <a:ea typeface="Times New Roman" pitchFamily="34" charset="-122"/>
                 <a:cs typeface="Times New Roman" pitchFamily="34" charset="-120"/>
               </a:rPr>
-              <a:t>The natural environment is defined as follows:</a:t>
+              <a:t>The key terms of this lesson are defined as follows:</a:t>
+            </a:r>
+            <a:endParaRPr lang="en-US" sz="4000" dirty="0"/>
+          </a:p>
+          <a:p>
+            <a:pPr algn="l" indent="0" marL="0">
+              <a:spcAft>
+                <a:spcPts val="800"/>
+              </a:spcAft>
+              <a:buNone/>
+            </a:pPr>
+            <a:r>
+              <a:rPr lang="en-US" sz="4000" b="1" dirty="0">
+                <a:solidFill>
+                  <a:srgbClr val="111111"/>
+                </a:solidFill>
+                <a:latin typeface="Times New Roman" pitchFamily="34" charset="0"/>
+                <a:ea typeface="Times New Roman" pitchFamily="34" charset="-122"/>
+                <a:cs typeface="Times New Roman" pitchFamily="34" charset="-120"/>
+              </a:rPr>
+              <a:t>Environment: </a:t>
+            </a:r>
+            <a:pPr algn="l" indent="0" marL="0">
+              <a:spcAft>
+                <a:spcPts val="800"/>
+              </a:spcAft>
+              <a:buNone/>
+            </a:pPr>
+            <a:r>
+              <a:rPr lang="en-US" sz="4000" dirty="0">
+                <a:solidFill>
+                  <a:srgbClr val="111111"/>
+                </a:solidFill>
+                <a:latin typeface="Times New Roman" pitchFamily="34" charset="0"/>
+                <a:ea typeface="Times New Roman" pitchFamily="34" charset="-122"/>
+                <a:cs typeface="Times New Roman" pitchFamily="34" charset="-120"/>
+              </a:rPr>
+              <a:t>It is everything that surrounds us.</a:t>
             </a:r>
             <a:endParaRPr lang="en-US" sz="4000" dirty="0"/>
           </a:p>
@@ -13594,7 +14165,7 @@
                 <a:ea typeface="Times New Roman" pitchFamily="34" charset="-122"/>
                 <a:cs typeface="Times New Roman" pitchFamily="34" charset="-120"/>
               </a:rPr>
-              <a:t>2. Components of the Natural Environment</a:t>
+              <a:t>DEFINITIONS (continued)</a:t>
             </a:r>
             <a:endParaRPr lang="en-US" sz="3600" dirty="0"/>
           </a:p>
@@ -13628,7 +14199,7 @@
               <a:buNone/>
             </a:pPr>
             <a:r>
-              <a:rPr lang="en-US" sz="4000" i="1" dirty="0">
+              <a:rPr lang="en-US" sz="4000" b="1" dirty="0">
                 <a:solidFill>
                   <a:srgbClr val="111111"/>
                 </a:solidFill>
@@ -13636,11 +14207,8 @@
                 <a:ea typeface="Times New Roman" pitchFamily="34" charset="-122"/>
                 <a:cs typeface="Times New Roman" pitchFamily="34" charset="-120"/>
               </a:rPr>
-              <a:t>The natural environment has the following components:</a:t>
-            </a:r>
-            <a:endParaRPr lang="en-US" sz="4000" dirty="0"/>
-          </a:p>
-          <a:p>
+              <a:t>Resources: </a:t>
+            </a:r>
             <a:pPr algn="l" indent="0" marL="0">
               <a:spcAft>
                 <a:spcPts val="800"/>
@@ -13648,7 +14216,7 @@
               <a:buNone/>
             </a:pPr>
             <a:r>
-              <a:rPr lang="en-US" sz="4000" b="1" dirty="0">
+              <a:rPr lang="en-US" sz="4000" dirty="0">
                 <a:solidFill>
                   <a:srgbClr val="111111"/>
                 </a:solidFill>
@@ -13656,24 +14224,7 @@
                 <a:ea typeface="Times New Roman" pitchFamily="34" charset="-122"/>
                 <a:cs typeface="Times New Roman" pitchFamily="34" charset="-120"/>
               </a:rPr>
-              <a:t>Climate: </a:t>
-            </a:r>
-            <a:pPr algn="l" indent="0" marL="0">
-              <a:spcAft>
-                <a:spcPts val="800"/>
-              </a:spcAft>
-              <a:buNone/>
-            </a:pPr>
-            <a:r>
-              <a:rPr lang="en-US" sz="4000" dirty="0">
-                <a:solidFill>
-                  <a:srgbClr val="111111"/>
-                </a:solidFill>
-                <a:latin typeface="Times New Roman" pitchFamily="34" charset="0"/>
-                <a:ea typeface="Times New Roman" pitchFamily="34" charset="-122"/>
-                <a:cs typeface="Times New Roman" pitchFamily="34" charset="-120"/>
-              </a:rPr>
-              <a:t>It is the average weather of a place, with its temperature, rainfall and winds.</a:t>
+              <a:t>They are the useful things that people get from the environment, such as water, soil and wood.</a:t>
             </a:r>
             <a:endParaRPr lang="en-US" sz="4000" dirty="0"/>
           </a:p>
@@ -13791,9 +14342,129 @@
           </a:p>
         </p:txBody>
       </p:sp>
+      <p:sp>
+        <p:nvSpPr>
+          <p:cNvPr id="3" name="Text 1"/>
+          <p:cNvSpPr/>
+          <p:nvPr/>
+        </p:nvSpPr>
+        <p:spPr>
+          <a:xfrm>
+            <a:off x="365760" y="1005840"/>
+            <a:ext cx="11460175" cy="731520"/>
+          </a:xfrm>
+          <a:prstGeom prst="rect">
+            <a:avLst/>
+          </a:prstGeom>
+          <a:noFill/>
+          <a:ln/>
+        </p:spPr>
+        <p:txBody>
+          <a:bodyPr wrap="square" lIns="0" tIns="0" rIns="0" bIns="0" rtlCol="0" anchor="ctr">
+            <a:normAutofit/>
+          </a:bodyPr>
+          <a:lstStyle/>
+          <a:p>
+            <a:pPr algn="ctr" indent="0" marL="0">
+              <a:buNone/>
+            </a:pPr>
+            <a:r>
+              <a:rPr lang="en-US" sz="3600" b="1" dirty="0">
+                <a:solidFill>
+                  <a:srgbClr val="990011"/>
+                </a:solidFill>
+                <a:latin typeface="Times New Roman" pitchFamily="34" charset="0"/>
+                <a:ea typeface="Times New Roman" pitchFamily="34" charset="-122"/>
+                <a:cs typeface="Times New Roman" pitchFamily="34" charset="-120"/>
+              </a:rPr>
+              <a:t>1. Components of the Natural Environment</a:t>
+            </a:r>
+            <a:endParaRPr lang="en-US" sz="3600" dirty="0"/>
+          </a:p>
+        </p:txBody>
+      </p:sp>
+      <p:sp>
+        <p:nvSpPr>
+          <p:cNvPr id="4" name="Text 2"/>
+          <p:cNvSpPr/>
+          <p:nvPr/>
+        </p:nvSpPr>
+        <p:spPr>
+          <a:xfrm>
+            <a:off x="365760" y="1783080"/>
+            <a:ext cx="4846320" cy="4617720"/>
+          </a:xfrm>
+          <a:prstGeom prst="rect">
+            <a:avLst/>
+          </a:prstGeom>
+          <a:noFill/>
+          <a:ln/>
+        </p:spPr>
+        <p:txBody>
+          <a:bodyPr wrap="square" lIns="0" tIns="0" rIns="0" bIns="0" rtlCol="0" anchor="t"/>
+          <a:lstStyle/>
+          <a:p>
+            <a:pPr algn="l" indent="0" marL="0">
+              <a:spcAft>
+                <a:spcPts val="800"/>
+              </a:spcAft>
+              <a:buNone/>
+            </a:pPr>
+            <a:r>
+              <a:rPr lang="en-US" sz="3600" i="1" dirty="0">
+                <a:solidFill>
+                  <a:srgbClr val="111111"/>
+                </a:solidFill>
+                <a:latin typeface="Times New Roman" pitchFamily="34" charset="0"/>
+                <a:ea typeface="Times New Roman" pitchFamily="34" charset="-122"/>
+                <a:cs typeface="Times New Roman" pitchFamily="34" charset="-120"/>
+              </a:rPr>
+              <a:t>The natural environment has the following components:</a:t>
+            </a:r>
+            <a:endParaRPr lang="en-US" sz="3600" dirty="0"/>
+          </a:p>
+          <a:p>
+            <a:pPr algn="l" indent="0" marL="0">
+              <a:spcAft>
+                <a:spcPts val="800"/>
+              </a:spcAft>
+              <a:buNone/>
+            </a:pPr>
+            <a:r>
+              <a:rPr lang="en-US" sz="3600" b="1" dirty="0">
+                <a:solidFill>
+                  <a:srgbClr val="111111"/>
+                </a:solidFill>
+                <a:latin typeface="Times New Roman" pitchFamily="34" charset="0"/>
+                <a:ea typeface="Times New Roman" pitchFamily="34" charset="-122"/>
+                <a:cs typeface="Times New Roman" pitchFamily="34" charset="-120"/>
+              </a:rPr>
+              <a:t>Climate: </a:t>
+            </a:r>
+            <a:pPr algn="l" indent="0" marL="0">
+              <a:spcAft>
+                <a:spcPts val="800"/>
+              </a:spcAft>
+              <a:buNone/>
+            </a:pPr>
+            <a:r>
+              <a:rPr lang="en-US" sz="3600" dirty="0">
+                <a:solidFill>
+                  <a:srgbClr val="111111"/>
+                </a:solidFill>
+                <a:latin typeface="Times New Roman" pitchFamily="34" charset="0"/>
+                <a:ea typeface="Times New Roman" pitchFamily="34" charset="-122"/>
+                <a:cs typeface="Times New Roman" pitchFamily="34" charset="-120"/>
+              </a:rPr>
+              <a:t>It is the average weather of a place over a long time, with its temperature, rainfall and winds.</a:t>
+            </a:r>
+            <a:endParaRPr lang="en-US" sz="3600" dirty="0"/>
+          </a:p>
+        </p:txBody>
+      </p:sp>
       <p:pic>
         <p:nvPicPr>
-          <p:cNvPr id="3" name="Image 0" descr="/home/claude/f4/img/minesec_sheet.png">    </p:cNvPr>
+          <p:cNvPr id="5" name="Image 0" descr="/home/claude/f4/img/v2/cameroon_climate_big.png">    </p:cNvPr>
           <p:cNvPicPr>
             <a:picLocks noChangeAspect="1"/>
           </p:cNvPicPr>
@@ -13807,8 +14478,8 @@
         </p:blipFill>
         <p:spPr>
           <a:xfrm>
-            <a:off x="0" y="658368"/>
-            <a:ext cx="3840480" cy="5833872"/>
+            <a:off x="5349240" y="2253310"/>
+            <a:ext cx="6659575" cy="3329788"/>
           </a:xfrm>
           <a:prstGeom prst="rect">
             <a:avLst/>
@@ -13817,14 +14488,14 @@
       </p:pic>
       <p:sp>
         <p:nvSpPr>
-          <p:cNvPr id="4" name="Text 1"/>
+          <p:cNvPr id="6" name="Text 3"/>
           <p:cNvSpPr/>
           <p:nvPr/>
         </p:nvSpPr>
         <p:spPr>
           <a:xfrm>
-            <a:off x="4069080" y="1005840"/>
-            <a:ext cx="7802575" cy="731520"/>
+            <a:off x="5349240" y="6089904"/>
+            <a:ext cx="6659575" cy="347472"/>
           </a:xfrm>
           <a:prstGeom prst="rect">
             <a:avLst/>
@@ -13833,159 +14504,24 @@
           <a:ln/>
         </p:spPr>
         <p:txBody>
-          <a:bodyPr wrap="square" lIns="0" tIns="0" rIns="0" bIns="0" rtlCol="0" anchor="ctr">
-            <a:normAutofit/>
-          </a:bodyPr>
+          <a:bodyPr wrap="square" lIns="0" tIns="0" rIns="0" bIns="0" rtlCol="0" anchor="ctr"/>
           <a:lstStyle/>
           <a:p>
             <a:pPr algn="ctr" indent="0" marL="0">
               <a:buNone/>
             </a:pPr>
             <a:r>
-              <a:rPr lang="en-US" sz="3600" b="1" dirty="0">
-                <a:solidFill>
-                  <a:srgbClr val="990011"/>
+              <a:rPr lang="en-US" sz="1600" i="1" dirty="0">
+                <a:solidFill>
+                  <a:srgbClr val="555555"/>
                 </a:solidFill>
                 <a:latin typeface="Times New Roman" pitchFamily="34" charset="0"/>
                 <a:ea typeface="Times New Roman" pitchFamily="34" charset="-122"/>
                 <a:cs typeface="Times New Roman" pitchFamily="34" charset="-120"/>
               </a:rPr>
-              <a:t>2. Components of the Natural Environment (continued)</a:t>
-            </a:r>
-            <a:endParaRPr lang="en-US" sz="3600" dirty="0"/>
-          </a:p>
-        </p:txBody>
-      </p:sp>
-      <p:sp>
-        <p:nvSpPr>
-          <p:cNvPr id="5" name="Text 2"/>
-          <p:cNvSpPr/>
-          <p:nvPr/>
-        </p:nvSpPr>
-        <p:spPr>
-          <a:xfrm>
-            <a:off x="4069080" y="1783080"/>
-            <a:ext cx="7802575" cy="4663440"/>
-          </a:xfrm>
-          <a:prstGeom prst="rect">
-            <a:avLst/>
-          </a:prstGeom>
-          <a:noFill/>
-          <a:ln/>
-        </p:spPr>
-        <p:txBody>
-          <a:bodyPr wrap="square" lIns="0" tIns="0" rIns="0" bIns="0" rtlCol="0" anchor="t"/>
-          <a:lstStyle/>
-          <a:p>
-            <a:pPr algn="l" indent="0" marL="0">
-              <a:spcAft>
-                <a:spcPts val="800"/>
-              </a:spcAft>
-              <a:buNone/>
-            </a:pPr>
-            <a:r>
-              <a:rPr lang="en-US" sz="4000" b="1" dirty="0">
-                <a:solidFill>
-                  <a:srgbClr val="111111"/>
-                </a:solidFill>
-                <a:latin typeface="Times New Roman" pitchFamily="34" charset="0"/>
-                <a:ea typeface="Times New Roman" pitchFamily="34" charset="-122"/>
-                <a:cs typeface="Times New Roman" pitchFamily="34" charset="-120"/>
-              </a:rPr>
-              <a:t>Relief and soil: </a:t>
-            </a:r>
-            <a:pPr algn="l" indent="0" marL="0">
-              <a:spcAft>
-                <a:spcPts val="800"/>
-              </a:spcAft>
-              <a:buNone/>
-            </a:pPr>
-            <a:r>
-              <a:rPr lang="en-US" sz="4000" dirty="0">
-                <a:solidFill>
-                  <a:srgbClr val="111111"/>
-                </a:solidFill>
-                <a:latin typeface="Times New Roman" pitchFamily="34" charset="0"/>
-                <a:ea typeface="Times New Roman" pitchFamily="34" charset="-122"/>
-                <a:cs typeface="Times New Roman" pitchFamily="34" charset="-120"/>
-              </a:rPr>
-              <a:t>Relief is the shape of the land and soil is the top layer where plants grow.</a:t>
-            </a:r>
-            <a:endParaRPr lang="en-US" sz="4000" dirty="0"/>
-          </a:p>
-          <a:p>
-            <a:pPr algn="l" indent="0" marL="0">
-              <a:spcAft>
-                <a:spcPts val="800"/>
-              </a:spcAft>
-              <a:buNone/>
-            </a:pPr>
-            <a:r>
-              <a:rPr lang="en-US" sz="4000" b="1" dirty="0">
-                <a:solidFill>
-                  <a:srgbClr val="111111"/>
-                </a:solidFill>
-                <a:latin typeface="Times New Roman" pitchFamily="34" charset="0"/>
-                <a:ea typeface="Times New Roman" pitchFamily="34" charset="-122"/>
-                <a:cs typeface="Times New Roman" pitchFamily="34" charset="-120"/>
-              </a:rPr>
-              <a:t>Drainage: </a:t>
-            </a:r>
-            <a:pPr algn="l" indent="0" marL="0">
-              <a:spcAft>
-                <a:spcPts val="800"/>
-              </a:spcAft>
-              <a:buNone/>
-            </a:pPr>
-            <a:r>
-              <a:rPr lang="en-US" sz="4000" dirty="0">
-                <a:solidFill>
-                  <a:srgbClr val="111111"/>
-                </a:solidFill>
-                <a:latin typeface="Times New Roman" pitchFamily="34" charset="0"/>
-                <a:ea typeface="Times New Roman" pitchFamily="34" charset="-122"/>
-                <a:cs typeface="Times New Roman" pitchFamily="34" charset="-120"/>
-              </a:rPr>
-              <a:t>It is all the rivers, lakes and seas of a place.</a:t>
-            </a:r>
-            <a:endParaRPr lang="en-US" sz="4000" dirty="0"/>
-          </a:p>
-          <a:p>
-            <a:pPr algn="l" indent="0" marL="0">
-              <a:spcAft>
-                <a:spcPts val="800"/>
-              </a:spcAft>
-              <a:buNone/>
-            </a:pPr>
-            <a:r>
-              <a:rPr lang="en-US" sz="4000" b="1" dirty="0">
-                <a:solidFill>
-                  <a:srgbClr val="111111"/>
-                </a:solidFill>
-                <a:latin typeface="Times New Roman" pitchFamily="34" charset="0"/>
-                <a:ea typeface="Times New Roman" pitchFamily="34" charset="-122"/>
-                <a:cs typeface="Times New Roman" pitchFamily="34" charset="-120"/>
-              </a:rPr>
-              <a:t>Flora: </a:t>
-            </a:r>
-            <a:pPr algn="l" indent="0" marL="0">
-              <a:spcAft>
-                <a:spcPts val="800"/>
-              </a:spcAft>
-              <a:buNone/>
-            </a:pPr>
-            <a:r>
-              <a:rPr lang="en-US" sz="4000" dirty="0">
-                <a:solidFill>
-                  <a:srgbClr val="111111"/>
-                </a:solidFill>
-                <a:latin typeface="Times New Roman" pitchFamily="34" charset="0"/>
-                <a:ea typeface="Times New Roman" pitchFamily="34" charset="-122"/>
-                <a:cs typeface="Times New Roman" pitchFamily="34" charset="-120"/>
-              </a:rPr>
-              <a:t>It is all the plants (vegetation) of a place.</a:t>
-            </a:r>
-            <a:endParaRPr lang="en-US" sz="4000" dirty="0"/>
+              <a:t>Illustration: the climates of Cameroon</a:t>
+            </a:r>
+            <a:endParaRPr lang="en-US" sz="1600" dirty="0"/>
           </a:p>
         </p:txBody>
       </p:sp>
@@ -14101,9 +14637,109 @@
           </a:p>
         </p:txBody>
       </p:sp>
+      <p:sp>
+        <p:nvSpPr>
+          <p:cNvPr id="3" name="Text 1"/>
+          <p:cNvSpPr/>
+          <p:nvPr/>
+        </p:nvSpPr>
+        <p:spPr>
+          <a:xfrm>
+            <a:off x="365760" y="1005840"/>
+            <a:ext cx="11460175" cy="731520"/>
+          </a:xfrm>
+          <a:prstGeom prst="rect">
+            <a:avLst/>
+          </a:prstGeom>
+          <a:noFill/>
+          <a:ln/>
+        </p:spPr>
+        <p:txBody>
+          <a:bodyPr wrap="square" lIns="0" tIns="0" rIns="0" bIns="0" rtlCol="0" anchor="ctr">
+            <a:normAutofit/>
+          </a:bodyPr>
+          <a:lstStyle/>
+          <a:p>
+            <a:pPr algn="ctr" indent="0" marL="0">
+              <a:buNone/>
+            </a:pPr>
+            <a:r>
+              <a:rPr lang="en-US" sz="3600" b="1" dirty="0">
+                <a:solidFill>
+                  <a:srgbClr val="990011"/>
+                </a:solidFill>
+                <a:latin typeface="Times New Roman" pitchFamily="34" charset="0"/>
+                <a:ea typeface="Times New Roman" pitchFamily="34" charset="-122"/>
+                <a:cs typeface="Times New Roman" pitchFamily="34" charset="-120"/>
+              </a:rPr>
+              <a:t>1. Components of the Natural Environment</a:t>
+            </a:r>
+            <a:endParaRPr lang="en-US" sz="3600" dirty="0"/>
+          </a:p>
+        </p:txBody>
+      </p:sp>
+      <p:sp>
+        <p:nvSpPr>
+          <p:cNvPr id="4" name="Text 2"/>
+          <p:cNvSpPr/>
+          <p:nvPr/>
+        </p:nvSpPr>
+        <p:spPr>
+          <a:xfrm>
+            <a:off x="365760" y="1783080"/>
+            <a:ext cx="4846320" cy="4617720"/>
+          </a:xfrm>
+          <a:prstGeom prst="rect">
+            <a:avLst/>
+          </a:prstGeom>
+          <a:noFill/>
+          <a:ln/>
+        </p:spPr>
+        <p:txBody>
+          <a:bodyPr wrap="square" lIns="0" tIns="0" rIns="0" bIns="0" rtlCol="0" anchor="t"/>
+          <a:lstStyle/>
+          <a:p>
+            <a:pPr algn="l" indent="0" marL="0">
+              <a:spcAft>
+                <a:spcPts val="800"/>
+              </a:spcAft>
+              <a:buNone/>
+            </a:pPr>
+            <a:r>
+              <a:rPr lang="en-US" sz="3600" b="1" dirty="0">
+                <a:solidFill>
+                  <a:srgbClr val="111111"/>
+                </a:solidFill>
+                <a:latin typeface="Times New Roman" pitchFamily="34" charset="0"/>
+                <a:ea typeface="Times New Roman" pitchFamily="34" charset="-122"/>
+                <a:cs typeface="Times New Roman" pitchFamily="34" charset="-120"/>
+              </a:rPr>
+              <a:t>Relief: </a:t>
+            </a:r>
+            <a:pPr algn="l" indent="0" marL="0">
+              <a:spcAft>
+                <a:spcPts val="800"/>
+              </a:spcAft>
+              <a:buNone/>
+            </a:pPr>
+            <a:r>
+              <a:rPr lang="en-US" sz="3600" dirty="0">
+                <a:solidFill>
+                  <a:srgbClr val="111111"/>
+                </a:solidFill>
+                <a:latin typeface="Times New Roman" pitchFamily="34" charset="0"/>
+                <a:ea typeface="Times New Roman" pitchFamily="34" charset="-122"/>
+                <a:cs typeface="Times New Roman" pitchFamily="34" charset="-120"/>
+              </a:rPr>
+              <a:t>It is the shape of the land: mountains, plateaux, plains and valleys.</a:t>
+            </a:r>
+            <a:endParaRPr lang="en-US" sz="3600" dirty="0"/>
+          </a:p>
+        </p:txBody>
+      </p:sp>
       <p:pic>
         <p:nvPicPr>
-          <p:cNvPr id="3" name="Image 0" descr="/home/claude/f4/img/minesec_sheet.png">    </p:cNvPr>
+          <p:cNvPr id="5" name="Image 0" descr="/home/claude/f4/img/v2/cameroon_relief_big.png">    </p:cNvPr>
           <p:cNvPicPr>
             <a:picLocks noChangeAspect="1"/>
           </p:cNvPicPr>
@@ -14117,8 +14753,8 @@
         </p:blipFill>
         <p:spPr>
           <a:xfrm>
-            <a:off x="0" y="658368"/>
-            <a:ext cx="5120640" cy="5833872"/>
+            <a:off x="5349240" y="2045198"/>
+            <a:ext cx="6659575" cy="3746011"/>
           </a:xfrm>
           <a:prstGeom prst="rect">
             <a:avLst/>
@@ -14127,14 +14763,14 @@
       </p:pic>
       <p:sp>
         <p:nvSpPr>
-          <p:cNvPr id="4" name="Text 1"/>
+          <p:cNvPr id="6" name="Text 3"/>
           <p:cNvSpPr/>
           <p:nvPr/>
         </p:nvSpPr>
         <p:spPr>
           <a:xfrm>
-            <a:off x="5349240" y="1005840"/>
-            <a:ext cx="6522415" cy="731520"/>
+            <a:off x="5349240" y="6089904"/>
+            <a:ext cx="6659575" cy="347472"/>
           </a:xfrm>
           <a:prstGeom prst="rect">
             <a:avLst/>
@@ -14143,85 +14779,24 @@
           <a:ln/>
         </p:spPr>
         <p:txBody>
-          <a:bodyPr wrap="square" lIns="0" tIns="0" rIns="0" bIns="0" rtlCol="0" anchor="ctr">
-            <a:normAutofit/>
-          </a:bodyPr>
+          <a:bodyPr wrap="square" lIns="0" tIns="0" rIns="0" bIns="0" rtlCol="0" anchor="ctr"/>
           <a:lstStyle/>
           <a:p>
             <a:pPr algn="ctr" indent="0" marL="0">
               <a:buNone/>
             </a:pPr>
             <a:r>
-              <a:rPr lang="en-US" sz="3600" b="1" dirty="0">
-                <a:solidFill>
-                  <a:srgbClr val="990011"/>
+              <a:rPr lang="en-US" sz="1600" i="1" dirty="0">
+                <a:solidFill>
+                  <a:srgbClr val="555555"/>
                 </a:solidFill>
                 <a:latin typeface="Times New Roman" pitchFamily="34" charset="0"/>
                 <a:ea typeface="Times New Roman" pitchFamily="34" charset="-122"/>
                 <a:cs typeface="Times New Roman" pitchFamily="34" charset="-120"/>
               </a:rPr>
-              <a:t>2. Components of the Natural Environment (continued)</a:t>
-            </a:r>
-            <a:endParaRPr lang="en-US" sz="3600" dirty="0"/>
-          </a:p>
-        </p:txBody>
-      </p:sp>
-      <p:sp>
-        <p:nvSpPr>
-          <p:cNvPr id="5" name="Text 2"/>
-          <p:cNvSpPr/>
-          <p:nvPr/>
-        </p:nvSpPr>
-        <p:spPr>
-          <a:xfrm>
-            <a:off x="5349240" y="1783080"/>
-            <a:ext cx="6522415" cy="4663440"/>
-          </a:xfrm>
-          <a:prstGeom prst="rect">
-            <a:avLst/>
-          </a:prstGeom>
-          <a:noFill/>
-          <a:ln/>
-        </p:spPr>
-        <p:txBody>
-          <a:bodyPr wrap="square" lIns="0" tIns="0" rIns="0" bIns="0" rtlCol="0" anchor="t"/>
-          <a:lstStyle/>
-          <a:p>
-            <a:pPr algn="l" indent="0" marL="0">
-              <a:spcAft>
-                <a:spcPts val="800"/>
-              </a:spcAft>
-              <a:buNone/>
-            </a:pPr>
-            <a:r>
-              <a:rPr lang="en-US" sz="4000" b="1" dirty="0">
-                <a:solidFill>
-                  <a:srgbClr val="111111"/>
-                </a:solidFill>
-                <a:latin typeface="Times New Roman" pitchFamily="34" charset="0"/>
-                <a:ea typeface="Times New Roman" pitchFamily="34" charset="-122"/>
-                <a:cs typeface="Times New Roman" pitchFamily="34" charset="-120"/>
-              </a:rPr>
-              <a:t>Fauna: </a:t>
-            </a:r>
-            <a:pPr algn="l" indent="0" marL="0">
-              <a:spcAft>
-                <a:spcPts val="800"/>
-              </a:spcAft>
-              <a:buNone/>
-            </a:pPr>
-            <a:r>
-              <a:rPr lang="en-US" sz="4000" dirty="0">
-                <a:solidFill>
-                  <a:srgbClr val="111111"/>
-                </a:solidFill>
-                <a:latin typeface="Times New Roman" pitchFamily="34" charset="0"/>
-                <a:ea typeface="Times New Roman" pitchFamily="34" charset="-122"/>
-                <a:cs typeface="Times New Roman" pitchFamily="34" charset="-120"/>
-              </a:rPr>
-              <a:t>It is all the animals of a place.</a:t>
-            </a:r>
-            <a:endParaRPr lang="en-US" sz="4000" dirty="0"/>
+              <a:t>Illustration: the relief of Cameroon</a:t>
+            </a:r>
+            <a:endParaRPr lang="en-US" sz="1600" dirty="0"/>
           </a:p>
         </p:txBody>
       </p:sp>
@@ -14337,9 +14912,109 @@
           </a:p>
         </p:txBody>
       </p:sp>
+      <p:sp>
+        <p:nvSpPr>
+          <p:cNvPr id="3" name="Text 1"/>
+          <p:cNvSpPr/>
+          <p:nvPr/>
+        </p:nvSpPr>
+        <p:spPr>
+          <a:xfrm>
+            <a:off x="365760" y="1005840"/>
+            <a:ext cx="11460175" cy="731520"/>
+          </a:xfrm>
+          <a:prstGeom prst="rect">
+            <a:avLst/>
+          </a:prstGeom>
+          <a:noFill/>
+          <a:ln/>
+        </p:spPr>
+        <p:txBody>
+          <a:bodyPr wrap="square" lIns="0" tIns="0" rIns="0" bIns="0" rtlCol="0" anchor="ctr">
+            <a:normAutofit/>
+          </a:bodyPr>
+          <a:lstStyle/>
+          <a:p>
+            <a:pPr algn="ctr" indent="0" marL="0">
+              <a:buNone/>
+            </a:pPr>
+            <a:r>
+              <a:rPr lang="en-US" sz="3600" b="1" dirty="0">
+                <a:solidFill>
+                  <a:srgbClr val="990011"/>
+                </a:solidFill>
+                <a:latin typeface="Times New Roman" pitchFamily="34" charset="0"/>
+                <a:ea typeface="Times New Roman" pitchFamily="34" charset="-122"/>
+                <a:cs typeface="Times New Roman" pitchFamily="34" charset="-120"/>
+              </a:rPr>
+              <a:t>1. Components of the Natural Environment</a:t>
+            </a:r>
+            <a:endParaRPr lang="en-US" sz="3600" dirty="0"/>
+          </a:p>
+        </p:txBody>
+      </p:sp>
+      <p:sp>
+        <p:nvSpPr>
+          <p:cNvPr id="4" name="Text 2"/>
+          <p:cNvSpPr/>
+          <p:nvPr/>
+        </p:nvSpPr>
+        <p:spPr>
+          <a:xfrm>
+            <a:off x="365760" y="1783080"/>
+            <a:ext cx="4846320" cy="4617720"/>
+          </a:xfrm>
+          <a:prstGeom prst="rect">
+            <a:avLst/>
+          </a:prstGeom>
+          <a:noFill/>
+          <a:ln/>
+        </p:spPr>
+        <p:txBody>
+          <a:bodyPr wrap="square" lIns="0" tIns="0" rIns="0" bIns="0" rtlCol="0" anchor="t"/>
+          <a:lstStyle/>
+          <a:p>
+            <a:pPr algn="l" indent="0" marL="0">
+              <a:spcAft>
+                <a:spcPts val="800"/>
+              </a:spcAft>
+              <a:buNone/>
+            </a:pPr>
+            <a:r>
+              <a:rPr lang="en-US" sz="3600" b="1" dirty="0">
+                <a:solidFill>
+                  <a:srgbClr val="111111"/>
+                </a:solidFill>
+                <a:latin typeface="Times New Roman" pitchFamily="34" charset="0"/>
+                <a:ea typeface="Times New Roman" pitchFamily="34" charset="-122"/>
+                <a:cs typeface="Times New Roman" pitchFamily="34" charset="-120"/>
+              </a:rPr>
+              <a:t>Soil: </a:t>
+            </a:r>
+            <a:pPr algn="l" indent="0" marL="0">
+              <a:spcAft>
+                <a:spcPts val="800"/>
+              </a:spcAft>
+              <a:buNone/>
+            </a:pPr>
+            <a:r>
+              <a:rPr lang="en-US" sz="3600" dirty="0">
+                <a:solidFill>
+                  <a:srgbClr val="111111"/>
+                </a:solidFill>
+                <a:latin typeface="Times New Roman" pitchFamily="34" charset="0"/>
+                <a:ea typeface="Times New Roman" pitchFamily="34" charset="-122"/>
+                <a:cs typeface="Times New Roman" pitchFamily="34" charset="-120"/>
+              </a:rPr>
+              <a:t>It is the top layer of the land in which plants grow.</a:t>
+            </a:r>
+            <a:endParaRPr lang="en-US" sz="3600" dirty="0"/>
+          </a:p>
+        </p:txBody>
+      </p:sp>
       <p:pic>
         <p:nvPicPr>
-          <p:cNvPr id="3" name="Image 0" descr="/home/claude/f4/img/minesec_sheet.png">    </p:cNvPr>
+          <p:cNvPr id="5" name="Image 0" descr="/home/claude/f4/img/v2/f2t_black_soil.jpg">    </p:cNvPr>
           <p:cNvPicPr>
             <a:picLocks noChangeAspect="1"/>
           </p:cNvPicPr>
@@ -14353,8 +15028,8 @@
         </p:blipFill>
         <p:spPr>
           <a:xfrm>
-            <a:off x="0" y="658368"/>
-            <a:ext cx="2468880" cy="5833872"/>
+            <a:off x="5349240" y="2071212"/>
+            <a:ext cx="6659575" cy="3693983"/>
           </a:xfrm>
           <a:prstGeom prst="rect">
             <a:avLst/>
@@ -14363,14 +15038,14 @@
       </p:pic>
       <p:sp>
         <p:nvSpPr>
-          <p:cNvPr id="4" name="Text 1"/>
+          <p:cNvPr id="6" name="Text 3"/>
           <p:cNvSpPr/>
           <p:nvPr/>
         </p:nvSpPr>
         <p:spPr>
           <a:xfrm>
-            <a:off x="2697480" y="1005840"/>
-            <a:ext cx="9174175" cy="731520"/>
+            <a:off x="5349240" y="6089904"/>
+            <a:ext cx="6659575" cy="347472"/>
           </a:xfrm>
           <a:prstGeom prst="rect">
             <a:avLst/>
@@ -14379,142 +15054,24 @@
           <a:ln/>
         </p:spPr>
         <p:txBody>
-          <a:bodyPr wrap="square" lIns="0" tIns="0" rIns="0" bIns="0" rtlCol="0" anchor="ctr">
-            <a:normAutofit/>
-          </a:bodyPr>
+          <a:bodyPr wrap="square" lIns="0" tIns="0" rIns="0" bIns="0" rtlCol="0" anchor="ctr"/>
           <a:lstStyle/>
           <a:p>
             <a:pPr algn="ctr" indent="0" marL="0">
               <a:buNone/>
             </a:pPr>
             <a:r>
-              <a:rPr lang="en-US" sz="3600" b="1" dirty="0">
-                <a:solidFill>
-                  <a:srgbClr val="990011"/>
+              <a:rPr lang="en-US" sz="1600" i="1" dirty="0">
+                <a:solidFill>
+                  <a:srgbClr val="555555"/>
                 </a:solidFill>
                 <a:latin typeface="Times New Roman" pitchFamily="34" charset="0"/>
                 <a:ea typeface="Times New Roman" pitchFamily="34" charset="-122"/>
                 <a:cs typeface="Times New Roman" pitchFamily="34" charset="-120"/>
               </a:rPr>
-              <a:t>3. Ecosystems</a:t>
-            </a:r>
-            <a:endParaRPr lang="en-US" sz="3600" dirty="0"/>
-          </a:p>
-        </p:txBody>
-      </p:sp>
-      <p:sp>
-        <p:nvSpPr>
-          <p:cNvPr id="5" name="Text 2"/>
-          <p:cNvSpPr/>
-          <p:nvPr/>
-        </p:nvSpPr>
-        <p:spPr>
-          <a:xfrm>
-            <a:off x="2697480" y="1783080"/>
-            <a:ext cx="9174175" cy="4663440"/>
-          </a:xfrm>
-          <a:prstGeom prst="rect">
-            <a:avLst/>
-          </a:prstGeom>
-          <a:noFill/>
-          <a:ln/>
-        </p:spPr>
-        <p:txBody>
-          <a:bodyPr wrap="square" lIns="0" tIns="0" rIns="0" bIns="0" rtlCol="0" anchor="t"/>
-          <a:lstStyle/>
-          <a:p>
-            <a:pPr algn="l" indent="0" marL="0">
-              <a:spcAft>
-                <a:spcPts val="800"/>
-              </a:spcAft>
-              <a:buNone/>
-            </a:pPr>
-            <a:r>
-              <a:rPr lang="en-US" sz="4000" i="1" dirty="0">
-                <a:solidFill>
-                  <a:srgbClr val="111111"/>
-                </a:solidFill>
-                <a:latin typeface="Times New Roman" pitchFamily="34" charset="0"/>
-                <a:ea typeface="Times New Roman" pitchFamily="34" charset="-122"/>
-                <a:cs typeface="Times New Roman" pitchFamily="34" charset="-120"/>
-              </a:rPr>
-              <a:t>Ecosystems are explained as follows:</a:t>
-            </a:r>
-            <a:endParaRPr lang="en-US" sz="4000" dirty="0"/>
-          </a:p>
-          <a:p>
-            <a:pPr algn="l" indent="0" marL="0">
-              <a:spcAft>
-                <a:spcPts val="800"/>
-              </a:spcAft>
-              <a:buNone/>
-            </a:pPr>
-            <a:r>
-              <a:rPr lang="en-US" sz="4000" b="1" dirty="0">
-                <a:solidFill>
-                  <a:srgbClr val="111111"/>
-                </a:solidFill>
-                <a:latin typeface="Times New Roman" pitchFamily="34" charset="0"/>
-                <a:ea typeface="Times New Roman" pitchFamily="34" charset="-122"/>
-                <a:cs typeface="Times New Roman" pitchFamily="34" charset="-120"/>
-              </a:rPr>
-              <a:t>Ecosystem: </a:t>
-            </a:r>
-            <a:pPr algn="l" indent="0" marL="0">
-              <a:spcAft>
-                <a:spcPts val="800"/>
-              </a:spcAft>
-              <a:buNone/>
-            </a:pPr>
-            <a:r>
-              <a:rPr lang="en-US" sz="4000" dirty="0">
-                <a:solidFill>
-                  <a:srgbClr val="111111"/>
-                </a:solidFill>
-                <a:latin typeface="Times New Roman" pitchFamily="34" charset="0"/>
-                <a:ea typeface="Times New Roman" pitchFamily="34" charset="-122"/>
-                <a:cs typeface="Times New Roman" pitchFamily="34" charset="-120"/>
-              </a:rPr>
-              <a:t>It is a community of living things and their non-living surroundings that depend on one another.</a:t>
-            </a:r>
-            <a:endParaRPr lang="en-US" sz="4000" dirty="0"/>
-          </a:p>
-          <a:p>
-            <a:pPr algn="l" indent="0" marL="0">
-              <a:spcAft>
-                <a:spcPts val="800"/>
-              </a:spcAft>
-              <a:buNone/>
-            </a:pPr>
-            <a:r>
-              <a:rPr lang="en-US" sz="4000" b="1" dirty="0">
-                <a:solidFill>
-                  <a:srgbClr val="111111"/>
-                </a:solidFill>
-                <a:latin typeface="Times New Roman" pitchFamily="34" charset="0"/>
-                <a:ea typeface="Times New Roman" pitchFamily="34" charset="-122"/>
-                <a:cs typeface="Times New Roman" pitchFamily="34" charset="-120"/>
-              </a:rPr>
-              <a:t>Examples: </a:t>
-            </a:r>
-            <a:pPr algn="l" indent="0" marL="0">
-              <a:spcAft>
-                <a:spcPts val="800"/>
-              </a:spcAft>
-              <a:buNone/>
-            </a:pPr>
-            <a:r>
-              <a:rPr lang="en-US" sz="4000" dirty="0">
-                <a:solidFill>
-                  <a:srgbClr val="111111"/>
-                </a:solidFill>
-                <a:latin typeface="Times New Roman" pitchFamily="34" charset="0"/>
-                <a:ea typeface="Times New Roman" pitchFamily="34" charset="-122"/>
-                <a:cs typeface="Times New Roman" pitchFamily="34" charset="-120"/>
-              </a:rPr>
-              <a:t>A forest, a savanna, a lake and a river are ecosystems.</a:t>
-            </a:r>
-            <a:endParaRPr lang="en-US" sz="4000" dirty="0"/>
+              <a:t>Illustration: soil</a:t>
+            </a:r>
+            <a:endParaRPr lang="en-US" sz="1600" dirty="0"/>
           </a:p>
         </p:txBody>
       </p:sp>
@@ -14638,8 +15195,8 @@
         </p:nvSpPr>
         <p:spPr>
           <a:xfrm>
-            <a:off x="457200" y="1005840"/>
-            <a:ext cx="11277295" cy="731520"/>
+            <a:off x="365760" y="1005840"/>
+            <a:ext cx="11460175" cy="731520"/>
           </a:xfrm>
           <a:prstGeom prst="rect">
             <a:avLst/>
@@ -14648,7 +15205,9 @@
           <a:ln/>
         </p:spPr>
         <p:txBody>
-          <a:bodyPr wrap="square" lIns="0" tIns="0" rIns="0" bIns="0" rtlCol="0" anchor="ctr"/>
+          <a:bodyPr wrap="square" lIns="0" tIns="0" rIns="0" bIns="0" rtlCol="0" anchor="ctr">
+            <a:normAutofit/>
+          </a:bodyPr>
           <a:lstStyle/>
           <a:p>
             <a:pPr algn="ctr" indent="0" marL="0">
@@ -14663,7 +15222,66 @@
                 <a:ea typeface="Times New Roman" pitchFamily="34" charset="-122"/>
                 <a:cs typeface="Times New Roman" pitchFamily="34" charset="-120"/>
               </a:rPr>
-              <a:t>3. Ecosystems</a:t>
+              <a:t>1. Components of the Natural Environment</a:t>
+            </a:r>
+            <a:endParaRPr lang="en-US" sz="3600" dirty="0"/>
+          </a:p>
+        </p:txBody>
+      </p:sp>
+      <p:sp>
+        <p:nvSpPr>
+          <p:cNvPr id="4" name="Text 2"/>
+          <p:cNvSpPr/>
+          <p:nvPr/>
+        </p:nvSpPr>
+        <p:spPr>
+          <a:xfrm>
+            <a:off x="365760" y="1783080"/>
+            <a:ext cx="4846320" cy="4617720"/>
+          </a:xfrm>
+          <a:prstGeom prst="rect">
+            <a:avLst/>
+          </a:prstGeom>
+          <a:noFill/>
+          <a:ln/>
+        </p:spPr>
+        <p:txBody>
+          <a:bodyPr wrap="square" lIns="0" tIns="0" rIns="0" bIns="0" rtlCol="0" anchor="t"/>
+          <a:lstStyle/>
+          <a:p>
+            <a:pPr algn="l" indent="0" marL="0">
+              <a:spcAft>
+                <a:spcPts val="800"/>
+              </a:spcAft>
+              <a:buNone/>
+            </a:pPr>
+            <a:r>
+              <a:rPr lang="en-US" sz="3600" b="1" dirty="0">
+                <a:solidFill>
+                  <a:srgbClr val="111111"/>
+                </a:solidFill>
+                <a:latin typeface="Times New Roman" pitchFamily="34" charset="0"/>
+                <a:ea typeface="Times New Roman" pitchFamily="34" charset="-122"/>
+                <a:cs typeface="Times New Roman" pitchFamily="34" charset="-120"/>
+              </a:rPr>
+              <a:t>Drainage: </a:t>
+            </a:r>
+            <a:pPr algn="l" indent="0" marL="0">
+              <a:spcAft>
+                <a:spcPts val="800"/>
+              </a:spcAft>
+              <a:buNone/>
+            </a:pPr>
+            <a:r>
+              <a:rPr lang="en-US" sz="3600" dirty="0">
+                <a:solidFill>
+                  <a:srgbClr val="111111"/>
+                </a:solidFill>
+                <a:latin typeface="Times New Roman" pitchFamily="34" charset="0"/>
+                <a:ea typeface="Times New Roman" pitchFamily="34" charset="-122"/>
+                <a:cs typeface="Times New Roman" pitchFamily="34" charset="-120"/>
+              </a:rPr>
+              <a:t>It is all the rivers, lakes and seas of a place.</a:t>
             </a:r>
             <a:endParaRPr lang="en-US" sz="3600" dirty="0"/>
           </a:p>
@@ -14671,7 +15289,7 @@
       </p:sp>
       <p:pic>
         <p:nvPicPr>
-          <p:cNvPr id="4" name="Image 0" descr="/home/claude/f4/img/v2/ecosystem_components_big.png">    </p:cNvPr>
+          <p:cNvPr id="5" name="Image 0" descr="/home/claude/f4/img/v2/f2t_benue.jpg">    </p:cNvPr>
           <p:cNvPicPr>
             <a:picLocks noChangeAspect="1"/>
           </p:cNvPicPr>
@@ -14685,8 +15303,8 @@
         </p:blipFill>
         <p:spPr>
           <a:xfrm>
-            <a:off x="629930" y="1783080"/>
-            <a:ext cx="10931835" cy="4270248"/>
+            <a:off x="5349240" y="2071212"/>
+            <a:ext cx="6659575" cy="3693983"/>
           </a:xfrm>
           <a:prstGeom prst="rect">
             <a:avLst/>
@@ -14695,14 +15313,14 @@
       </p:pic>
       <p:sp>
         <p:nvSpPr>
-          <p:cNvPr id="5" name="Text 2"/>
+          <p:cNvPr id="6" name="Text 3"/>
           <p:cNvSpPr/>
           <p:nvPr/>
         </p:nvSpPr>
         <p:spPr>
           <a:xfrm>
-            <a:off x="457200" y="6089904"/>
-            <a:ext cx="11277295" cy="347472"/>
+            <a:off x="5349240" y="6089904"/>
+            <a:ext cx="6659575" cy="347472"/>
           </a:xfrm>
           <a:prstGeom prst="rect">
             <a:avLst/>
@@ -14718,7 +15336,7 @@
               <a:buNone/>
             </a:pPr>
             <a:r>
-              <a:rPr lang="en-US" sz="1800" i="1" dirty="0">
+              <a:rPr lang="en-US" sz="1600" i="1" dirty="0">
                 <a:solidFill>
                   <a:srgbClr val="555555"/>
                 </a:solidFill>
@@ -14726,9 +15344,9 @@
                 <a:ea typeface="Times New Roman" pitchFamily="34" charset="-122"/>
                 <a:cs typeface="Times New Roman" pitchFamily="34" charset="-120"/>
               </a:rPr>
-              <a:t>Illustration: the components of an ecosystem</a:t>
-            </a:r>
-            <a:endParaRPr lang="en-US" sz="1800" dirty="0"/>
+              <a:t>Illustration: a river</a:t>
+            </a:r>
+            <a:endParaRPr lang="en-US" sz="1600" dirty="0"/>
           </a:p>
         </p:txBody>
       </p:sp>
@@ -15077,15 +15695,115 @@
                 <a:ea typeface="Calibri" pitchFamily="34" charset="-122"/>
                 <a:cs typeface="Calibri" pitchFamily="34" charset="-120"/>
               </a:rPr>
-              <a:t>FORMATIVE EVALUATION</a:t>
+              <a:t>BOARD SUMMARY</a:t>
             </a:r>
             <a:endParaRPr lang="en-US" sz="1400" dirty="0"/>
+          </a:p>
+        </p:txBody>
+      </p:sp>
+      <p:sp>
+        <p:nvSpPr>
+          <p:cNvPr id="3" name="Text 1"/>
+          <p:cNvSpPr/>
+          <p:nvPr/>
+        </p:nvSpPr>
+        <p:spPr>
+          <a:xfrm>
+            <a:off x="365760" y="1005840"/>
+            <a:ext cx="11460175" cy="731520"/>
+          </a:xfrm>
+          <a:prstGeom prst="rect">
+            <a:avLst/>
+          </a:prstGeom>
+          <a:noFill/>
+          <a:ln/>
+        </p:spPr>
+        <p:txBody>
+          <a:bodyPr wrap="square" lIns="0" tIns="0" rIns="0" bIns="0" rtlCol="0" anchor="ctr">
+            <a:normAutofit/>
+          </a:bodyPr>
+          <a:lstStyle/>
+          <a:p>
+            <a:pPr algn="ctr" indent="0" marL="0">
+              <a:buNone/>
+            </a:pPr>
+            <a:r>
+              <a:rPr lang="en-US" sz="3600" b="1" dirty="0">
+                <a:solidFill>
+                  <a:srgbClr val="990011"/>
+                </a:solidFill>
+                <a:latin typeface="Times New Roman" pitchFamily="34" charset="0"/>
+                <a:ea typeface="Times New Roman" pitchFamily="34" charset="-122"/>
+                <a:cs typeface="Times New Roman" pitchFamily="34" charset="-120"/>
+              </a:rPr>
+              <a:t>1. Components of the Natural Environment</a:t>
+            </a:r>
+            <a:endParaRPr lang="en-US" sz="3600" dirty="0"/>
+          </a:p>
+        </p:txBody>
+      </p:sp>
+      <p:sp>
+        <p:nvSpPr>
+          <p:cNvPr id="4" name="Text 2"/>
+          <p:cNvSpPr/>
+          <p:nvPr/>
+        </p:nvSpPr>
+        <p:spPr>
+          <a:xfrm>
+            <a:off x="365760" y="1783080"/>
+            <a:ext cx="4846320" cy="4617720"/>
+          </a:xfrm>
+          <a:prstGeom prst="rect">
+            <a:avLst/>
+          </a:prstGeom>
+          <a:noFill/>
+          <a:ln/>
+        </p:spPr>
+        <p:txBody>
+          <a:bodyPr wrap="square" lIns="0" tIns="0" rIns="0" bIns="0" rtlCol="0" anchor="t"/>
+          <a:lstStyle/>
+          <a:p>
+            <a:pPr algn="l" indent="0" marL="0">
+              <a:spcAft>
+                <a:spcPts val="800"/>
+              </a:spcAft>
+              <a:buNone/>
+            </a:pPr>
+            <a:r>
+              <a:rPr lang="en-US" sz="3600" b="1" dirty="0">
+                <a:solidFill>
+                  <a:srgbClr val="111111"/>
+                </a:solidFill>
+                <a:latin typeface="Times New Roman" pitchFamily="34" charset="0"/>
+                <a:ea typeface="Times New Roman" pitchFamily="34" charset="-122"/>
+                <a:cs typeface="Times New Roman" pitchFamily="34" charset="-120"/>
+              </a:rPr>
+              <a:t>Flora: </a:t>
+            </a:r>
+            <a:pPr algn="l" indent="0" marL="0">
+              <a:spcAft>
+                <a:spcPts val="800"/>
+              </a:spcAft>
+              <a:buNone/>
+            </a:pPr>
+            <a:r>
+              <a:rPr lang="en-US" sz="3600" dirty="0">
+                <a:solidFill>
+                  <a:srgbClr val="111111"/>
+                </a:solidFill>
+                <a:latin typeface="Times New Roman" pitchFamily="34" charset="0"/>
+                <a:ea typeface="Times New Roman" pitchFamily="34" charset="-122"/>
+                <a:cs typeface="Times New Roman" pitchFamily="34" charset="-120"/>
+              </a:rPr>
+              <a:t>It is all the plants of a place (vegetation).</a:t>
+            </a:r>
+            <a:endParaRPr lang="en-US" sz="3600" dirty="0"/>
           </a:p>
         </p:txBody>
       </p:sp>
       <p:pic>
         <p:nvPicPr>
-          <p:cNvPr id="3" name="Image 0" descr="/home/claude/f4/img/minesec_sheet.png">    </p:cNvPr>
+          <p:cNvPr id="5" name="Image 0" descr="/home/claude/f4/img/v2/f2t_rainforest.jpg">    </p:cNvPr>
           <p:cNvPicPr>
             <a:picLocks noChangeAspect="1"/>
           </p:cNvPicPr>
@@ -15099,8 +15817,8 @@
         </p:blipFill>
         <p:spPr>
           <a:xfrm>
-            <a:off x="0" y="658368"/>
-            <a:ext cx="5120640" cy="5833872"/>
+            <a:off x="5349240" y="2071212"/>
+            <a:ext cx="6659575" cy="3693983"/>
           </a:xfrm>
           <a:prstGeom prst="rect">
             <a:avLst/>
@@ -15109,14 +15827,14 @@
       </p:pic>
       <p:sp>
         <p:nvSpPr>
-          <p:cNvPr id="4" name="Text 1"/>
+          <p:cNvPr id="6" name="Text 3"/>
           <p:cNvSpPr/>
           <p:nvPr/>
         </p:nvSpPr>
         <p:spPr>
           <a:xfrm>
-            <a:off x="5349240" y="1005840"/>
-            <a:ext cx="6522415" cy="731520"/>
+            <a:off x="5349240" y="6089904"/>
+            <a:ext cx="6659575" cy="347472"/>
           </a:xfrm>
           <a:prstGeom prst="rect">
             <a:avLst/>
@@ -15125,68 +15843,24 @@
           <a:ln/>
         </p:spPr>
         <p:txBody>
-          <a:bodyPr wrap="square" lIns="0" tIns="0" rIns="0" bIns="0" rtlCol="0" anchor="ctr">
-            <a:normAutofit/>
-          </a:bodyPr>
+          <a:bodyPr wrap="square" lIns="0" tIns="0" rIns="0" bIns="0" rtlCol="0" anchor="ctr"/>
           <a:lstStyle/>
           <a:p>
             <a:pPr algn="ctr" indent="0" marL="0">
               <a:buNone/>
             </a:pPr>
             <a:r>
-              <a:rPr lang="en-US" sz="3600" b="1" dirty="0">
-                <a:solidFill>
-                  <a:srgbClr val="990011"/>
+              <a:rPr lang="en-US" sz="1600" i="1" dirty="0">
+                <a:solidFill>
+                  <a:srgbClr val="555555"/>
                 </a:solidFill>
                 <a:latin typeface="Times New Roman" pitchFamily="34" charset="0"/>
                 <a:ea typeface="Times New Roman" pitchFamily="34" charset="-122"/>
                 <a:cs typeface="Times New Roman" pitchFamily="34" charset="-120"/>
               </a:rPr>
-              <a:t>Evaluation 1</a:t>
-            </a:r>
-            <a:endParaRPr lang="en-US" sz="3600" dirty="0"/>
-          </a:p>
-        </p:txBody>
-      </p:sp>
-      <p:sp>
-        <p:nvSpPr>
-          <p:cNvPr id="5" name="Text 2"/>
-          <p:cNvSpPr/>
-          <p:nvPr/>
-        </p:nvSpPr>
-        <p:spPr>
-          <a:xfrm>
-            <a:off x="5349240" y="1783080"/>
-            <a:ext cx="6522415" cy="4663440"/>
-          </a:xfrm>
-          <a:prstGeom prst="rect">
-            <a:avLst/>
-          </a:prstGeom>
-          <a:noFill/>
-          <a:ln/>
-        </p:spPr>
-        <p:txBody>
-          <a:bodyPr wrap="square" lIns="0" tIns="0" rIns="0" bIns="0" rtlCol="0" anchor="t"/>
-          <a:lstStyle/>
-          <a:p>
-            <a:pPr algn="l" indent="0" marL="0">
-              <a:spcAft>
-                <a:spcPts val="800"/>
-              </a:spcAft>
-              <a:buNone/>
-            </a:pPr>
-            <a:r>
-              <a:rPr lang="en-US" sz="4000" dirty="0">
-                <a:solidFill>
-                  <a:srgbClr val="111111"/>
-                </a:solidFill>
-                <a:latin typeface="Times New Roman" pitchFamily="34" charset="0"/>
-                <a:ea typeface="Times New Roman" pitchFamily="34" charset="-122"/>
-                <a:cs typeface="Times New Roman" pitchFamily="34" charset="-120"/>
-              </a:rPr>
-              <a:t>Name four components of the natural environment.</a:t>
-            </a:r>
-            <a:endParaRPr lang="en-US" sz="4000" dirty="0"/>
+              <a:t>Illustration: forest vegetation</a:t>
+            </a:r>
+            <a:endParaRPr lang="en-US" sz="1600" dirty="0"/>
           </a:p>
         </p:txBody>
       </p:sp>
@@ -15296,15 +15970,115 @@
                 <a:ea typeface="Calibri" pitchFamily="34" charset="-122"/>
                 <a:cs typeface="Calibri" pitchFamily="34" charset="-120"/>
               </a:rPr>
-              <a:t>FORMATIVE EVALUATION</a:t>
+              <a:t>BOARD SUMMARY</a:t>
             </a:r>
             <a:endParaRPr lang="en-US" sz="1400" dirty="0"/>
+          </a:p>
+        </p:txBody>
+      </p:sp>
+      <p:sp>
+        <p:nvSpPr>
+          <p:cNvPr id="3" name="Text 1"/>
+          <p:cNvSpPr/>
+          <p:nvPr/>
+        </p:nvSpPr>
+        <p:spPr>
+          <a:xfrm>
+            <a:off x="365760" y="1005840"/>
+            <a:ext cx="11460175" cy="731520"/>
+          </a:xfrm>
+          <a:prstGeom prst="rect">
+            <a:avLst/>
+          </a:prstGeom>
+          <a:noFill/>
+          <a:ln/>
+        </p:spPr>
+        <p:txBody>
+          <a:bodyPr wrap="square" lIns="0" tIns="0" rIns="0" bIns="0" rtlCol="0" anchor="ctr">
+            <a:normAutofit/>
+          </a:bodyPr>
+          <a:lstStyle/>
+          <a:p>
+            <a:pPr algn="ctr" indent="0" marL="0">
+              <a:buNone/>
+            </a:pPr>
+            <a:r>
+              <a:rPr lang="en-US" sz="3600" b="1" dirty="0">
+                <a:solidFill>
+                  <a:srgbClr val="990011"/>
+                </a:solidFill>
+                <a:latin typeface="Times New Roman" pitchFamily="34" charset="0"/>
+                <a:ea typeface="Times New Roman" pitchFamily="34" charset="-122"/>
+                <a:cs typeface="Times New Roman" pitchFamily="34" charset="-120"/>
+              </a:rPr>
+              <a:t>1. Components of the Natural Environment</a:t>
+            </a:r>
+            <a:endParaRPr lang="en-US" sz="3600" dirty="0"/>
+          </a:p>
+        </p:txBody>
+      </p:sp>
+      <p:sp>
+        <p:nvSpPr>
+          <p:cNvPr id="4" name="Text 2"/>
+          <p:cNvSpPr/>
+          <p:nvPr/>
+        </p:nvSpPr>
+        <p:spPr>
+          <a:xfrm>
+            <a:off x="365760" y="1783080"/>
+            <a:ext cx="4846320" cy="4617720"/>
+          </a:xfrm>
+          <a:prstGeom prst="rect">
+            <a:avLst/>
+          </a:prstGeom>
+          <a:noFill/>
+          <a:ln/>
+        </p:spPr>
+        <p:txBody>
+          <a:bodyPr wrap="square" lIns="0" tIns="0" rIns="0" bIns="0" rtlCol="0" anchor="t"/>
+          <a:lstStyle/>
+          <a:p>
+            <a:pPr algn="l" indent="0" marL="0">
+              <a:spcAft>
+                <a:spcPts val="800"/>
+              </a:spcAft>
+              <a:buNone/>
+            </a:pPr>
+            <a:r>
+              <a:rPr lang="en-US" sz="3600" b="1" dirty="0">
+                <a:solidFill>
+                  <a:srgbClr val="111111"/>
+                </a:solidFill>
+                <a:latin typeface="Times New Roman" pitchFamily="34" charset="0"/>
+                <a:ea typeface="Times New Roman" pitchFamily="34" charset="-122"/>
+                <a:cs typeface="Times New Roman" pitchFamily="34" charset="-120"/>
+              </a:rPr>
+              <a:t>Fauna: </a:t>
+            </a:r>
+            <a:pPr algn="l" indent="0" marL="0">
+              <a:spcAft>
+                <a:spcPts val="800"/>
+              </a:spcAft>
+              <a:buNone/>
+            </a:pPr>
+            <a:r>
+              <a:rPr lang="en-US" sz="3600" dirty="0">
+                <a:solidFill>
+                  <a:srgbClr val="111111"/>
+                </a:solidFill>
+                <a:latin typeface="Times New Roman" pitchFamily="34" charset="0"/>
+                <a:ea typeface="Times New Roman" pitchFamily="34" charset="-122"/>
+                <a:cs typeface="Times New Roman" pitchFamily="34" charset="-120"/>
+              </a:rPr>
+              <a:t>It is all the animals of a place.</a:t>
+            </a:r>
+            <a:endParaRPr lang="en-US" sz="3600" dirty="0"/>
           </a:p>
         </p:txBody>
       </p:sp>
       <p:pic>
         <p:nvPicPr>
-          <p:cNvPr id="3" name="Image 0" descr="/home/claude/f4/img/minesec_sheet.png">    </p:cNvPr>
+          <p:cNvPr id="5" name="Image 0" descr="/home/claude/f4/img/v2/f2t_elephants.jpg">    </p:cNvPr>
           <p:cNvPicPr>
             <a:picLocks noChangeAspect="1"/>
           </p:cNvPicPr>
@@ -15318,8 +16092,8 @@
         </p:blipFill>
         <p:spPr>
           <a:xfrm>
-            <a:off x="0" y="658368"/>
-            <a:ext cx="5120640" cy="5833872"/>
+            <a:off x="5349240" y="2069407"/>
+            <a:ext cx="6659575" cy="3697594"/>
           </a:xfrm>
           <a:prstGeom prst="rect">
             <a:avLst/>
@@ -15328,14 +16102,14 @@
       </p:pic>
       <p:sp>
         <p:nvSpPr>
-          <p:cNvPr id="4" name="Text 1"/>
+          <p:cNvPr id="6" name="Text 3"/>
           <p:cNvSpPr/>
           <p:nvPr/>
         </p:nvSpPr>
         <p:spPr>
           <a:xfrm>
-            <a:off x="5349240" y="1005840"/>
-            <a:ext cx="6522415" cy="731520"/>
+            <a:off x="5349240" y="6089904"/>
+            <a:ext cx="6659575" cy="347472"/>
           </a:xfrm>
           <a:prstGeom prst="rect">
             <a:avLst/>
@@ -15344,68 +16118,24 @@
           <a:ln/>
         </p:spPr>
         <p:txBody>
-          <a:bodyPr wrap="square" lIns="0" tIns="0" rIns="0" bIns="0" rtlCol="0" anchor="ctr">
-            <a:normAutofit/>
-          </a:bodyPr>
+          <a:bodyPr wrap="square" lIns="0" tIns="0" rIns="0" bIns="0" rtlCol="0" anchor="ctr"/>
           <a:lstStyle/>
           <a:p>
             <a:pPr algn="ctr" indent="0" marL="0">
               <a:buNone/>
             </a:pPr>
             <a:r>
-              <a:rPr lang="en-US" sz="3600" b="1" dirty="0">
-                <a:solidFill>
-                  <a:srgbClr val="990011"/>
+              <a:rPr lang="en-US" sz="1600" i="1" dirty="0">
+                <a:solidFill>
+                  <a:srgbClr val="555555"/>
                 </a:solidFill>
                 <a:latin typeface="Times New Roman" pitchFamily="34" charset="0"/>
                 <a:ea typeface="Times New Roman" pitchFamily="34" charset="-122"/>
                 <a:cs typeface="Times New Roman" pitchFamily="34" charset="-120"/>
               </a:rPr>
-              <a:t>Expected Answer</a:t>
-            </a:r>
-            <a:endParaRPr lang="en-US" sz="3600" dirty="0"/>
-          </a:p>
-        </p:txBody>
-      </p:sp>
-      <p:sp>
-        <p:nvSpPr>
-          <p:cNvPr id="5" name="Text 2"/>
-          <p:cNvSpPr/>
-          <p:nvPr/>
-        </p:nvSpPr>
-        <p:spPr>
-          <a:xfrm>
-            <a:off x="5349240" y="1783080"/>
-            <a:ext cx="6522415" cy="4663440"/>
-          </a:xfrm>
-          <a:prstGeom prst="rect">
-            <a:avLst/>
-          </a:prstGeom>
-          <a:noFill/>
-          <a:ln/>
-        </p:spPr>
-        <p:txBody>
-          <a:bodyPr wrap="square" lIns="0" tIns="0" rIns="0" bIns="0" rtlCol="0" anchor="t"/>
-          <a:lstStyle/>
-          <a:p>
-            <a:pPr algn="l" indent="0" marL="0">
-              <a:spcAft>
-                <a:spcPts val="800"/>
-              </a:spcAft>
-              <a:buNone/>
-            </a:pPr>
-            <a:r>
-              <a:rPr lang="en-US" sz="4000" dirty="0">
-                <a:solidFill>
-                  <a:srgbClr val="111111"/>
-                </a:solidFill>
-                <a:latin typeface="Times New Roman" pitchFamily="34" charset="0"/>
-                <a:ea typeface="Times New Roman" pitchFamily="34" charset="-122"/>
-                <a:cs typeface="Times New Roman" pitchFamily="34" charset="-120"/>
-              </a:rPr>
-              <a:t>Climate, soil, drainage, flora (also fauna, relief).</a:t>
-            </a:r>
-            <a:endParaRPr lang="en-US" sz="4000" dirty="0"/>
+              <a:t>Illustration: animals of the savanna</a:t>
+            </a:r>
+            <a:endParaRPr lang="en-US" sz="1600" dirty="0"/>
           </a:p>
         </p:txBody>
       </p:sp>
@@ -15515,15 +16245,135 @@
                 <a:ea typeface="Calibri" pitchFamily="34" charset="-122"/>
                 <a:cs typeface="Calibri" pitchFamily="34" charset="-120"/>
               </a:rPr>
-              <a:t>FORMATIVE EVALUATION</a:t>
+              <a:t>BOARD SUMMARY</a:t>
             </a:r>
             <a:endParaRPr lang="en-US" sz="1400" dirty="0"/>
+          </a:p>
+        </p:txBody>
+      </p:sp>
+      <p:sp>
+        <p:nvSpPr>
+          <p:cNvPr id="3" name="Text 1"/>
+          <p:cNvSpPr/>
+          <p:nvPr/>
+        </p:nvSpPr>
+        <p:spPr>
+          <a:xfrm>
+            <a:off x="365760" y="1005840"/>
+            <a:ext cx="11460175" cy="731520"/>
+          </a:xfrm>
+          <a:prstGeom prst="rect">
+            <a:avLst/>
+          </a:prstGeom>
+          <a:noFill/>
+          <a:ln/>
+        </p:spPr>
+        <p:txBody>
+          <a:bodyPr wrap="square" lIns="0" tIns="0" rIns="0" bIns="0" rtlCol="0" anchor="ctr">
+            <a:normAutofit/>
+          </a:bodyPr>
+          <a:lstStyle/>
+          <a:p>
+            <a:pPr algn="ctr" indent="0" marL="0">
+              <a:buNone/>
+            </a:pPr>
+            <a:r>
+              <a:rPr lang="en-US" sz="3600" b="1" dirty="0">
+                <a:solidFill>
+                  <a:srgbClr val="990011"/>
+                </a:solidFill>
+                <a:latin typeface="Times New Roman" pitchFamily="34" charset="0"/>
+                <a:ea typeface="Times New Roman" pitchFamily="34" charset="-122"/>
+                <a:cs typeface="Times New Roman" pitchFamily="34" charset="-120"/>
+              </a:rPr>
+              <a:t>2. Ecosystems</a:t>
+            </a:r>
+            <a:endParaRPr lang="en-US" sz="3600" dirty="0"/>
+          </a:p>
+        </p:txBody>
+      </p:sp>
+      <p:sp>
+        <p:nvSpPr>
+          <p:cNvPr id="4" name="Text 2"/>
+          <p:cNvSpPr/>
+          <p:nvPr/>
+        </p:nvSpPr>
+        <p:spPr>
+          <a:xfrm>
+            <a:off x="365760" y="1783080"/>
+            <a:ext cx="4846320" cy="4617720"/>
+          </a:xfrm>
+          <a:prstGeom prst="rect">
+            <a:avLst/>
+          </a:prstGeom>
+          <a:noFill/>
+          <a:ln/>
+        </p:spPr>
+        <p:txBody>
+          <a:bodyPr wrap="square" lIns="0" tIns="0" rIns="0" bIns="0" rtlCol="0" anchor="t"/>
+          <a:lstStyle/>
+          <a:p>
+            <a:pPr algn="l" indent="0" marL="0">
+              <a:spcAft>
+                <a:spcPts val="800"/>
+              </a:spcAft>
+              <a:buNone/>
+            </a:pPr>
+            <a:r>
+              <a:rPr lang="en-US" sz="3600" i="1" dirty="0">
+                <a:solidFill>
+                  <a:srgbClr val="111111"/>
+                </a:solidFill>
+                <a:latin typeface="Times New Roman" pitchFamily="34" charset="0"/>
+                <a:ea typeface="Times New Roman" pitchFamily="34" charset="-122"/>
+                <a:cs typeface="Times New Roman" pitchFamily="34" charset="-120"/>
+              </a:rPr>
+              <a:t>Ecosystems are explained as follows:</a:t>
+            </a:r>
+            <a:endParaRPr lang="en-US" sz="3600" dirty="0"/>
+          </a:p>
+          <a:p>
+            <a:pPr algn="l" indent="0" marL="0">
+              <a:spcAft>
+                <a:spcPts val="800"/>
+              </a:spcAft>
+              <a:buNone/>
+            </a:pPr>
+            <a:r>
+              <a:rPr lang="en-US" sz="3600" b="1" dirty="0">
+                <a:solidFill>
+                  <a:srgbClr val="111111"/>
+                </a:solidFill>
+                <a:latin typeface="Times New Roman" pitchFamily="34" charset="0"/>
+                <a:ea typeface="Times New Roman" pitchFamily="34" charset="-122"/>
+                <a:cs typeface="Times New Roman" pitchFamily="34" charset="-120"/>
+              </a:rPr>
+              <a:t>Ecosystem: </a:t>
+            </a:r>
+            <a:pPr algn="l" indent="0" marL="0">
+              <a:spcAft>
+                <a:spcPts val="800"/>
+              </a:spcAft>
+              <a:buNone/>
+            </a:pPr>
+            <a:r>
+              <a:rPr lang="en-US" sz="3600" dirty="0">
+                <a:solidFill>
+                  <a:srgbClr val="111111"/>
+                </a:solidFill>
+                <a:latin typeface="Times New Roman" pitchFamily="34" charset="0"/>
+                <a:ea typeface="Times New Roman" pitchFamily="34" charset="-122"/>
+                <a:cs typeface="Times New Roman" pitchFamily="34" charset="-120"/>
+              </a:rPr>
+              <a:t>It is a community of living things and their non-living surroundings that depend on one another.</a:t>
+            </a:r>
+            <a:endParaRPr lang="en-US" sz="3600" dirty="0"/>
           </a:p>
         </p:txBody>
       </p:sp>
       <p:pic>
         <p:nvPicPr>
-          <p:cNvPr id="3" name="Image 0" descr="/home/claude/f4/img/minesec_sheet.png">    </p:cNvPr>
+          <p:cNvPr id="5" name="Image 0" descr="/home/claude/f4/img/v2/ecosystem_components_big.png">    </p:cNvPr>
           <p:cNvPicPr>
             <a:picLocks noChangeAspect="1"/>
           </p:cNvPicPr>
@@ -15537,8 +16387,8 @@
         </p:blipFill>
         <p:spPr>
           <a:xfrm>
-            <a:off x="0" y="658368"/>
-            <a:ext cx="5120640" cy="5833872"/>
+            <a:off x="5349240" y="2617506"/>
+            <a:ext cx="6659575" cy="2601397"/>
           </a:xfrm>
           <a:prstGeom prst="rect">
             <a:avLst/>
@@ -15547,14 +16397,14 @@
       </p:pic>
       <p:sp>
         <p:nvSpPr>
-          <p:cNvPr id="4" name="Text 1"/>
+          <p:cNvPr id="6" name="Text 3"/>
           <p:cNvSpPr/>
           <p:nvPr/>
         </p:nvSpPr>
         <p:spPr>
           <a:xfrm>
-            <a:off x="5349240" y="1005840"/>
-            <a:ext cx="6522415" cy="731520"/>
+            <a:off x="5349240" y="6089904"/>
+            <a:ext cx="6659575" cy="347472"/>
           </a:xfrm>
           <a:prstGeom prst="rect">
             <a:avLst/>
@@ -15563,68 +16413,24 @@
           <a:ln/>
         </p:spPr>
         <p:txBody>
-          <a:bodyPr wrap="square" lIns="0" tIns="0" rIns="0" bIns="0" rtlCol="0" anchor="ctr">
-            <a:normAutofit/>
-          </a:bodyPr>
+          <a:bodyPr wrap="square" lIns="0" tIns="0" rIns="0" bIns="0" rtlCol="0" anchor="ctr"/>
           <a:lstStyle/>
           <a:p>
             <a:pPr algn="ctr" indent="0" marL="0">
               <a:buNone/>
             </a:pPr>
             <a:r>
-              <a:rPr lang="en-US" sz="3600" b="1" dirty="0">
-                <a:solidFill>
-                  <a:srgbClr val="990011"/>
+              <a:rPr lang="en-US" sz="1600" i="1" dirty="0">
+                <a:solidFill>
+                  <a:srgbClr val="555555"/>
                 </a:solidFill>
                 <a:latin typeface="Times New Roman" pitchFamily="34" charset="0"/>
                 <a:ea typeface="Times New Roman" pitchFamily="34" charset="-122"/>
                 <a:cs typeface="Times New Roman" pitchFamily="34" charset="-120"/>
               </a:rPr>
-              <a:t>Evaluation 2</a:t>
-            </a:r>
-            <a:endParaRPr lang="en-US" sz="3600" dirty="0"/>
-          </a:p>
-        </p:txBody>
-      </p:sp>
-      <p:sp>
-        <p:nvSpPr>
-          <p:cNvPr id="5" name="Text 2"/>
-          <p:cNvSpPr/>
-          <p:nvPr/>
-        </p:nvSpPr>
-        <p:spPr>
-          <a:xfrm>
-            <a:off x="5349240" y="1783080"/>
-            <a:ext cx="6522415" cy="4663440"/>
-          </a:xfrm>
-          <a:prstGeom prst="rect">
-            <a:avLst/>
-          </a:prstGeom>
-          <a:noFill/>
-          <a:ln/>
-        </p:spPr>
-        <p:txBody>
-          <a:bodyPr wrap="square" lIns="0" tIns="0" rIns="0" bIns="0" rtlCol="0" anchor="t"/>
-          <a:lstStyle/>
-          <a:p>
-            <a:pPr algn="l" indent="0" marL="0">
-              <a:spcAft>
-                <a:spcPts val="800"/>
-              </a:spcAft>
-              <a:buNone/>
-            </a:pPr>
-            <a:r>
-              <a:rPr lang="en-US" sz="4000" dirty="0">
-                <a:solidFill>
-                  <a:srgbClr val="111111"/>
-                </a:solidFill>
-                <a:latin typeface="Times New Roman" pitchFamily="34" charset="0"/>
-                <a:ea typeface="Times New Roman" pitchFamily="34" charset="-122"/>
-                <a:cs typeface="Times New Roman" pitchFamily="34" charset="-120"/>
-              </a:rPr>
-              <a:t>What is an ecosystem?</a:t>
-            </a:r>
-            <a:endParaRPr lang="en-US" sz="4000" dirty="0"/>
+              <a:t>Illustration: the components of an ecosystem</a:t>
+            </a:r>
+            <a:endParaRPr lang="en-US" sz="1600" dirty="0"/>
           </a:p>
         </p:txBody>
       </p:sp>
@@ -15734,7 +16540,7 @@
                 <a:ea typeface="Calibri" pitchFamily="34" charset="-122"/>
                 <a:cs typeface="Calibri" pitchFamily="34" charset="-120"/>
               </a:rPr>
-              <a:t>FORMATIVE EVALUATION</a:t>
+              <a:t>BOARD SUMMARY</a:t>
             </a:r>
             <a:endParaRPr lang="en-US" sz="1400" dirty="0"/>
           </a:p>
@@ -15799,7 +16605,7 @@
                 <a:ea typeface="Times New Roman" pitchFamily="34" charset="-122"/>
                 <a:cs typeface="Times New Roman" pitchFamily="34" charset="-120"/>
               </a:rPr>
-              <a:t>Expected Answer</a:t>
+              <a:t>2. Ecosystems</a:t>
             </a:r>
             <a:endParaRPr lang="en-US" sz="3600" dirty="0"/>
           </a:p>
@@ -15833,7 +16639,7 @@
               <a:buNone/>
             </a:pPr>
             <a:r>
-              <a:rPr lang="en-US" sz="4000" dirty="0">
+              <a:rPr lang="en-US" sz="4000" b="1" dirty="0">
                 <a:solidFill>
                   <a:srgbClr val="111111"/>
                 </a:solidFill>
@@ -15841,7 +16647,61 @@
                 <a:ea typeface="Times New Roman" pitchFamily="34" charset="-122"/>
                 <a:cs typeface="Times New Roman" pitchFamily="34" charset="-120"/>
               </a:rPr>
-              <a:t>A community of living things and their surroundings that depend on one another.</a:t>
+              <a:t>Living components: </a:t>
+            </a:r>
+            <a:pPr algn="l" indent="0" marL="0">
+              <a:spcAft>
+                <a:spcPts val="800"/>
+              </a:spcAft>
+              <a:buNone/>
+            </a:pPr>
+            <a:r>
+              <a:rPr lang="en-US" sz="4000" dirty="0">
+                <a:solidFill>
+                  <a:srgbClr val="111111"/>
+                </a:solidFill>
+                <a:latin typeface="Times New Roman" pitchFamily="34" charset="0"/>
+                <a:ea typeface="Times New Roman" pitchFamily="34" charset="-122"/>
+                <a:cs typeface="Times New Roman" pitchFamily="34" charset="-120"/>
+              </a:rPr>
+              <a:t>They are plants, animals and people.</a:t>
+            </a:r>
+            <a:endParaRPr lang="en-US" sz="4000" dirty="0"/>
+          </a:p>
+          <a:p>
+            <a:pPr algn="l" indent="0" marL="0">
+              <a:spcAft>
+                <a:spcPts val="800"/>
+              </a:spcAft>
+              <a:buNone/>
+            </a:pPr>
+            <a:r>
+              <a:rPr lang="en-US" sz="4000" b="1" dirty="0">
+                <a:solidFill>
+                  <a:srgbClr val="111111"/>
+                </a:solidFill>
+                <a:latin typeface="Times New Roman" pitchFamily="34" charset="0"/>
+                <a:ea typeface="Times New Roman" pitchFamily="34" charset="-122"/>
+                <a:cs typeface="Times New Roman" pitchFamily="34" charset="-120"/>
+              </a:rPr>
+              <a:t>Non-living components: </a:t>
+            </a:r>
+            <a:pPr algn="l" indent="0" marL="0">
+              <a:spcAft>
+                <a:spcPts val="800"/>
+              </a:spcAft>
+              <a:buNone/>
+            </a:pPr>
+            <a:r>
+              <a:rPr lang="en-US" sz="4000" dirty="0">
+                <a:solidFill>
+                  <a:srgbClr val="111111"/>
+                </a:solidFill>
+                <a:latin typeface="Times New Roman" pitchFamily="34" charset="0"/>
+                <a:ea typeface="Times New Roman" pitchFamily="34" charset="-122"/>
+                <a:cs typeface="Times New Roman" pitchFamily="34" charset="-120"/>
+              </a:rPr>
+              <a:t>They are the soil, water, air, sunlight and climate.</a:t>
             </a:r>
             <a:endParaRPr lang="en-US" sz="4000" dirty="0"/>
           </a:p>
@@ -15953,15 +16813,115 @@
                 <a:ea typeface="Calibri" pitchFamily="34" charset="-122"/>
                 <a:cs typeface="Calibri" pitchFamily="34" charset="-120"/>
               </a:rPr>
-              <a:t>REMEDIATION</a:t>
+              <a:t>BOARD SUMMARY</a:t>
             </a:r>
             <a:endParaRPr lang="en-US" sz="1400" dirty="0"/>
+          </a:p>
+        </p:txBody>
+      </p:sp>
+      <p:sp>
+        <p:nvSpPr>
+          <p:cNvPr id="3" name="Text 1"/>
+          <p:cNvSpPr/>
+          <p:nvPr/>
+        </p:nvSpPr>
+        <p:spPr>
+          <a:xfrm>
+            <a:off x="365760" y="1005840"/>
+            <a:ext cx="11460175" cy="731520"/>
+          </a:xfrm>
+          <a:prstGeom prst="rect">
+            <a:avLst/>
+          </a:prstGeom>
+          <a:noFill/>
+          <a:ln/>
+        </p:spPr>
+        <p:txBody>
+          <a:bodyPr wrap="square" lIns="0" tIns="0" rIns="0" bIns="0" rtlCol="0" anchor="ctr">
+            <a:normAutofit/>
+          </a:bodyPr>
+          <a:lstStyle/>
+          <a:p>
+            <a:pPr algn="ctr" indent="0" marL="0">
+              <a:buNone/>
+            </a:pPr>
+            <a:r>
+              <a:rPr lang="en-US" sz="3600" b="1" dirty="0">
+                <a:solidFill>
+                  <a:srgbClr val="990011"/>
+                </a:solidFill>
+                <a:latin typeface="Times New Roman" pitchFamily="34" charset="0"/>
+                <a:ea typeface="Times New Roman" pitchFamily="34" charset="-122"/>
+                <a:cs typeface="Times New Roman" pitchFamily="34" charset="-120"/>
+              </a:rPr>
+              <a:t>2. Ecosystems</a:t>
+            </a:r>
+            <a:endParaRPr lang="en-US" sz="3600" dirty="0"/>
+          </a:p>
+        </p:txBody>
+      </p:sp>
+      <p:sp>
+        <p:nvSpPr>
+          <p:cNvPr id="4" name="Text 2"/>
+          <p:cNvSpPr/>
+          <p:nvPr/>
+        </p:nvSpPr>
+        <p:spPr>
+          <a:xfrm>
+            <a:off x="365760" y="1783080"/>
+            <a:ext cx="4846320" cy="4617720"/>
+          </a:xfrm>
+          <a:prstGeom prst="rect">
+            <a:avLst/>
+          </a:prstGeom>
+          <a:noFill/>
+          <a:ln/>
+        </p:spPr>
+        <p:txBody>
+          <a:bodyPr wrap="square" lIns="0" tIns="0" rIns="0" bIns="0" rtlCol="0" anchor="t"/>
+          <a:lstStyle/>
+          <a:p>
+            <a:pPr algn="l" indent="0" marL="0">
+              <a:spcAft>
+                <a:spcPts val="800"/>
+              </a:spcAft>
+              <a:buNone/>
+            </a:pPr>
+            <a:r>
+              <a:rPr lang="en-US" sz="3600" b="1" dirty="0">
+                <a:solidFill>
+                  <a:srgbClr val="111111"/>
+                </a:solidFill>
+                <a:latin typeface="Times New Roman" pitchFamily="34" charset="0"/>
+                <a:ea typeface="Times New Roman" pitchFamily="34" charset="-122"/>
+                <a:cs typeface="Times New Roman" pitchFamily="34" charset="-120"/>
+              </a:rPr>
+              <a:t>Examples: </a:t>
+            </a:r>
+            <a:pPr algn="l" indent="0" marL="0">
+              <a:spcAft>
+                <a:spcPts val="800"/>
+              </a:spcAft>
+              <a:buNone/>
+            </a:pPr>
+            <a:r>
+              <a:rPr lang="en-US" sz="3600" dirty="0">
+                <a:solidFill>
+                  <a:srgbClr val="111111"/>
+                </a:solidFill>
+                <a:latin typeface="Times New Roman" pitchFamily="34" charset="0"/>
+                <a:ea typeface="Times New Roman" pitchFamily="34" charset="-122"/>
+                <a:cs typeface="Times New Roman" pitchFamily="34" charset="-120"/>
+              </a:rPr>
+              <a:t>A forest, a savanna, a lake and a river are ecosystems.</a:t>
+            </a:r>
+            <a:endParaRPr lang="en-US" sz="3600" dirty="0"/>
           </a:p>
         </p:txBody>
       </p:sp>
       <p:pic>
         <p:nvPicPr>
-          <p:cNvPr id="3" name="Image 0" descr="/home/claude/f4/img/minesec_sheet.png">    </p:cNvPr>
+          <p:cNvPr id="5" name="Image 0" descr="/home/claude/f4/img/v2/f2t_lake_chad.jpg">    </p:cNvPr>
           <p:cNvPicPr>
             <a:picLocks noChangeAspect="1"/>
           </p:cNvPicPr>
@@ -15975,8 +16935,8 @@
         </p:blipFill>
         <p:spPr>
           <a:xfrm>
-            <a:off x="0" y="658368"/>
-            <a:ext cx="5120640" cy="5833872"/>
+            <a:off x="5349240" y="2071212"/>
+            <a:ext cx="6659575" cy="3693983"/>
           </a:xfrm>
           <a:prstGeom prst="rect">
             <a:avLst/>
@@ -15985,14 +16945,14 @@
       </p:pic>
       <p:sp>
         <p:nvSpPr>
-          <p:cNvPr id="4" name="Text 1"/>
+          <p:cNvPr id="6" name="Text 3"/>
           <p:cNvSpPr/>
           <p:nvPr/>
         </p:nvSpPr>
         <p:spPr>
           <a:xfrm>
-            <a:off x="5349240" y="1005840"/>
-            <a:ext cx="6522415" cy="731520"/>
+            <a:off x="5349240" y="6089904"/>
+            <a:ext cx="6659575" cy="347472"/>
           </a:xfrm>
           <a:prstGeom prst="rect">
             <a:avLst/>
@@ -16001,112 +16961,24 @@
           <a:ln/>
         </p:spPr>
         <p:txBody>
-          <a:bodyPr wrap="square" lIns="0" tIns="0" rIns="0" bIns="0" rtlCol="0" anchor="ctr">
-            <a:normAutofit/>
-          </a:bodyPr>
+          <a:bodyPr wrap="square" lIns="0" tIns="0" rIns="0" bIns="0" rtlCol="0" anchor="ctr"/>
           <a:lstStyle/>
           <a:p>
             <a:pPr algn="ctr" indent="0" marL="0">
               <a:buNone/>
             </a:pPr>
             <a:r>
-              <a:rPr lang="en-US" sz="3600" b="1" dirty="0">
-                <a:solidFill>
-                  <a:srgbClr val="990011"/>
+              <a:rPr lang="en-US" sz="1600" i="1" dirty="0">
+                <a:solidFill>
+                  <a:srgbClr val="555555"/>
                 </a:solidFill>
                 <a:latin typeface="Times New Roman" pitchFamily="34" charset="0"/>
                 <a:ea typeface="Times New Roman" pitchFamily="34" charset="-122"/>
                 <a:cs typeface="Times New Roman" pitchFamily="34" charset="-120"/>
               </a:rPr>
-              <a:t>Remediation</a:t>
-            </a:r>
-            <a:endParaRPr lang="en-US" sz="3600" dirty="0"/>
-          </a:p>
-        </p:txBody>
-      </p:sp>
-      <p:sp>
-        <p:nvSpPr>
-          <p:cNvPr id="5" name="Text 2"/>
-          <p:cNvSpPr/>
-          <p:nvPr/>
-        </p:nvSpPr>
-        <p:spPr>
-          <a:xfrm>
-            <a:off x="5349240" y="1783080"/>
-            <a:ext cx="6522415" cy="4663440"/>
-          </a:xfrm>
-          <a:prstGeom prst="rect">
-            <a:avLst/>
-          </a:prstGeom>
-          <a:noFill/>
-          <a:ln/>
-        </p:spPr>
-        <p:txBody>
-          <a:bodyPr wrap="square" lIns="0" tIns="0" rIns="0" bIns="0" rtlCol="0" anchor="t"/>
-          <a:lstStyle/>
-          <a:p>
-            <a:pPr algn="l" indent="0" marL="0">
-              <a:spcAft>
-                <a:spcPts val="800"/>
-              </a:spcAft>
-              <a:buNone/>
-            </a:pPr>
-            <a:r>
-              <a:rPr lang="en-US" sz="4000" b="1" dirty="0">
-                <a:solidFill>
-                  <a:srgbClr val="111111"/>
-                </a:solidFill>
-                <a:latin typeface="Times New Roman" pitchFamily="34" charset="0"/>
-                <a:ea typeface="Times New Roman" pitchFamily="34" charset="-122"/>
-                <a:cs typeface="Times New Roman" pitchFamily="34" charset="-120"/>
-              </a:rPr>
-              <a:t>Fill in the blanks:</a:t>
-            </a:r>
-            <a:endParaRPr lang="en-US" sz="4000" dirty="0"/>
-          </a:p>
-          <a:p>
-            <a:pPr algn="l" marL="342900" indent="-342900">
-              <a:spcAft>
-                <a:spcPts val="800"/>
-              </a:spcAft>
-              <a:buSzPct val="100000"/>
-              <a:buFont typeface="+mj-lt"/>
-              <a:buAutoNum type="arabicPeriod" startAt="1"/>
-            </a:pPr>
-            <a:r>
-              <a:rPr lang="en-US" sz="4000" dirty="0">
-                <a:solidFill>
-                  <a:srgbClr val="111111"/>
-                </a:solidFill>
-                <a:latin typeface="Times New Roman" pitchFamily="34" charset="0"/>
-                <a:ea typeface="Times New Roman" pitchFamily="34" charset="-122"/>
-                <a:cs typeface="Times New Roman" pitchFamily="34" charset="-120"/>
-              </a:rPr>
-              <a:t>All the plants of a place are called ______.</a:t>
-            </a:r>
-            <a:endParaRPr lang="en-US" sz="4000" dirty="0"/>
-          </a:p>
-          <a:p>
-            <a:pPr algn="l" marL="342900" indent="-342900">
-              <a:spcAft>
-                <a:spcPts val="800"/>
-              </a:spcAft>
-              <a:buSzPct val="100000"/>
-              <a:buFont typeface="+mj-lt"/>
-              <a:buAutoNum type="arabicPeriod" startAt="1"/>
-            </a:pPr>
-            <a:r>
-              <a:rPr lang="en-US" sz="4000" dirty="0">
-                <a:solidFill>
-                  <a:srgbClr val="111111"/>
-                </a:solidFill>
-                <a:latin typeface="Times New Roman" pitchFamily="34" charset="0"/>
-                <a:ea typeface="Times New Roman" pitchFamily="34" charset="-122"/>
-                <a:cs typeface="Times New Roman" pitchFamily="34" charset="-120"/>
-              </a:rPr>
-              <a:t>All the animals of a place are called ______.</a:t>
-            </a:r>
-            <a:endParaRPr lang="en-US" sz="4000" dirty="0"/>
+              <a:t>Illustration: Lake Chad, an ecosystem</a:t>
+            </a:r>
+            <a:endParaRPr lang="en-US" sz="1600" dirty="0"/>
           </a:p>
         </p:txBody>
       </p:sp>
@@ -16216,7 +17088,7 @@
                 <a:ea typeface="Calibri" pitchFamily="34" charset="-122"/>
                 <a:cs typeface="Calibri" pitchFamily="34" charset="-120"/>
               </a:rPr>
-              <a:t>REMEDIATION</a:t>
+              <a:t>FORMATIVE EVALUATION</a:t>
             </a:r>
             <a:endParaRPr lang="en-US" sz="1400" dirty="0"/>
           </a:p>
@@ -16281,7 +17153,7 @@
                 <a:ea typeface="Times New Roman" pitchFamily="34" charset="-122"/>
                 <a:cs typeface="Times New Roman" pitchFamily="34" charset="-120"/>
               </a:rPr>
-              <a:t>Remediation (continued)</a:t>
+              <a:t>Evaluation 1</a:t>
             </a:r>
             <a:endParaRPr lang="en-US" sz="3600" dirty="0"/>
           </a:p>
@@ -16308,13 +17180,11 @@
           <a:bodyPr wrap="square" lIns="0" tIns="0" rIns="0" bIns="0" rtlCol="0" anchor="t"/>
           <a:lstStyle/>
           <a:p>
-            <a:pPr algn="l" marL="342900" indent="-342900">
+            <a:pPr algn="l" indent="0" marL="0">
               <a:spcAft>
                 <a:spcPts val="800"/>
               </a:spcAft>
-              <a:buSzPct val="100000"/>
-              <a:buFont typeface="+mj-lt"/>
-              <a:buAutoNum type="arabicPeriod" startAt="1"/>
+              <a:buNone/>
             </a:pPr>
             <a:r>
               <a:rPr lang="en-US" sz="4000" dirty="0">
@@ -16325,7 +17195,7 @@
                 <a:ea typeface="Times New Roman" pitchFamily="34" charset="-122"/>
                 <a:cs typeface="Times New Roman" pitchFamily="34" charset="-120"/>
               </a:rPr>
-              <a:t>All the rivers and lakes of a place form the ______.</a:t>
+              <a:t>Name four components of the natural environment.</a:t>
             </a:r>
             <a:endParaRPr lang="en-US" sz="4000" dirty="0"/>
           </a:p>
@@ -16437,7 +17307,7 @@
                 <a:ea typeface="Calibri" pitchFamily="34" charset="-122"/>
                 <a:cs typeface="Calibri" pitchFamily="34" charset="-120"/>
               </a:rPr>
-              <a:t>HOMEWORK</a:t>
+              <a:t>FORMATIVE EVALUATION</a:t>
             </a:r>
             <a:endParaRPr lang="en-US" sz="1400" dirty="0"/>
           </a:p>
@@ -16502,7 +17372,7 @@
                 <a:ea typeface="Times New Roman" pitchFamily="34" charset="-122"/>
                 <a:cs typeface="Times New Roman" pitchFamily="34" charset="-120"/>
               </a:rPr>
-              <a:t>Homework</a:t>
+              <a:t>Expected Answer</a:t>
             </a:r>
             <a:endParaRPr lang="en-US" sz="3600" dirty="0"/>
           </a:p>
@@ -16544,7 +17414,7 @@
                 <a:ea typeface="Times New Roman" pitchFamily="34" charset="-122"/>
                 <a:cs typeface="Times New Roman" pitchFamily="34" charset="-120"/>
               </a:rPr>
-              <a:t>List five living things and five non-living things in your school compound.</a:t>
+              <a:t>Climate, soil, drainage and flora (also relief and fauna).</a:t>
             </a:r>
             <a:endParaRPr lang="en-US" sz="4000" dirty="0"/>
           </a:p>
@@ -16656,7 +17526,7 @@
                 <a:ea typeface="Calibri" pitchFamily="34" charset="-122"/>
                 <a:cs typeface="Calibri" pitchFamily="34" charset="-120"/>
               </a:rPr>
-              <a:t>NEXT LESSON</a:t>
+              <a:t>FORMATIVE EVALUATION</a:t>
             </a:r>
             <a:endParaRPr lang="en-US" sz="1400" dirty="0"/>
           </a:p>
@@ -16721,7 +17591,7 @@
                 <a:ea typeface="Times New Roman" pitchFamily="34" charset="-122"/>
                 <a:cs typeface="Times New Roman" pitchFamily="34" charset="-120"/>
               </a:rPr>
-              <a:t>Next Lesson</a:t>
+              <a:t>Evaluation 2</a:t>
             </a:r>
             <a:endParaRPr lang="en-US" sz="3600" dirty="0"/>
           </a:p>
@@ -16745,17 +17615,17 @@
           <a:ln/>
         </p:spPr>
         <p:txBody>
-          <a:bodyPr wrap="square" lIns="0" tIns="0" rIns="0" bIns="0" rtlCol="0" anchor="ctr"/>
-          <a:lstStyle/>
-          <a:p>
-            <a:pPr algn="ctr" indent="0" marL="0">
+          <a:bodyPr wrap="square" lIns="0" tIns="0" rIns="0" bIns="0" rtlCol="0" anchor="t"/>
+          <a:lstStyle/>
+          <a:p>
+            <a:pPr algn="l" indent="0" marL="0">
               <a:spcAft>
                 <a:spcPts val="800"/>
               </a:spcAft>
               <a:buNone/>
             </a:pPr>
             <a:r>
-              <a:rPr lang="en-US" sz="4000" b="1" dirty="0">
+              <a:rPr lang="en-US" sz="4000" dirty="0">
                 <a:solidFill>
                   <a:srgbClr val="111111"/>
                 </a:solidFill>
@@ -16763,27 +17633,7 @@
                 <a:ea typeface="Times New Roman" pitchFamily="34" charset="-122"/>
                 <a:cs typeface="Times New Roman" pitchFamily="34" charset="-120"/>
               </a:rPr>
-              <a:t>Our next lesson will be on:</a:t>
-            </a:r>
-            <a:endParaRPr lang="en-US" sz="4000" dirty="0"/>
-          </a:p>
-          <a:p>
-            <a:pPr algn="ctr" indent="0" marL="0">
-              <a:spcAft>
-                <a:spcPts val="800"/>
-              </a:spcAft>
-              <a:buNone/>
-            </a:pPr>
-            <a:r>
-              <a:rPr lang="en-US" sz="4000" b="1" dirty="0">
-                <a:solidFill>
-                  <a:srgbClr val="990011"/>
-                </a:solidFill>
-                <a:latin typeface="Times New Roman" pitchFamily="34" charset="0"/>
-                <a:ea typeface="Times New Roman" pitchFamily="34" charset="-122"/>
-                <a:cs typeface="Times New Roman" pitchFamily="34" charset="-120"/>
-              </a:rPr>
-              <a:t>Lesson 5: Natural Regions (Bio-climatic Zones) of Cameroon</a:t>
+              <a:t>What is an ecosystem?</a:t>
             </a:r>
             <a:endParaRPr lang="en-US" sz="4000" dirty="0"/>
           </a:p>
@@ -16895,6 +17745,1386 @@
                 <a:ea typeface="Calibri" pitchFamily="34" charset="-122"/>
                 <a:cs typeface="Calibri" pitchFamily="34" charset="-120"/>
               </a:rPr>
+              <a:t>FORMATIVE EVALUATION</a:t>
+            </a:r>
+            <a:endParaRPr lang="en-US" sz="1400" dirty="0"/>
+          </a:p>
+        </p:txBody>
+      </p:sp>
+      <p:pic>
+        <p:nvPicPr>
+          <p:cNvPr id="3" name="Image 0" descr="/home/claude/f4/img/minesec_sheet.png">    </p:cNvPr>
+          <p:cNvPicPr>
+            <a:picLocks noChangeAspect="1"/>
+          </p:cNvPicPr>
+          <p:nvPr/>
+        </p:nvPicPr>
+        <p:blipFill>
+          <a:blip r:embed="rId1"/>
+          <a:stretch>
+            <a:fillRect/>
+          </a:stretch>
+        </p:blipFill>
+        <p:spPr>
+          <a:xfrm>
+            <a:off x="0" y="658368"/>
+            <a:ext cx="5120640" cy="5833872"/>
+          </a:xfrm>
+          <a:prstGeom prst="rect">
+            <a:avLst/>
+          </a:prstGeom>
+        </p:spPr>
+      </p:pic>
+      <p:sp>
+        <p:nvSpPr>
+          <p:cNvPr id="4" name="Text 1"/>
+          <p:cNvSpPr/>
+          <p:nvPr/>
+        </p:nvSpPr>
+        <p:spPr>
+          <a:xfrm>
+            <a:off x="5349240" y="1005840"/>
+            <a:ext cx="6522415" cy="731520"/>
+          </a:xfrm>
+          <a:prstGeom prst="rect">
+            <a:avLst/>
+          </a:prstGeom>
+          <a:noFill/>
+          <a:ln/>
+        </p:spPr>
+        <p:txBody>
+          <a:bodyPr wrap="square" lIns="0" tIns="0" rIns="0" bIns="0" rtlCol="0" anchor="ctr">
+            <a:normAutofit/>
+          </a:bodyPr>
+          <a:lstStyle/>
+          <a:p>
+            <a:pPr algn="ctr" indent="0" marL="0">
+              <a:buNone/>
+            </a:pPr>
+            <a:r>
+              <a:rPr lang="en-US" sz="3600" b="1" dirty="0">
+                <a:solidFill>
+                  <a:srgbClr val="990011"/>
+                </a:solidFill>
+                <a:latin typeface="Times New Roman" pitchFamily="34" charset="0"/>
+                <a:ea typeface="Times New Roman" pitchFamily="34" charset="-122"/>
+                <a:cs typeface="Times New Roman" pitchFamily="34" charset="-120"/>
+              </a:rPr>
+              <a:t>Expected Answer</a:t>
+            </a:r>
+            <a:endParaRPr lang="en-US" sz="3600" dirty="0"/>
+          </a:p>
+        </p:txBody>
+      </p:sp>
+      <p:sp>
+        <p:nvSpPr>
+          <p:cNvPr id="5" name="Text 2"/>
+          <p:cNvSpPr/>
+          <p:nvPr/>
+        </p:nvSpPr>
+        <p:spPr>
+          <a:xfrm>
+            <a:off x="5349240" y="1783080"/>
+            <a:ext cx="6522415" cy="4663440"/>
+          </a:xfrm>
+          <a:prstGeom prst="rect">
+            <a:avLst/>
+          </a:prstGeom>
+          <a:noFill/>
+          <a:ln/>
+        </p:spPr>
+        <p:txBody>
+          <a:bodyPr wrap="square" lIns="0" tIns="0" rIns="0" bIns="0" rtlCol="0" anchor="t"/>
+          <a:lstStyle/>
+          <a:p>
+            <a:pPr algn="l" indent="0" marL="0">
+              <a:spcAft>
+                <a:spcPts val="800"/>
+              </a:spcAft>
+              <a:buNone/>
+            </a:pPr>
+            <a:r>
+              <a:rPr lang="en-US" sz="4000" dirty="0">
+                <a:solidFill>
+                  <a:srgbClr val="111111"/>
+                </a:solidFill>
+                <a:latin typeface="Times New Roman" pitchFamily="34" charset="0"/>
+                <a:ea typeface="Times New Roman" pitchFamily="34" charset="-122"/>
+                <a:cs typeface="Times New Roman" pitchFamily="34" charset="-120"/>
+              </a:rPr>
+              <a:t>A community of living things and their surroundings that depend on one another.</a:t>
+            </a:r>
+            <a:endParaRPr lang="en-US" sz="4000" dirty="0"/>
+          </a:p>
+        </p:txBody>
+      </p:sp>
+      <p:sp>
+        <p:nvSpPr>
+          <p:cNvPr id="25" name="Slide Number Placeholder 0"/>
+          <p:cNvSpPr>
+            <a:spLocks noGrp="1"/>
+          </p:cNvSpPr>
+          <p:nvPr>
+            <p:ph type="sldNum" sz="quarter" idx="4294967295"/>
+          </p:nvPr>
+        </p:nvSpPr>
+        <p:spPr>
+          <a:xfrm>
+            <a:off x="27432" y="91440"/>
+            <a:ext cx="585216" cy="475488"/>
+          </a:xfrm>
+          <a:prstGeom prst="rect">
+            <a:avLst/>
+          </a:prstGeom>
+          <a:extLst>
+            <a:ext uri="{C572A759-6A51-4108-AA02-DFA0A04FC94B}">
+              <ma14:wrappingTextBoxFlag xmlns:ma14="http://schemas.microsoft.com/office/mac/drawingml/2011/main" val="0"/>
+            </a:ext>
+          </a:extLst>
+        </p:spPr>
+        <p:txBody>
+          <a:bodyPr/>
+          <a:lstStyle>
+            <a:lvl1pPr>
+              <a:defRPr sz="2000">
+                <a:solidFill>
+                  <a:srgbClr val="FFFFFF"/>
+                </a:solidFill>
+                <a:latin typeface="Calibri"/>
+                <a:ea typeface="Calibri"/>
+                <a:cs typeface="Calibri"/>
+              </a:defRPr>
+            </a:lvl1pPr>
+          </a:lstStyle>
+          <a:p>
+            <a:pPr algn="ctr"/>
+            <a:fld id="{F7021451-1387-4CA6-816F-3879F97B5CBC}" type="slidenum">
+              <a:rPr b="1" lang="en-US"/>
+              <a:t>48</a:t>
+            </a:fld>
+            <a:endParaRPr lang="en-US"/>
+          </a:p>
+        </p:txBody>
+      </p:sp>
+    </p:spTree>
+  </p:cSld>
+  <p:clrMapOvr>
+    <a:masterClrMapping/>
+  </p:clrMapOvr>
+</p:sld>
+</file>
+
+<file path=ppt/slides/slide49.xml><?xml version="1.0" encoding="utf-8"?>
+<p:sld xmlns:a="http://schemas.openxmlformats.org/drawingml/2006/main" xmlns:r="http://schemas.openxmlformats.org/officeDocument/2006/relationships" xmlns:p="http://schemas.openxmlformats.org/presentationml/2006/main">
+  <p:cSld name="Slide 49">
+    <p:spTree>
+      <p:nvGrpSpPr>
+        <p:cNvPr id="1" name=""/>
+        <p:cNvGrpSpPr/>
+        <p:nvPr/>
+      </p:nvGrpSpPr>
+      <p:grpSpPr>
+        <a:xfrm>
+          <a:off x="0" y="0"/>
+          <a:ext cx="0" cy="0"/>
+          <a:chOff x="0" y="0"/>
+          <a:chExt cx="0" cy="0"/>
+        </a:xfrm>
+      </p:grpSpPr>
+      <p:sp>
+        <p:nvSpPr>
+          <p:cNvPr id="2" name="Text 0"/>
+          <p:cNvSpPr/>
+          <p:nvPr/>
+        </p:nvSpPr>
+        <p:spPr>
+          <a:xfrm>
+            <a:off x="457200" y="713232"/>
+            <a:ext cx="11368735" cy="274320"/>
+          </a:xfrm>
+          <a:prstGeom prst="rect">
+            <a:avLst/>
+          </a:prstGeom>
+          <a:noFill/>
+          <a:ln/>
+        </p:spPr>
+        <p:txBody>
+          <a:bodyPr wrap="square" lIns="0" tIns="0" rIns="0" bIns="0" rtlCol="0" anchor="ctr"/>
+          <a:lstStyle/>
+          <a:p>
+            <a:pPr algn="r" indent="0" marL="0">
+              <a:buNone/>
+            </a:pPr>
+            <a:r>
+              <a:rPr lang="en-US" sz="1400" b="1" dirty="0">
+                <a:solidFill>
+                  <a:srgbClr val="1C3F6E"/>
+                </a:solidFill>
+                <a:latin typeface="Calibri" pitchFamily="34" charset="0"/>
+                <a:ea typeface="Calibri" pitchFamily="34" charset="-122"/>
+                <a:cs typeface="Calibri" pitchFamily="34" charset="-120"/>
+              </a:rPr>
+              <a:t>REMEDIATION</a:t>
+            </a:r>
+            <a:endParaRPr lang="en-US" sz="1400" dirty="0"/>
+          </a:p>
+        </p:txBody>
+      </p:sp>
+      <p:pic>
+        <p:nvPicPr>
+          <p:cNvPr id="3" name="Image 0" descr="/home/claude/f4/img/minesec_sheet.png">    </p:cNvPr>
+          <p:cNvPicPr>
+            <a:picLocks noChangeAspect="1"/>
+          </p:cNvPicPr>
+          <p:nvPr/>
+        </p:nvPicPr>
+        <p:blipFill>
+          <a:blip r:embed="rId1"/>
+          <a:stretch>
+            <a:fillRect/>
+          </a:stretch>
+        </p:blipFill>
+        <p:spPr>
+          <a:xfrm>
+            <a:off x="0" y="658368"/>
+            <a:ext cx="5120640" cy="5833872"/>
+          </a:xfrm>
+          <a:prstGeom prst="rect">
+            <a:avLst/>
+          </a:prstGeom>
+        </p:spPr>
+      </p:pic>
+      <p:sp>
+        <p:nvSpPr>
+          <p:cNvPr id="4" name="Text 1"/>
+          <p:cNvSpPr/>
+          <p:nvPr/>
+        </p:nvSpPr>
+        <p:spPr>
+          <a:xfrm>
+            <a:off x="5349240" y="1005840"/>
+            <a:ext cx="6522415" cy="731520"/>
+          </a:xfrm>
+          <a:prstGeom prst="rect">
+            <a:avLst/>
+          </a:prstGeom>
+          <a:noFill/>
+          <a:ln/>
+        </p:spPr>
+        <p:txBody>
+          <a:bodyPr wrap="square" lIns="0" tIns="0" rIns="0" bIns="0" rtlCol="0" anchor="ctr">
+            <a:normAutofit/>
+          </a:bodyPr>
+          <a:lstStyle/>
+          <a:p>
+            <a:pPr algn="ctr" indent="0" marL="0">
+              <a:buNone/>
+            </a:pPr>
+            <a:r>
+              <a:rPr lang="en-US" sz="3600" b="1" dirty="0">
+                <a:solidFill>
+                  <a:srgbClr val="990011"/>
+                </a:solidFill>
+                <a:latin typeface="Times New Roman" pitchFamily="34" charset="0"/>
+                <a:ea typeface="Times New Roman" pitchFamily="34" charset="-122"/>
+                <a:cs typeface="Times New Roman" pitchFamily="34" charset="-120"/>
+              </a:rPr>
+              <a:t>Remediation</a:t>
+            </a:r>
+            <a:endParaRPr lang="en-US" sz="3600" dirty="0"/>
+          </a:p>
+        </p:txBody>
+      </p:sp>
+      <p:sp>
+        <p:nvSpPr>
+          <p:cNvPr id="5" name="Text 2"/>
+          <p:cNvSpPr/>
+          <p:nvPr/>
+        </p:nvSpPr>
+        <p:spPr>
+          <a:xfrm>
+            <a:off x="5349240" y="1783080"/>
+            <a:ext cx="6522415" cy="4663440"/>
+          </a:xfrm>
+          <a:prstGeom prst="rect">
+            <a:avLst/>
+          </a:prstGeom>
+          <a:noFill/>
+          <a:ln/>
+        </p:spPr>
+        <p:txBody>
+          <a:bodyPr wrap="square" lIns="0" tIns="0" rIns="0" bIns="0" rtlCol="0" anchor="t"/>
+          <a:lstStyle/>
+          <a:p>
+            <a:pPr algn="l" indent="0" marL="0">
+              <a:spcAft>
+                <a:spcPts val="800"/>
+              </a:spcAft>
+              <a:buNone/>
+            </a:pPr>
+            <a:r>
+              <a:rPr lang="en-US" sz="4000" b="1" dirty="0">
+                <a:solidFill>
+                  <a:srgbClr val="111111"/>
+                </a:solidFill>
+                <a:latin typeface="Times New Roman" pitchFamily="34" charset="0"/>
+                <a:ea typeface="Times New Roman" pitchFamily="34" charset="-122"/>
+                <a:cs typeface="Times New Roman" pitchFamily="34" charset="-120"/>
+              </a:rPr>
+              <a:t>Fill in the blanks:</a:t>
+            </a:r>
+            <a:endParaRPr lang="en-US" sz="4000" dirty="0"/>
+          </a:p>
+          <a:p>
+            <a:pPr algn="l" marL="342900" indent="-342900">
+              <a:spcAft>
+                <a:spcPts val="800"/>
+              </a:spcAft>
+              <a:buSzPct val="100000"/>
+              <a:buFont typeface="+mj-lt"/>
+              <a:buAutoNum type="arabicPeriod" startAt="1"/>
+            </a:pPr>
+            <a:r>
+              <a:rPr lang="en-US" sz="4000" dirty="0">
+                <a:solidFill>
+                  <a:srgbClr val="111111"/>
+                </a:solidFill>
+                <a:latin typeface="Times New Roman" pitchFamily="34" charset="0"/>
+                <a:ea typeface="Times New Roman" pitchFamily="34" charset="-122"/>
+                <a:cs typeface="Times New Roman" pitchFamily="34" charset="-120"/>
+              </a:rPr>
+              <a:t>All the plants of a place are called ______.</a:t>
+            </a:r>
+            <a:endParaRPr lang="en-US" sz="4000" dirty="0"/>
+          </a:p>
+          <a:p>
+            <a:pPr algn="l" marL="342900" indent="-342900">
+              <a:spcAft>
+                <a:spcPts val="800"/>
+              </a:spcAft>
+              <a:buSzPct val="100000"/>
+              <a:buFont typeface="+mj-lt"/>
+              <a:buAutoNum type="arabicPeriod" startAt="1"/>
+            </a:pPr>
+            <a:r>
+              <a:rPr lang="en-US" sz="4000" dirty="0">
+                <a:solidFill>
+                  <a:srgbClr val="111111"/>
+                </a:solidFill>
+                <a:latin typeface="Times New Roman" pitchFamily="34" charset="0"/>
+                <a:ea typeface="Times New Roman" pitchFamily="34" charset="-122"/>
+                <a:cs typeface="Times New Roman" pitchFamily="34" charset="-120"/>
+              </a:rPr>
+              <a:t>All the animals of a place are called ______.</a:t>
+            </a:r>
+            <a:endParaRPr lang="en-US" sz="4000" dirty="0"/>
+          </a:p>
+        </p:txBody>
+      </p:sp>
+      <p:sp>
+        <p:nvSpPr>
+          <p:cNvPr id="25" name="Slide Number Placeholder 0"/>
+          <p:cNvSpPr>
+            <a:spLocks noGrp="1"/>
+          </p:cNvSpPr>
+          <p:nvPr>
+            <p:ph type="sldNum" sz="quarter" idx="4294967295"/>
+          </p:nvPr>
+        </p:nvSpPr>
+        <p:spPr>
+          <a:xfrm>
+            <a:off x="27432" y="91440"/>
+            <a:ext cx="585216" cy="475488"/>
+          </a:xfrm>
+          <a:prstGeom prst="rect">
+            <a:avLst/>
+          </a:prstGeom>
+          <a:extLst>
+            <a:ext uri="{C572A759-6A51-4108-AA02-DFA0A04FC94B}">
+              <ma14:wrappingTextBoxFlag xmlns:ma14="http://schemas.microsoft.com/office/mac/drawingml/2011/main" val="0"/>
+            </a:ext>
+          </a:extLst>
+        </p:spPr>
+        <p:txBody>
+          <a:bodyPr/>
+          <a:lstStyle>
+            <a:lvl1pPr>
+              <a:defRPr sz="2000">
+                <a:solidFill>
+                  <a:srgbClr val="FFFFFF"/>
+                </a:solidFill>
+                <a:latin typeface="Calibri"/>
+                <a:ea typeface="Calibri"/>
+                <a:cs typeface="Calibri"/>
+              </a:defRPr>
+            </a:lvl1pPr>
+          </a:lstStyle>
+          <a:p>
+            <a:pPr algn="ctr"/>
+            <a:fld id="{F7021451-1387-4CA6-816F-3879F97B5CBC}" type="slidenum">
+              <a:rPr b="1" lang="en-US"/>
+              <a:t>49</a:t>
+            </a:fld>
+            <a:endParaRPr lang="en-US"/>
+          </a:p>
+        </p:txBody>
+      </p:sp>
+    </p:spTree>
+  </p:cSld>
+  <p:clrMapOvr>
+    <a:masterClrMapping/>
+  </p:clrMapOvr>
+</p:sld>
+</file>
+
+<file path=ppt/slides/slide5.xml><?xml version="1.0" encoding="utf-8"?>
+<p:sld xmlns:a="http://schemas.openxmlformats.org/drawingml/2006/main" xmlns:r="http://schemas.openxmlformats.org/officeDocument/2006/relationships" xmlns:p="http://schemas.openxmlformats.org/presentationml/2006/main">
+  <p:cSld name="Slide 5">
+    <p:spTree>
+      <p:nvGrpSpPr>
+        <p:cNvPr id="1" name=""/>
+        <p:cNvGrpSpPr/>
+        <p:nvPr/>
+      </p:nvGrpSpPr>
+      <p:grpSpPr>
+        <a:xfrm>
+          <a:off x="0" y="0"/>
+          <a:ext cx="0" cy="0"/>
+          <a:chOff x="0" y="0"/>
+          <a:chExt cx="0" cy="0"/>
+        </a:xfrm>
+      </p:grpSpPr>
+      <p:sp>
+        <p:nvSpPr>
+          <p:cNvPr id="2" name="Text 0"/>
+          <p:cNvSpPr/>
+          <p:nvPr/>
+        </p:nvSpPr>
+        <p:spPr>
+          <a:xfrm>
+            <a:off x="457200" y="713232"/>
+            <a:ext cx="11368735" cy="274320"/>
+          </a:xfrm>
+          <a:prstGeom prst="rect">
+            <a:avLst/>
+          </a:prstGeom>
+          <a:noFill/>
+          <a:ln/>
+        </p:spPr>
+        <p:txBody>
+          <a:bodyPr wrap="square" lIns="0" tIns="0" rIns="0" bIns="0" rtlCol="0" anchor="ctr"/>
+          <a:lstStyle/>
+          <a:p>
+            <a:pPr algn="r" indent="0" marL="0">
+              <a:buNone/>
+            </a:pPr>
+            <a:r>
+              <a:rPr lang="en-US" sz="1400" b="1" dirty="0">
+                <a:solidFill>
+                  <a:srgbClr val="1C3F6E"/>
+                </a:solidFill>
+                <a:latin typeface="Calibri" pitchFamily="34" charset="0"/>
+                <a:ea typeface="Calibri" pitchFamily="34" charset="-122"/>
+                <a:cs typeface="Calibri" pitchFamily="34" charset="-120"/>
+              </a:rPr>
+              <a:t>HOMEWORK CORRECTION</a:t>
+            </a:r>
+            <a:endParaRPr lang="en-US" sz="1400" dirty="0"/>
+          </a:p>
+        </p:txBody>
+      </p:sp>
+      <p:pic>
+        <p:nvPicPr>
+          <p:cNvPr id="3" name="Image 0" descr="/home/claude/f4/img/minesec_sheet.png">    </p:cNvPr>
+          <p:cNvPicPr>
+            <a:picLocks noChangeAspect="1"/>
+          </p:cNvPicPr>
+          <p:nvPr/>
+        </p:nvPicPr>
+        <p:blipFill>
+          <a:blip r:embed="rId1"/>
+          <a:stretch>
+            <a:fillRect/>
+          </a:stretch>
+        </p:blipFill>
+        <p:spPr>
+          <a:xfrm>
+            <a:off x="0" y="658368"/>
+            <a:ext cx="5120640" cy="5833872"/>
+          </a:xfrm>
+          <a:prstGeom prst="rect">
+            <a:avLst/>
+          </a:prstGeom>
+        </p:spPr>
+      </p:pic>
+      <p:sp>
+        <p:nvSpPr>
+          <p:cNvPr id="4" name="Text 1"/>
+          <p:cNvSpPr/>
+          <p:nvPr/>
+        </p:nvSpPr>
+        <p:spPr>
+          <a:xfrm>
+            <a:off x="5349240" y="1005840"/>
+            <a:ext cx="6522415" cy="731520"/>
+          </a:xfrm>
+          <a:prstGeom prst="rect">
+            <a:avLst/>
+          </a:prstGeom>
+          <a:noFill/>
+          <a:ln/>
+        </p:spPr>
+        <p:txBody>
+          <a:bodyPr wrap="square" lIns="0" tIns="0" rIns="0" bIns="0" rtlCol="0" anchor="ctr">
+            <a:normAutofit/>
+          </a:bodyPr>
+          <a:lstStyle/>
+          <a:p>
+            <a:pPr algn="ctr" indent="0" marL="0">
+              <a:buNone/>
+            </a:pPr>
+            <a:r>
+              <a:rPr lang="en-US" sz="3600" b="1" dirty="0">
+                <a:solidFill>
+                  <a:srgbClr val="990011"/>
+                </a:solidFill>
+                <a:latin typeface="Times New Roman" pitchFamily="34" charset="0"/>
+                <a:ea typeface="Times New Roman" pitchFamily="34" charset="-122"/>
+                <a:cs typeface="Times New Roman" pitchFamily="34" charset="-120"/>
+              </a:rPr>
+              <a:t>Correction: Possible Answer</a:t>
+            </a:r>
+            <a:endParaRPr lang="en-US" sz="3600" dirty="0"/>
+          </a:p>
+        </p:txBody>
+      </p:sp>
+      <p:sp>
+        <p:nvSpPr>
+          <p:cNvPr id="5" name="Text 2"/>
+          <p:cNvSpPr/>
+          <p:nvPr/>
+        </p:nvSpPr>
+        <p:spPr>
+          <a:xfrm>
+            <a:off x="5349240" y="1783080"/>
+            <a:ext cx="6522415" cy="4663440"/>
+          </a:xfrm>
+          <a:prstGeom prst="rect">
+            <a:avLst/>
+          </a:prstGeom>
+          <a:noFill/>
+          <a:ln/>
+        </p:spPr>
+        <p:txBody>
+          <a:bodyPr wrap="square" lIns="0" tIns="0" rIns="0" bIns="0" rtlCol="0" anchor="t"/>
+          <a:lstStyle/>
+          <a:p>
+            <a:pPr algn="l" indent="0" marL="0">
+              <a:spcAft>
+                <a:spcPts val="800"/>
+              </a:spcAft>
+              <a:buNone/>
+            </a:pPr>
+            <a:r>
+              <a:rPr lang="en-US" sz="4000" dirty="0">
+                <a:solidFill>
+                  <a:srgbClr val="111111"/>
+                </a:solidFill>
+                <a:latin typeface="Times New Roman" pitchFamily="34" charset="0"/>
+                <a:ea typeface="Times New Roman" pitchFamily="34" charset="-122"/>
+                <a:cs typeface="Times New Roman" pitchFamily="34" charset="-120"/>
+              </a:rPr>
+              <a:t>Garoua is 6 hours ahead of New York (+1 − (−5) = 6), so it is 09:00 − 6 h = 03:00 in New York.</a:t>
+            </a:r>
+            <a:endParaRPr lang="en-US" sz="4000" dirty="0"/>
+          </a:p>
+        </p:txBody>
+      </p:sp>
+      <p:sp>
+        <p:nvSpPr>
+          <p:cNvPr id="25" name="Slide Number Placeholder 0"/>
+          <p:cNvSpPr>
+            <a:spLocks noGrp="1"/>
+          </p:cNvSpPr>
+          <p:nvPr>
+            <p:ph type="sldNum" sz="quarter" idx="4294967295"/>
+          </p:nvPr>
+        </p:nvSpPr>
+        <p:spPr>
+          <a:xfrm>
+            <a:off x="27432" y="91440"/>
+            <a:ext cx="585216" cy="475488"/>
+          </a:xfrm>
+          <a:prstGeom prst="rect">
+            <a:avLst/>
+          </a:prstGeom>
+          <a:extLst>
+            <a:ext uri="{C572A759-6A51-4108-AA02-DFA0A04FC94B}">
+              <ma14:wrappingTextBoxFlag xmlns:ma14="http://schemas.microsoft.com/office/mac/drawingml/2011/main" val="0"/>
+            </a:ext>
+          </a:extLst>
+        </p:spPr>
+        <p:txBody>
+          <a:bodyPr/>
+          <a:lstStyle>
+            <a:lvl1pPr>
+              <a:defRPr sz="2000">
+                <a:solidFill>
+                  <a:srgbClr val="FFFFFF"/>
+                </a:solidFill>
+                <a:latin typeface="Calibri"/>
+                <a:ea typeface="Calibri"/>
+                <a:cs typeface="Calibri"/>
+              </a:defRPr>
+            </a:lvl1pPr>
+          </a:lstStyle>
+          <a:p>
+            <a:pPr algn="ctr"/>
+            <a:fld id="{F7021451-1387-4CA6-816F-3879F97B5CBC}" type="slidenum">
+              <a:rPr b="1" lang="en-US"/>
+              <a:t>5</a:t>
+            </a:fld>
+            <a:endParaRPr lang="en-US"/>
+          </a:p>
+        </p:txBody>
+      </p:sp>
+    </p:spTree>
+  </p:cSld>
+  <p:clrMapOvr>
+    <a:masterClrMapping/>
+  </p:clrMapOvr>
+</p:sld>
+</file>
+
+<file path=ppt/slides/slide50.xml><?xml version="1.0" encoding="utf-8"?>
+<p:sld xmlns:a="http://schemas.openxmlformats.org/drawingml/2006/main" xmlns:r="http://schemas.openxmlformats.org/officeDocument/2006/relationships" xmlns:p="http://schemas.openxmlformats.org/presentationml/2006/main">
+  <p:cSld name="Slide 50">
+    <p:spTree>
+      <p:nvGrpSpPr>
+        <p:cNvPr id="1" name=""/>
+        <p:cNvGrpSpPr/>
+        <p:nvPr/>
+      </p:nvGrpSpPr>
+      <p:grpSpPr>
+        <a:xfrm>
+          <a:off x="0" y="0"/>
+          <a:ext cx="0" cy="0"/>
+          <a:chOff x="0" y="0"/>
+          <a:chExt cx="0" cy="0"/>
+        </a:xfrm>
+      </p:grpSpPr>
+      <p:sp>
+        <p:nvSpPr>
+          <p:cNvPr id="2" name="Text 0"/>
+          <p:cNvSpPr/>
+          <p:nvPr/>
+        </p:nvSpPr>
+        <p:spPr>
+          <a:xfrm>
+            <a:off x="457200" y="713232"/>
+            <a:ext cx="11368735" cy="274320"/>
+          </a:xfrm>
+          <a:prstGeom prst="rect">
+            <a:avLst/>
+          </a:prstGeom>
+          <a:noFill/>
+          <a:ln/>
+        </p:spPr>
+        <p:txBody>
+          <a:bodyPr wrap="square" lIns="0" tIns="0" rIns="0" bIns="0" rtlCol="0" anchor="ctr"/>
+          <a:lstStyle/>
+          <a:p>
+            <a:pPr algn="r" indent="0" marL="0">
+              <a:buNone/>
+            </a:pPr>
+            <a:r>
+              <a:rPr lang="en-US" sz="1400" b="1" dirty="0">
+                <a:solidFill>
+                  <a:srgbClr val="1C3F6E"/>
+                </a:solidFill>
+                <a:latin typeface="Calibri" pitchFamily="34" charset="0"/>
+                <a:ea typeface="Calibri" pitchFamily="34" charset="-122"/>
+                <a:cs typeface="Calibri" pitchFamily="34" charset="-120"/>
+              </a:rPr>
+              <a:t>REMEDIATION</a:t>
+            </a:r>
+            <a:endParaRPr lang="en-US" sz="1400" dirty="0"/>
+          </a:p>
+        </p:txBody>
+      </p:sp>
+      <p:pic>
+        <p:nvPicPr>
+          <p:cNvPr id="3" name="Image 0" descr="/home/claude/f4/img/minesec_sheet.png">    </p:cNvPr>
+          <p:cNvPicPr>
+            <a:picLocks noChangeAspect="1"/>
+          </p:cNvPicPr>
+          <p:nvPr/>
+        </p:nvPicPr>
+        <p:blipFill>
+          <a:blip r:embed="rId1"/>
+          <a:stretch>
+            <a:fillRect/>
+          </a:stretch>
+        </p:blipFill>
+        <p:spPr>
+          <a:xfrm>
+            <a:off x="0" y="658368"/>
+            <a:ext cx="5120640" cy="5833872"/>
+          </a:xfrm>
+          <a:prstGeom prst="rect">
+            <a:avLst/>
+          </a:prstGeom>
+        </p:spPr>
+      </p:pic>
+      <p:sp>
+        <p:nvSpPr>
+          <p:cNvPr id="4" name="Text 1"/>
+          <p:cNvSpPr/>
+          <p:nvPr/>
+        </p:nvSpPr>
+        <p:spPr>
+          <a:xfrm>
+            <a:off x="5349240" y="1005840"/>
+            <a:ext cx="6522415" cy="731520"/>
+          </a:xfrm>
+          <a:prstGeom prst="rect">
+            <a:avLst/>
+          </a:prstGeom>
+          <a:noFill/>
+          <a:ln/>
+        </p:spPr>
+        <p:txBody>
+          <a:bodyPr wrap="square" lIns="0" tIns="0" rIns="0" bIns="0" rtlCol="0" anchor="ctr">
+            <a:normAutofit/>
+          </a:bodyPr>
+          <a:lstStyle/>
+          <a:p>
+            <a:pPr algn="ctr" indent="0" marL="0">
+              <a:buNone/>
+            </a:pPr>
+            <a:r>
+              <a:rPr lang="en-US" sz="3600" b="1" dirty="0">
+                <a:solidFill>
+                  <a:srgbClr val="990011"/>
+                </a:solidFill>
+                <a:latin typeface="Times New Roman" pitchFamily="34" charset="0"/>
+                <a:ea typeface="Times New Roman" pitchFamily="34" charset="-122"/>
+                <a:cs typeface="Times New Roman" pitchFamily="34" charset="-120"/>
+              </a:rPr>
+              <a:t>Remediation (continued)</a:t>
+            </a:r>
+            <a:endParaRPr lang="en-US" sz="3600" dirty="0"/>
+          </a:p>
+        </p:txBody>
+      </p:sp>
+      <p:sp>
+        <p:nvSpPr>
+          <p:cNvPr id="5" name="Text 2"/>
+          <p:cNvSpPr/>
+          <p:nvPr/>
+        </p:nvSpPr>
+        <p:spPr>
+          <a:xfrm>
+            <a:off x="5349240" y="1783080"/>
+            <a:ext cx="6522415" cy="4663440"/>
+          </a:xfrm>
+          <a:prstGeom prst="rect">
+            <a:avLst/>
+          </a:prstGeom>
+          <a:noFill/>
+          <a:ln/>
+        </p:spPr>
+        <p:txBody>
+          <a:bodyPr wrap="square" lIns="0" tIns="0" rIns="0" bIns="0" rtlCol="0" anchor="t"/>
+          <a:lstStyle/>
+          <a:p>
+            <a:pPr algn="l" marL="342900" indent="-342900">
+              <a:spcAft>
+                <a:spcPts val="800"/>
+              </a:spcAft>
+              <a:buSzPct val="100000"/>
+              <a:buFont typeface="+mj-lt"/>
+              <a:buAutoNum type="arabicPeriod" startAt="1"/>
+            </a:pPr>
+            <a:r>
+              <a:rPr lang="en-US" sz="4000" dirty="0">
+                <a:solidFill>
+                  <a:srgbClr val="111111"/>
+                </a:solidFill>
+                <a:latin typeface="Times New Roman" pitchFamily="34" charset="0"/>
+                <a:ea typeface="Times New Roman" pitchFamily="34" charset="-122"/>
+                <a:cs typeface="Times New Roman" pitchFamily="34" charset="-120"/>
+              </a:rPr>
+              <a:t>All the rivers and lakes of a place form the ______.</a:t>
+            </a:r>
+            <a:endParaRPr lang="en-US" sz="4000" dirty="0"/>
+          </a:p>
+        </p:txBody>
+      </p:sp>
+      <p:sp>
+        <p:nvSpPr>
+          <p:cNvPr id="25" name="Slide Number Placeholder 0"/>
+          <p:cNvSpPr>
+            <a:spLocks noGrp="1"/>
+          </p:cNvSpPr>
+          <p:nvPr>
+            <p:ph type="sldNum" sz="quarter" idx="4294967295"/>
+          </p:nvPr>
+        </p:nvSpPr>
+        <p:spPr>
+          <a:xfrm>
+            <a:off x="27432" y="91440"/>
+            <a:ext cx="585216" cy="475488"/>
+          </a:xfrm>
+          <a:prstGeom prst="rect">
+            <a:avLst/>
+          </a:prstGeom>
+          <a:extLst>
+            <a:ext uri="{C572A759-6A51-4108-AA02-DFA0A04FC94B}">
+              <ma14:wrappingTextBoxFlag xmlns:ma14="http://schemas.microsoft.com/office/mac/drawingml/2011/main" val="0"/>
+            </a:ext>
+          </a:extLst>
+        </p:spPr>
+        <p:txBody>
+          <a:bodyPr/>
+          <a:lstStyle>
+            <a:lvl1pPr>
+              <a:defRPr sz="2000">
+                <a:solidFill>
+                  <a:srgbClr val="FFFFFF"/>
+                </a:solidFill>
+                <a:latin typeface="Calibri"/>
+                <a:ea typeface="Calibri"/>
+                <a:cs typeface="Calibri"/>
+              </a:defRPr>
+            </a:lvl1pPr>
+          </a:lstStyle>
+          <a:p>
+            <a:pPr algn="ctr"/>
+            <a:fld id="{F7021451-1387-4CA6-816F-3879F97B5CBC}" type="slidenum">
+              <a:rPr b="1" lang="en-US"/>
+              <a:t>50</a:t>
+            </a:fld>
+            <a:endParaRPr lang="en-US"/>
+          </a:p>
+        </p:txBody>
+      </p:sp>
+    </p:spTree>
+  </p:cSld>
+  <p:clrMapOvr>
+    <a:masterClrMapping/>
+  </p:clrMapOvr>
+</p:sld>
+</file>
+
+<file path=ppt/slides/slide51.xml><?xml version="1.0" encoding="utf-8"?>
+<p:sld xmlns:a="http://schemas.openxmlformats.org/drawingml/2006/main" xmlns:r="http://schemas.openxmlformats.org/officeDocument/2006/relationships" xmlns:p="http://schemas.openxmlformats.org/presentationml/2006/main">
+  <p:cSld name="Slide 51">
+    <p:spTree>
+      <p:nvGrpSpPr>
+        <p:cNvPr id="1" name=""/>
+        <p:cNvGrpSpPr/>
+        <p:nvPr/>
+      </p:nvGrpSpPr>
+      <p:grpSpPr>
+        <a:xfrm>
+          <a:off x="0" y="0"/>
+          <a:ext cx="0" cy="0"/>
+          <a:chOff x="0" y="0"/>
+          <a:chExt cx="0" cy="0"/>
+        </a:xfrm>
+      </p:grpSpPr>
+      <p:sp>
+        <p:nvSpPr>
+          <p:cNvPr id="2" name="Text 0"/>
+          <p:cNvSpPr/>
+          <p:nvPr/>
+        </p:nvSpPr>
+        <p:spPr>
+          <a:xfrm>
+            <a:off x="457200" y="713232"/>
+            <a:ext cx="11368735" cy="274320"/>
+          </a:xfrm>
+          <a:prstGeom prst="rect">
+            <a:avLst/>
+          </a:prstGeom>
+          <a:noFill/>
+          <a:ln/>
+        </p:spPr>
+        <p:txBody>
+          <a:bodyPr wrap="square" lIns="0" tIns="0" rIns="0" bIns="0" rtlCol="0" anchor="ctr"/>
+          <a:lstStyle/>
+          <a:p>
+            <a:pPr algn="r" indent="0" marL="0">
+              <a:buNone/>
+            </a:pPr>
+            <a:r>
+              <a:rPr lang="en-US" sz="1400" b="1" dirty="0">
+                <a:solidFill>
+                  <a:srgbClr val="1C3F6E"/>
+                </a:solidFill>
+                <a:latin typeface="Calibri" pitchFamily="34" charset="0"/>
+                <a:ea typeface="Calibri" pitchFamily="34" charset="-122"/>
+                <a:cs typeface="Calibri" pitchFamily="34" charset="-120"/>
+              </a:rPr>
+              <a:t>HOMEWORK</a:t>
+            </a:r>
+            <a:endParaRPr lang="en-US" sz="1400" dirty="0"/>
+          </a:p>
+        </p:txBody>
+      </p:sp>
+      <p:pic>
+        <p:nvPicPr>
+          <p:cNvPr id="3" name="Image 0" descr="/home/claude/f4/img/minesec_sheet.png">    </p:cNvPr>
+          <p:cNvPicPr>
+            <a:picLocks noChangeAspect="1"/>
+          </p:cNvPicPr>
+          <p:nvPr/>
+        </p:nvPicPr>
+        <p:blipFill>
+          <a:blip r:embed="rId1"/>
+          <a:stretch>
+            <a:fillRect/>
+          </a:stretch>
+        </p:blipFill>
+        <p:spPr>
+          <a:xfrm>
+            <a:off x="0" y="658368"/>
+            <a:ext cx="5120640" cy="5833872"/>
+          </a:xfrm>
+          <a:prstGeom prst="rect">
+            <a:avLst/>
+          </a:prstGeom>
+        </p:spPr>
+      </p:pic>
+      <p:sp>
+        <p:nvSpPr>
+          <p:cNvPr id="4" name="Text 1"/>
+          <p:cNvSpPr/>
+          <p:nvPr/>
+        </p:nvSpPr>
+        <p:spPr>
+          <a:xfrm>
+            <a:off x="5349240" y="1005840"/>
+            <a:ext cx="6522415" cy="731520"/>
+          </a:xfrm>
+          <a:prstGeom prst="rect">
+            <a:avLst/>
+          </a:prstGeom>
+          <a:noFill/>
+          <a:ln/>
+        </p:spPr>
+        <p:txBody>
+          <a:bodyPr wrap="square" lIns="0" tIns="0" rIns="0" bIns="0" rtlCol="0" anchor="ctr">
+            <a:normAutofit/>
+          </a:bodyPr>
+          <a:lstStyle/>
+          <a:p>
+            <a:pPr algn="ctr" indent="0" marL="0">
+              <a:buNone/>
+            </a:pPr>
+            <a:r>
+              <a:rPr lang="en-US" sz="3600" b="1" dirty="0">
+                <a:solidFill>
+                  <a:srgbClr val="990011"/>
+                </a:solidFill>
+                <a:latin typeface="Times New Roman" pitchFamily="34" charset="0"/>
+                <a:ea typeface="Times New Roman" pitchFamily="34" charset="-122"/>
+                <a:cs typeface="Times New Roman" pitchFamily="34" charset="-120"/>
+              </a:rPr>
+              <a:t>Homework</a:t>
+            </a:r>
+            <a:endParaRPr lang="en-US" sz="3600" dirty="0"/>
+          </a:p>
+        </p:txBody>
+      </p:sp>
+      <p:sp>
+        <p:nvSpPr>
+          <p:cNvPr id="5" name="Text 2"/>
+          <p:cNvSpPr/>
+          <p:nvPr/>
+        </p:nvSpPr>
+        <p:spPr>
+          <a:xfrm>
+            <a:off x="5349240" y="1783080"/>
+            <a:ext cx="6522415" cy="4663440"/>
+          </a:xfrm>
+          <a:prstGeom prst="rect">
+            <a:avLst/>
+          </a:prstGeom>
+          <a:noFill/>
+          <a:ln/>
+        </p:spPr>
+        <p:txBody>
+          <a:bodyPr wrap="square" lIns="0" tIns="0" rIns="0" bIns="0" rtlCol="0" anchor="t"/>
+          <a:lstStyle/>
+          <a:p>
+            <a:pPr algn="l" indent="0" marL="0">
+              <a:spcAft>
+                <a:spcPts val="800"/>
+              </a:spcAft>
+              <a:buNone/>
+            </a:pPr>
+            <a:r>
+              <a:rPr lang="en-US" sz="4000" dirty="0">
+                <a:solidFill>
+                  <a:srgbClr val="111111"/>
+                </a:solidFill>
+                <a:latin typeface="Times New Roman" pitchFamily="34" charset="0"/>
+                <a:ea typeface="Times New Roman" pitchFamily="34" charset="-122"/>
+                <a:cs typeface="Times New Roman" pitchFamily="34" charset="-120"/>
+              </a:rPr>
+              <a:t>List five living things and five non-living things in your school compound.</a:t>
+            </a:r>
+            <a:endParaRPr lang="en-US" sz="4000" dirty="0"/>
+          </a:p>
+        </p:txBody>
+      </p:sp>
+      <p:sp>
+        <p:nvSpPr>
+          <p:cNvPr id="25" name="Slide Number Placeholder 0"/>
+          <p:cNvSpPr>
+            <a:spLocks noGrp="1"/>
+          </p:cNvSpPr>
+          <p:nvPr>
+            <p:ph type="sldNum" sz="quarter" idx="4294967295"/>
+          </p:nvPr>
+        </p:nvSpPr>
+        <p:spPr>
+          <a:xfrm>
+            <a:off x="27432" y="91440"/>
+            <a:ext cx="585216" cy="475488"/>
+          </a:xfrm>
+          <a:prstGeom prst="rect">
+            <a:avLst/>
+          </a:prstGeom>
+          <a:extLst>
+            <a:ext uri="{C572A759-6A51-4108-AA02-DFA0A04FC94B}">
+              <ma14:wrappingTextBoxFlag xmlns:ma14="http://schemas.microsoft.com/office/mac/drawingml/2011/main" val="0"/>
+            </a:ext>
+          </a:extLst>
+        </p:spPr>
+        <p:txBody>
+          <a:bodyPr/>
+          <a:lstStyle>
+            <a:lvl1pPr>
+              <a:defRPr sz="2000">
+                <a:solidFill>
+                  <a:srgbClr val="FFFFFF"/>
+                </a:solidFill>
+                <a:latin typeface="Calibri"/>
+                <a:ea typeface="Calibri"/>
+                <a:cs typeface="Calibri"/>
+              </a:defRPr>
+            </a:lvl1pPr>
+          </a:lstStyle>
+          <a:p>
+            <a:pPr algn="ctr"/>
+            <a:fld id="{F7021451-1387-4CA6-816F-3879F97B5CBC}" type="slidenum">
+              <a:rPr b="1" lang="en-US"/>
+              <a:t>51</a:t>
+            </a:fld>
+            <a:endParaRPr lang="en-US"/>
+          </a:p>
+        </p:txBody>
+      </p:sp>
+    </p:spTree>
+  </p:cSld>
+  <p:clrMapOvr>
+    <a:masterClrMapping/>
+  </p:clrMapOvr>
+</p:sld>
+</file>
+
+<file path=ppt/slides/slide52.xml><?xml version="1.0" encoding="utf-8"?>
+<p:sld xmlns:a="http://schemas.openxmlformats.org/drawingml/2006/main" xmlns:r="http://schemas.openxmlformats.org/officeDocument/2006/relationships" xmlns:p="http://schemas.openxmlformats.org/presentationml/2006/main">
+  <p:cSld name="Slide 52">
+    <p:spTree>
+      <p:nvGrpSpPr>
+        <p:cNvPr id="1" name=""/>
+        <p:cNvGrpSpPr/>
+        <p:nvPr/>
+      </p:nvGrpSpPr>
+      <p:grpSpPr>
+        <a:xfrm>
+          <a:off x="0" y="0"/>
+          <a:ext cx="0" cy="0"/>
+          <a:chOff x="0" y="0"/>
+          <a:chExt cx="0" cy="0"/>
+        </a:xfrm>
+      </p:grpSpPr>
+      <p:sp>
+        <p:nvSpPr>
+          <p:cNvPr id="2" name="Text 0"/>
+          <p:cNvSpPr/>
+          <p:nvPr/>
+        </p:nvSpPr>
+        <p:spPr>
+          <a:xfrm>
+            <a:off x="457200" y="713232"/>
+            <a:ext cx="11368735" cy="274320"/>
+          </a:xfrm>
+          <a:prstGeom prst="rect">
+            <a:avLst/>
+          </a:prstGeom>
+          <a:noFill/>
+          <a:ln/>
+        </p:spPr>
+        <p:txBody>
+          <a:bodyPr wrap="square" lIns="0" tIns="0" rIns="0" bIns="0" rtlCol="0" anchor="ctr"/>
+          <a:lstStyle/>
+          <a:p>
+            <a:pPr algn="r" indent="0" marL="0">
+              <a:buNone/>
+            </a:pPr>
+            <a:r>
+              <a:rPr lang="en-US" sz="1400" b="1" dirty="0">
+                <a:solidFill>
+                  <a:srgbClr val="1C3F6E"/>
+                </a:solidFill>
+                <a:latin typeface="Calibri" pitchFamily="34" charset="0"/>
+                <a:ea typeface="Calibri" pitchFamily="34" charset="-122"/>
+                <a:cs typeface="Calibri" pitchFamily="34" charset="-120"/>
+              </a:rPr>
+              <a:t>NEXT LESSON</a:t>
+            </a:r>
+            <a:endParaRPr lang="en-US" sz="1400" dirty="0"/>
+          </a:p>
+        </p:txBody>
+      </p:sp>
+      <p:pic>
+        <p:nvPicPr>
+          <p:cNvPr id="3" name="Image 0" descr="/home/claude/f4/img/minesec_sheet.png">    </p:cNvPr>
+          <p:cNvPicPr>
+            <a:picLocks noChangeAspect="1"/>
+          </p:cNvPicPr>
+          <p:nvPr/>
+        </p:nvPicPr>
+        <p:blipFill>
+          <a:blip r:embed="rId1"/>
+          <a:stretch>
+            <a:fillRect/>
+          </a:stretch>
+        </p:blipFill>
+        <p:spPr>
+          <a:xfrm>
+            <a:off x="0" y="658368"/>
+            <a:ext cx="5120640" cy="5833872"/>
+          </a:xfrm>
+          <a:prstGeom prst="rect">
+            <a:avLst/>
+          </a:prstGeom>
+        </p:spPr>
+      </p:pic>
+      <p:sp>
+        <p:nvSpPr>
+          <p:cNvPr id="4" name="Text 1"/>
+          <p:cNvSpPr/>
+          <p:nvPr/>
+        </p:nvSpPr>
+        <p:spPr>
+          <a:xfrm>
+            <a:off x="5349240" y="1005840"/>
+            <a:ext cx="6522415" cy="731520"/>
+          </a:xfrm>
+          <a:prstGeom prst="rect">
+            <a:avLst/>
+          </a:prstGeom>
+          <a:noFill/>
+          <a:ln/>
+        </p:spPr>
+        <p:txBody>
+          <a:bodyPr wrap="square" lIns="0" tIns="0" rIns="0" bIns="0" rtlCol="0" anchor="ctr">
+            <a:normAutofit/>
+          </a:bodyPr>
+          <a:lstStyle/>
+          <a:p>
+            <a:pPr algn="ctr" indent="0" marL="0">
+              <a:buNone/>
+            </a:pPr>
+            <a:r>
+              <a:rPr lang="en-US" sz="3600" b="1" dirty="0">
+                <a:solidFill>
+                  <a:srgbClr val="990011"/>
+                </a:solidFill>
+                <a:latin typeface="Times New Roman" pitchFamily="34" charset="0"/>
+                <a:ea typeface="Times New Roman" pitchFamily="34" charset="-122"/>
+                <a:cs typeface="Times New Roman" pitchFamily="34" charset="-120"/>
+              </a:rPr>
+              <a:t>Next Lesson</a:t>
+            </a:r>
+            <a:endParaRPr lang="en-US" sz="3600" dirty="0"/>
+          </a:p>
+        </p:txBody>
+      </p:sp>
+      <p:sp>
+        <p:nvSpPr>
+          <p:cNvPr id="5" name="Text 2"/>
+          <p:cNvSpPr/>
+          <p:nvPr/>
+        </p:nvSpPr>
+        <p:spPr>
+          <a:xfrm>
+            <a:off x="5349240" y="1783080"/>
+            <a:ext cx="6522415" cy="4663440"/>
+          </a:xfrm>
+          <a:prstGeom prst="rect">
+            <a:avLst/>
+          </a:prstGeom>
+          <a:noFill/>
+          <a:ln/>
+        </p:spPr>
+        <p:txBody>
+          <a:bodyPr wrap="square" lIns="0" tIns="0" rIns="0" bIns="0" rtlCol="0" anchor="ctr"/>
+          <a:lstStyle/>
+          <a:p>
+            <a:pPr algn="ctr" indent="0" marL="0">
+              <a:spcAft>
+                <a:spcPts val="800"/>
+              </a:spcAft>
+              <a:buNone/>
+            </a:pPr>
+            <a:r>
+              <a:rPr lang="en-US" sz="4000" b="1" dirty="0">
+                <a:solidFill>
+                  <a:srgbClr val="111111"/>
+                </a:solidFill>
+                <a:latin typeface="Times New Roman" pitchFamily="34" charset="0"/>
+                <a:ea typeface="Times New Roman" pitchFamily="34" charset="-122"/>
+                <a:cs typeface="Times New Roman" pitchFamily="34" charset="-120"/>
+              </a:rPr>
+              <a:t>Our next lesson will be on:</a:t>
+            </a:r>
+            <a:endParaRPr lang="en-US" sz="4000" dirty="0"/>
+          </a:p>
+          <a:p>
+            <a:pPr algn="ctr" indent="0" marL="0">
+              <a:spcAft>
+                <a:spcPts val="800"/>
+              </a:spcAft>
+              <a:buNone/>
+            </a:pPr>
+            <a:r>
+              <a:rPr lang="en-US" sz="4000" b="1" dirty="0">
+                <a:solidFill>
+                  <a:srgbClr val="990011"/>
+                </a:solidFill>
+                <a:latin typeface="Times New Roman" pitchFamily="34" charset="0"/>
+                <a:ea typeface="Times New Roman" pitchFamily="34" charset="-122"/>
+                <a:cs typeface="Times New Roman" pitchFamily="34" charset="-120"/>
+              </a:rPr>
+              <a:t>Lesson 5: Natural Regions (Bio-climatic Zones) of Cameroon</a:t>
+            </a:r>
+            <a:endParaRPr lang="en-US" sz="4000" dirty="0"/>
+          </a:p>
+        </p:txBody>
+      </p:sp>
+      <p:sp>
+        <p:nvSpPr>
+          <p:cNvPr id="25" name="Slide Number Placeholder 0"/>
+          <p:cNvSpPr>
+            <a:spLocks noGrp="1"/>
+          </p:cNvSpPr>
+          <p:nvPr>
+            <p:ph type="sldNum" sz="quarter" idx="4294967295"/>
+          </p:nvPr>
+        </p:nvSpPr>
+        <p:spPr>
+          <a:xfrm>
+            <a:off x="27432" y="91440"/>
+            <a:ext cx="585216" cy="475488"/>
+          </a:xfrm>
+          <a:prstGeom prst="rect">
+            <a:avLst/>
+          </a:prstGeom>
+          <a:extLst>
+            <a:ext uri="{C572A759-6A51-4108-AA02-DFA0A04FC94B}">
+              <ma14:wrappingTextBoxFlag xmlns:ma14="http://schemas.microsoft.com/office/mac/drawingml/2011/main" val="0"/>
+            </a:ext>
+          </a:extLst>
+        </p:spPr>
+        <p:txBody>
+          <a:bodyPr/>
+          <a:lstStyle>
+            <a:lvl1pPr>
+              <a:defRPr sz="2000">
+                <a:solidFill>
+                  <a:srgbClr val="FFFFFF"/>
+                </a:solidFill>
+                <a:latin typeface="Calibri"/>
+                <a:ea typeface="Calibri"/>
+                <a:cs typeface="Calibri"/>
+              </a:defRPr>
+            </a:lvl1pPr>
+          </a:lstStyle>
+          <a:p>
+            <a:pPr algn="ctr"/>
+            <a:fld id="{F7021451-1387-4CA6-816F-3879F97B5CBC}" type="slidenum">
+              <a:rPr b="1" lang="en-US"/>
+              <a:t>52</a:t>
+            </a:fld>
+            <a:endParaRPr lang="en-US"/>
+          </a:p>
+        </p:txBody>
+      </p:sp>
+    </p:spTree>
+  </p:cSld>
+  <p:clrMapOvr>
+    <a:masterClrMapping/>
+  </p:clrMapOvr>
+</p:sld>
+</file>
+
+<file path=ppt/slides/slide53.xml><?xml version="1.0" encoding="utf-8"?>
+<p:sld xmlns:a="http://schemas.openxmlformats.org/drawingml/2006/main" xmlns:r="http://schemas.openxmlformats.org/officeDocument/2006/relationships" xmlns:p="http://schemas.openxmlformats.org/presentationml/2006/main">
+  <p:cSld name="Slide 53">
+    <p:spTree>
+      <p:nvGrpSpPr>
+        <p:cNvPr id="1" name=""/>
+        <p:cNvGrpSpPr/>
+        <p:nvPr/>
+      </p:nvGrpSpPr>
+      <p:grpSpPr>
+        <a:xfrm>
+          <a:off x="0" y="0"/>
+          <a:ext cx="0" cy="0"/>
+          <a:chOff x="0" y="0"/>
+          <a:chExt cx="0" cy="0"/>
+        </a:xfrm>
+      </p:grpSpPr>
+      <p:sp>
+        <p:nvSpPr>
+          <p:cNvPr id="2" name="Text 0"/>
+          <p:cNvSpPr/>
+          <p:nvPr/>
+        </p:nvSpPr>
+        <p:spPr>
+          <a:xfrm>
+            <a:off x="457200" y="713232"/>
+            <a:ext cx="11368735" cy="274320"/>
+          </a:xfrm>
+          <a:prstGeom prst="rect">
+            <a:avLst/>
+          </a:prstGeom>
+          <a:noFill/>
+          <a:ln/>
+        </p:spPr>
+        <p:txBody>
+          <a:bodyPr wrap="square" lIns="0" tIns="0" rIns="0" bIns="0" rtlCol="0" anchor="ctr"/>
+          <a:lstStyle/>
+          <a:p>
+            <a:pPr algn="r" indent="0" marL="0">
+              <a:buNone/>
+            </a:pPr>
+            <a:r>
+              <a:rPr lang="en-US" sz="1400" b="1" dirty="0">
+                <a:solidFill>
+                  <a:srgbClr val="1C3F6E"/>
+                </a:solidFill>
+                <a:latin typeface="Calibri" pitchFamily="34" charset="0"/>
+                <a:ea typeface="Calibri" pitchFamily="34" charset="-122"/>
+                <a:cs typeface="Calibri" pitchFamily="34" charset="-120"/>
+              </a:rPr>
               <a:t>BILINGUAL GAME</a:t>
             </a:r>
             <a:endParaRPr lang="en-US" sz="1400" dirty="0"/>
@@ -16942,7 +19172,7 @@
       </p:sp>
       <p:graphicFrame>
         <p:nvGraphicFramePr>
-          <p:cNvPr id="49" name="Table 0"/>
+          <p:cNvPr id="54" name="Table 0"/>
           <p:cNvGraphicFramePr>
             <a:graphicFrameLocks noGrp="1"/>
           </p:cNvGraphicFramePr>
@@ -17978,7 +20208,7 @@
             <a:pPr algn="ctr"/>
             <a:fld id="{F7021451-1387-4CA6-816F-3879F97B5CBC}" type="slidenum">
               <a:rPr b="1" lang="en-US"/>
-              <a:t>48</a:t>
+              <a:t>53</a:t>
             </a:fld>
             <a:endParaRPr lang="en-US"/>
           </a:p>
@@ -17992,9 +20222,9 @@
 </p:sld>
 </file>
 
-<file path=ppt/slides/slide49.xml><?xml version="1.0" encoding="utf-8"?>
+<file path=ppt/slides/slide54.xml><?xml version="1.0" encoding="utf-8"?>
 <p:sld xmlns:a="http://schemas.openxmlformats.org/drawingml/2006/main" xmlns:r="http://schemas.openxmlformats.org/officeDocument/2006/relationships" xmlns:p="http://schemas.openxmlformats.org/presentationml/2006/main">
-  <p:cSld name="Slide 49">
+  <p:cSld name="Slide 54">
     <p:spTree>
       <p:nvGrpSpPr>
         <p:cNvPr id="1" name=""/>
@@ -18089,7 +20319,7 @@
       </p:sp>
       <p:graphicFrame>
         <p:nvGraphicFramePr>
-          <p:cNvPr id="50" name="Table 0"/>
+          <p:cNvPr id="55" name="Table 0"/>
           <p:cNvGraphicFramePr>
             <a:graphicFrameLocks noGrp="1"/>
           </p:cNvGraphicFramePr>
@@ -18711,7 +20941,7 @@
             <a:pPr algn="ctr"/>
             <a:fld id="{F7021451-1387-4CA6-816F-3879F97B5CBC}" type="slidenum">
               <a:rPr b="1" lang="en-US"/>
-              <a:t>49</a:t>
+              <a:t>54</a:t>
             </a:fld>
             <a:endParaRPr lang="en-US"/>
           </a:p>
@@ -18725,9 +20955,9 @@
 </p:sld>
 </file>
 
-<file path=ppt/slides/slide5.xml><?xml version="1.0" encoding="utf-8"?>
+<file path=ppt/slides/slide55.xml><?xml version="1.0" encoding="utf-8"?>
 <p:sld xmlns:a="http://schemas.openxmlformats.org/drawingml/2006/main" xmlns:r="http://schemas.openxmlformats.org/officeDocument/2006/relationships" xmlns:p="http://schemas.openxmlformats.org/presentationml/2006/main">
-  <p:cSld name="Slide 5">
+  <p:cSld name="Slide 55">
     <p:spTree>
       <p:nvGrpSpPr>
         <p:cNvPr id="1" name=""/>
@@ -18775,225 +21005,6 @@
                 <a:ea typeface="Calibri" pitchFamily="34" charset="-122"/>
                 <a:cs typeface="Calibri" pitchFamily="34" charset="-120"/>
               </a:rPr>
-              <a:t>HOMEWORK CORRECTION</a:t>
-            </a:r>
-            <a:endParaRPr lang="en-US" sz="1400" dirty="0"/>
-          </a:p>
-        </p:txBody>
-      </p:sp>
-      <p:pic>
-        <p:nvPicPr>
-          <p:cNvPr id="3" name="Image 0" descr="/home/claude/f4/img/minesec_sheet.png">    </p:cNvPr>
-          <p:cNvPicPr>
-            <a:picLocks noChangeAspect="1"/>
-          </p:cNvPicPr>
-          <p:nvPr/>
-        </p:nvPicPr>
-        <p:blipFill>
-          <a:blip r:embed="rId1"/>
-          <a:stretch>
-            <a:fillRect/>
-          </a:stretch>
-        </p:blipFill>
-        <p:spPr>
-          <a:xfrm>
-            <a:off x="0" y="658368"/>
-            <a:ext cx="5120640" cy="5833872"/>
-          </a:xfrm>
-          <a:prstGeom prst="rect">
-            <a:avLst/>
-          </a:prstGeom>
-        </p:spPr>
-      </p:pic>
-      <p:sp>
-        <p:nvSpPr>
-          <p:cNvPr id="4" name="Text 1"/>
-          <p:cNvSpPr/>
-          <p:nvPr/>
-        </p:nvSpPr>
-        <p:spPr>
-          <a:xfrm>
-            <a:off x="5349240" y="1005840"/>
-            <a:ext cx="6522415" cy="731520"/>
-          </a:xfrm>
-          <a:prstGeom prst="rect">
-            <a:avLst/>
-          </a:prstGeom>
-          <a:noFill/>
-          <a:ln/>
-        </p:spPr>
-        <p:txBody>
-          <a:bodyPr wrap="square" lIns="0" tIns="0" rIns="0" bIns="0" rtlCol="0" anchor="ctr">
-            <a:normAutofit/>
-          </a:bodyPr>
-          <a:lstStyle/>
-          <a:p>
-            <a:pPr algn="ctr" indent="0" marL="0">
-              <a:buNone/>
-            </a:pPr>
-            <a:r>
-              <a:rPr lang="en-US" sz="3600" b="1" dirty="0">
-                <a:solidFill>
-                  <a:srgbClr val="990011"/>
-                </a:solidFill>
-                <a:latin typeface="Times New Roman" pitchFamily="34" charset="0"/>
-                <a:ea typeface="Times New Roman" pitchFamily="34" charset="-122"/>
-                <a:cs typeface="Times New Roman" pitchFamily="34" charset="-120"/>
-              </a:rPr>
-              <a:t>Correction: Possible Answer</a:t>
-            </a:r>
-            <a:endParaRPr lang="en-US" sz="3600" dirty="0"/>
-          </a:p>
-        </p:txBody>
-      </p:sp>
-      <p:sp>
-        <p:nvSpPr>
-          <p:cNvPr id="5" name="Text 2"/>
-          <p:cNvSpPr/>
-          <p:nvPr/>
-        </p:nvSpPr>
-        <p:spPr>
-          <a:xfrm>
-            <a:off x="5349240" y="1783080"/>
-            <a:ext cx="6522415" cy="4663440"/>
-          </a:xfrm>
-          <a:prstGeom prst="rect">
-            <a:avLst/>
-          </a:prstGeom>
-          <a:noFill/>
-          <a:ln/>
-        </p:spPr>
-        <p:txBody>
-          <a:bodyPr wrap="square" lIns="0" tIns="0" rIns="0" bIns="0" rtlCol="0" anchor="t"/>
-          <a:lstStyle/>
-          <a:p>
-            <a:pPr algn="l" indent="0" marL="0">
-              <a:spcAft>
-                <a:spcPts val="800"/>
-              </a:spcAft>
-              <a:buNone/>
-            </a:pPr>
-            <a:r>
-              <a:rPr lang="en-US" sz="4000" dirty="0">
-                <a:solidFill>
-                  <a:srgbClr val="111111"/>
-                </a:solidFill>
-                <a:latin typeface="Times New Roman" pitchFamily="34" charset="0"/>
-                <a:ea typeface="Times New Roman" pitchFamily="34" charset="-122"/>
-                <a:cs typeface="Times New Roman" pitchFamily="34" charset="-120"/>
-              </a:rPr>
-              <a:t>Garoua is 6 hours ahead of New York (+1 − (−5) = 6), so it is 09:00 − 6 h = 03:00 in New York.</a:t>
-            </a:r>
-            <a:endParaRPr lang="en-US" sz="4000" dirty="0"/>
-          </a:p>
-        </p:txBody>
-      </p:sp>
-      <p:sp>
-        <p:nvSpPr>
-          <p:cNvPr id="25" name="Slide Number Placeholder 0"/>
-          <p:cNvSpPr>
-            <a:spLocks noGrp="1"/>
-          </p:cNvSpPr>
-          <p:nvPr>
-            <p:ph type="sldNum" sz="quarter" idx="4294967295"/>
-          </p:nvPr>
-        </p:nvSpPr>
-        <p:spPr>
-          <a:xfrm>
-            <a:off x="27432" y="91440"/>
-            <a:ext cx="585216" cy="475488"/>
-          </a:xfrm>
-          <a:prstGeom prst="rect">
-            <a:avLst/>
-          </a:prstGeom>
-          <a:extLst>
-            <a:ext uri="{C572A759-6A51-4108-AA02-DFA0A04FC94B}">
-              <ma14:wrappingTextBoxFlag xmlns:ma14="http://schemas.microsoft.com/office/mac/drawingml/2011/main" val="0"/>
-            </a:ext>
-          </a:extLst>
-        </p:spPr>
-        <p:txBody>
-          <a:bodyPr/>
-          <a:lstStyle>
-            <a:lvl1pPr>
-              <a:defRPr sz="2000">
-                <a:solidFill>
-                  <a:srgbClr val="FFFFFF"/>
-                </a:solidFill>
-                <a:latin typeface="Calibri"/>
-                <a:ea typeface="Calibri"/>
-                <a:cs typeface="Calibri"/>
-              </a:defRPr>
-            </a:lvl1pPr>
-          </a:lstStyle>
-          <a:p>
-            <a:pPr algn="ctr"/>
-            <a:fld id="{F7021451-1387-4CA6-816F-3879F97B5CBC}" type="slidenum">
-              <a:rPr b="1" lang="en-US"/>
-              <a:t>5</a:t>
-            </a:fld>
-            <a:endParaRPr lang="en-US"/>
-          </a:p>
-        </p:txBody>
-      </p:sp>
-    </p:spTree>
-  </p:cSld>
-  <p:clrMapOvr>
-    <a:masterClrMapping/>
-  </p:clrMapOvr>
-</p:sld>
-</file>
-
-<file path=ppt/slides/slide50.xml><?xml version="1.0" encoding="utf-8"?>
-<p:sld xmlns:a="http://schemas.openxmlformats.org/drawingml/2006/main" xmlns:r="http://schemas.openxmlformats.org/officeDocument/2006/relationships" xmlns:p="http://schemas.openxmlformats.org/presentationml/2006/main">
-  <p:cSld name="Slide 50">
-    <p:spTree>
-      <p:nvGrpSpPr>
-        <p:cNvPr id="1" name=""/>
-        <p:cNvGrpSpPr/>
-        <p:nvPr/>
-      </p:nvGrpSpPr>
-      <p:grpSpPr>
-        <a:xfrm>
-          <a:off x="0" y="0"/>
-          <a:ext cx="0" cy="0"/>
-          <a:chOff x="0" y="0"/>
-          <a:chExt cx="0" cy="0"/>
-        </a:xfrm>
-      </p:grpSpPr>
-      <p:sp>
-        <p:nvSpPr>
-          <p:cNvPr id="2" name="Text 0"/>
-          <p:cNvSpPr/>
-          <p:nvPr/>
-        </p:nvSpPr>
-        <p:spPr>
-          <a:xfrm>
-            <a:off x="457200" y="713232"/>
-            <a:ext cx="11368735" cy="274320"/>
-          </a:xfrm>
-          <a:prstGeom prst="rect">
-            <a:avLst/>
-          </a:prstGeom>
-          <a:noFill/>
-          <a:ln/>
-        </p:spPr>
-        <p:txBody>
-          <a:bodyPr wrap="square" lIns="0" tIns="0" rIns="0" bIns="0" rtlCol="0" anchor="ctr"/>
-          <a:lstStyle/>
-          <a:p>
-            <a:pPr algn="r" indent="0" marL="0">
-              <a:buNone/>
-            </a:pPr>
-            <a:r>
-              <a:rPr lang="en-US" sz="1400" b="1" dirty="0">
-                <a:solidFill>
-                  <a:srgbClr val="1C3F6E"/>
-                </a:solidFill>
-                <a:latin typeface="Calibri" pitchFamily="34" charset="0"/>
-                <a:ea typeface="Calibri" pitchFamily="34" charset="-122"/>
-                <a:cs typeface="Calibri" pitchFamily="34" charset="-120"/>
-              </a:rPr>
               <a:t>LOGBOOK</a:t>
             </a:r>
             <a:endParaRPr lang="en-US" sz="1400" dirty="0"/>
@@ -19041,7 +21052,7 @@
       </p:sp>
       <p:graphicFrame>
         <p:nvGraphicFramePr>
-          <p:cNvPr id="51" name="Table 0"/>
+          <p:cNvPr id="56" name="Table 0"/>
           <p:cNvGraphicFramePr>
             <a:graphicFrameLocks noGrp="1"/>
           </p:cNvGraphicFramePr>
@@ -19151,7 +21162,7 @@
                           <a:ea typeface="Calibri" pitchFamily="34" charset="-122"/>
                           <a:cs typeface="Calibri" pitchFamily="34" charset="-120"/>
                         </a:rPr>
-                        <a:t>Meaning of the Natural Environment; Components of the Natural Environment; Ecosystems.</a:t>
+                        <a:t>DEFINITIONS; Components of the Natural Environment; Ecosystems.</a:t>
                       </a:r>
                       <a:endParaRPr lang="en-US" sz="1600" dirty="0">
                         <a:latin typeface="Calibri" charset="0"/>
@@ -19801,7 +21812,7 @@
             <a:pPr algn="ctr"/>
             <a:fld id="{F7021451-1387-4CA6-816F-3879F97B5CBC}" type="slidenum">
               <a:rPr b="1" lang="en-US"/>
-              <a:t>50</a:t>
+              <a:t>55</a:t>
             </a:fld>
             <a:endParaRPr lang="en-US"/>
           </a:p>
@@ -19815,9 +21826,9 @@
 </p:sld>
 </file>
 
-<file path=ppt/slides/slide51.xml><?xml version="1.0" encoding="utf-8"?>
+<file path=ppt/slides/slide56.xml><?xml version="1.0" encoding="utf-8"?>
 <p:sld xmlns:a="http://schemas.openxmlformats.org/drawingml/2006/main" xmlns:r="http://schemas.openxmlformats.org/officeDocument/2006/relationships" xmlns:p="http://schemas.openxmlformats.org/presentationml/2006/main">
-  <p:cSld name="Slide 51">
+  <p:cSld name="Slide 56">
     <p:spTree>
       <p:nvGrpSpPr>
         <p:cNvPr id="1" name=""/>
@@ -20015,7 +22026,7 @@
                 <a:ea typeface="Calibri" pitchFamily="34" charset="-122"/>
                 <a:cs typeface="Calibri" pitchFamily="34" charset="-120"/>
               </a:rPr>
-              <a:t>Without the projector (Activity 2): name rivers of Cameroon.</a:t>
+              <a:t>Without the projector (Activity 2): compare a tree and a house.</a:t>
             </a:r>
             <a:endParaRPr lang="en-US" sz="2000" dirty="0"/>
           </a:p>
@@ -20036,7 +22047,7 @@
                 <a:ea typeface="Calibri" pitchFamily="34" charset="-122"/>
                 <a:cs typeface="Calibri" pitchFamily="34" charset="-120"/>
               </a:rPr>
-              <a:t>Without the projector (Activity 3): show a handful of soil.</a:t>
+              <a:t>Without the projector (Activity 3): name rivers of Cameroon.</a:t>
             </a:r>
             <a:endParaRPr lang="en-US" sz="2000" dirty="0"/>
           </a:p>
@@ -20057,7 +22068,7 @@
                 <a:ea typeface="Calibri" pitchFamily="34" charset="-122"/>
                 <a:cs typeface="Calibri" pitchFamily="34" charset="-120"/>
               </a:rPr>
-              <a:t>Without the projector (Activity 4): list plants and animals of Garoua.</a:t>
+              <a:t>Without the projector (Activity 4): list animals of the North.</a:t>
             </a:r>
             <a:endParaRPr lang="en-US" sz="2000" dirty="0"/>
           </a:p>
@@ -20126,7 +22137,7 @@
             <a:pPr algn="ctr"/>
             <a:fld id="{F7021451-1387-4CA6-816F-3879F97B5CBC}" type="slidenum">
               <a:rPr b="1" lang="en-US"/>
-              <a:t>51</a:t>
+              <a:t>56</a:t>
             </a:fld>
             <a:endParaRPr lang="en-US"/>
           </a:p>
@@ -20140,9 +22151,9 @@
 </p:sld>
 </file>
 
-<file path=ppt/slides/slide52.xml><?xml version="1.0" encoding="utf-8"?>
+<file path=ppt/slides/slide57.xml><?xml version="1.0" encoding="utf-8"?>
 <p:sld xmlns:a="http://schemas.openxmlformats.org/drawingml/2006/main" xmlns:r="http://schemas.openxmlformats.org/officeDocument/2006/relationships" xmlns:p="http://schemas.openxmlformats.org/presentationml/2006/main">
-  <p:cSld name="Slide 52">
+  <p:cSld name="Slide 57">
     <p:spTree>
       <p:nvGrpSpPr>
         <p:cNvPr id="1" name=""/>
@@ -20213,7 +22224,7 @@
         <p:spPr>
           <a:xfrm>
             <a:off x="0" y="658368"/>
-            <a:ext cx="3840480" cy="5833872"/>
+            <a:ext cx="1463040" cy="5833872"/>
           </a:xfrm>
           <a:prstGeom prst="rect">
             <a:avLst/>
@@ -20228,8 +22239,8 @@
         </p:nvSpPr>
         <p:spPr>
           <a:xfrm>
-            <a:off x="4069080" y="1005840"/>
-            <a:ext cx="7802575" cy="731520"/>
+            <a:off x="1691640" y="1005840"/>
+            <a:ext cx="10180015" cy="731520"/>
           </a:xfrm>
           <a:prstGeom prst="rect">
             <a:avLst/>
@@ -20269,8 +22280,8 @@
         </p:nvSpPr>
         <p:spPr>
           <a:xfrm>
-            <a:off x="4069080" y="1783080"/>
-            <a:ext cx="7802575" cy="4663440"/>
+            <a:off x="1691640" y="1783080"/>
+            <a:ext cx="10180015" cy="4663440"/>
           </a:xfrm>
           <a:prstGeom prst="rect">
             <a:avLst/>
@@ -20340,7 +22351,7 @@
                 <a:ea typeface="Calibri" pitchFamily="34" charset="-122"/>
                 <a:cs typeface="Calibri" pitchFamily="34" charset="-120"/>
               </a:rPr>
-              <a:t>Photo, Activity 2: “Niamey, Niger” by LenDog64, CC BY-ND 2.0, via Flickr (https://www.flickr.com/photos/45968460@N03/4422209893)</a:t>
+              <a:t>Photo, Activity 2: “Blue Wildebeest in the Lowveld” by Martin_Heigan, CC BY-NC-ND 2.0, via Flickr (https://www.flickr.com/photos/97303475@N00/2089079933)</a:t>
             </a:r>
             <a:endParaRPr lang="en-US" sz="1800" dirty="0"/>
           </a:p>
@@ -20361,7 +22372,7 @@
                 <a:ea typeface="Calibri" pitchFamily="34" charset="-122"/>
                 <a:cs typeface="Calibri" pitchFamily="34" charset="-120"/>
               </a:rPr>
-              <a:t>Photo, Activity 3: “My date palm. Cool, huh?” by Hair Squared, CC BY-SA 2.0, via Flickr (https://www.flickr.com/photos/73119211@N00/3804244479)</a:t>
+              <a:t>Photo, Activity 3: “Niamey, Niger” by LenDog64, CC BY-ND 2.0, via Flickr (https://www.flickr.com/photos/45968460@N03/4422209893)</a:t>
             </a:r>
             <a:endParaRPr lang="en-US" sz="1800" dirty="0"/>
           </a:p>
@@ -20403,7 +22414,28 @@
                 <a:ea typeface="Calibri" pitchFamily="34" charset="-122"/>
                 <a:cs typeface="Calibri" pitchFamily="34" charset="-120"/>
               </a:rPr>
-              <a:t>Diagrams and animations: drawn for this lesson (Geography Department).</a:t>
+              <a:t>Photo, board summary (Soil): “My date palm. Cool, huh?” by Hair Squared, CC BY-SA 2.0, via Flickr (https://www.flickr.com/photos/73119211@N00/3804244479)</a:t>
+            </a:r>
+            <a:endParaRPr lang="en-US" sz="1800" dirty="0"/>
+          </a:p>
+          <a:p>
+            <a:pPr algn="l" marL="342900" indent="-342900">
+              <a:spcAft>
+                <a:spcPts val="800"/>
+              </a:spcAft>
+              <a:buSzPct val="100000"/>
+              <a:buChar char="•"/>
+            </a:pPr>
+            <a:r>
+              <a:rPr lang="en-US" sz="1800" dirty="0">
+                <a:solidFill>
+                  <a:srgbClr val="111111"/>
+                </a:solidFill>
+                <a:latin typeface="Calibri" pitchFamily="34" charset="0"/>
+                <a:ea typeface="Calibri" pitchFamily="34" charset="-122"/>
+                <a:cs typeface="Calibri" pitchFamily="34" charset="-120"/>
+              </a:rPr>
+              <a:t>Photo, board summary (Flora): “Amazon 11” by CIAT International Center for Tropical Agriculture, CC BY-SA 2.0, via Flickr (https://www.flickr.com/photos/38476503@N08/5641587148)</a:t>
             </a:r>
             <a:endParaRPr lang="en-US" sz="1800" dirty="0"/>
           </a:p>
@@ -20451,7 +22483,248 @@
             <a:pPr algn="ctr"/>
             <a:fld id="{F7021451-1387-4CA6-816F-3879F97B5CBC}" type="slidenum">
               <a:rPr b="1" lang="en-US"/>
-              <a:t>52</a:t>
+              <a:t>57</a:t>
+            </a:fld>
+            <a:endParaRPr lang="en-US"/>
+          </a:p>
+        </p:txBody>
+      </p:sp>
+    </p:spTree>
+  </p:cSld>
+  <p:clrMapOvr>
+    <a:masterClrMapping/>
+  </p:clrMapOvr>
+</p:sld>
+</file>
+
+<file path=ppt/slides/slide58.xml><?xml version="1.0" encoding="utf-8"?>
+<p:sld xmlns:a="http://schemas.openxmlformats.org/drawingml/2006/main" xmlns:r="http://schemas.openxmlformats.org/officeDocument/2006/relationships" xmlns:p="http://schemas.openxmlformats.org/presentationml/2006/main">
+  <p:cSld name="Slide 58">
+    <p:spTree>
+      <p:nvGrpSpPr>
+        <p:cNvPr id="1" name=""/>
+        <p:cNvGrpSpPr/>
+        <p:nvPr/>
+      </p:nvGrpSpPr>
+      <p:grpSpPr>
+        <a:xfrm>
+          <a:off x="0" y="0"/>
+          <a:ext cx="0" cy="0"/>
+          <a:chOff x="0" y="0"/>
+          <a:chExt cx="0" cy="0"/>
+        </a:xfrm>
+      </p:grpSpPr>
+      <p:sp>
+        <p:nvSpPr>
+          <p:cNvPr id="2" name="Text 0"/>
+          <p:cNvSpPr/>
+          <p:nvPr/>
+        </p:nvSpPr>
+        <p:spPr>
+          <a:xfrm>
+            <a:off x="457200" y="713232"/>
+            <a:ext cx="11368735" cy="274320"/>
+          </a:xfrm>
+          <a:prstGeom prst="rect">
+            <a:avLst/>
+          </a:prstGeom>
+          <a:noFill/>
+          <a:ln/>
+        </p:spPr>
+        <p:txBody>
+          <a:bodyPr wrap="square" lIns="0" tIns="0" rIns="0" bIns="0" rtlCol="0" anchor="ctr"/>
+          <a:lstStyle/>
+          <a:p>
+            <a:pPr algn="r" indent="0" marL="0">
+              <a:buNone/>
+            </a:pPr>
+            <a:r>
+              <a:rPr lang="en-US" sz="1400" b="1" dirty="0">
+                <a:solidFill>
+                  <a:srgbClr val="1C3F6E"/>
+                </a:solidFill>
+                <a:latin typeface="Calibri" pitchFamily="34" charset="0"/>
+                <a:ea typeface="Calibri" pitchFamily="34" charset="-122"/>
+                <a:cs typeface="Calibri" pitchFamily="34" charset="-120"/>
+              </a:rPr>
+              <a:t>REFERENCES</a:t>
+            </a:r>
+            <a:endParaRPr lang="en-US" sz="1400" dirty="0"/>
+          </a:p>
+        </p:txBody>
+      </p:sp>
+      <p:pic>
+        <p:nvPicPr>
+          <p:cNvPr id="3" name="Image 0" descr="/home/claude/f4/img/minesec_sheet.png">    </p:cNvPr>
+          <p:cNvPicPr>
+            <a:picLocks noChangeAspect="1"/>
+          </p:cNvPicPr>
+          <p:nvPr/>
+        </p:nvPicPr>
+        <p:blipFill>
+          <a:blip r:embed="rId1"/>
+          <a:stretch>
+            <a:fillRect/>
+          </a:stretch>
+        </p:blipFill>
+        <p:spPr>
+          <a:xfrm>
+            <a:off x="0" y="658368"/>
+            <a:ext cx="5120640" cy="5833872"/>
+          </a:xfrm>
+          <a:prstGeom prst="rect">
+            <a:avLst/>
+          </a:prstGeom>
+        </p:spPr>
+      </p:pic>
+      <p:sp>
+        <p:nvSpPr>
+          <p:cNvPr id="4" name="Text 1"/>
+          <p:cNvSpPr/>
+          <p:nvPr/>
+        </p:nvSpPr>
+        <p:spPr>
+          <a:xfrm>
+            <a:off x="5349240" y="1005840"/>
+            <a:ext cx="6522415" cy="731520"/>
+          </a:xfrm>
+          <a:prstGeom prst="rect">
+            <a:avLst/>
+          </a:prstGeom>
+          <a:noFill/>
+          <a:ln/>
+        </p:spPr>
+        <p:txBody>
+          <a:bodyPr wrap="square" lIns="0" tIns="0" rIns="0" bIns="0" rtlCol="0" anchor="ctr">
+            <a:normAutofit/>
+          </a:bodyPr>
+          <a:lstStyle/>
+          <a:p>
+            <a:pPr algn="ctr" indent="0" marL="0">
+              <a:buNone/>
+            </a:pPr>
+            <a:r>
+              <a:rPr lang="en-US" sz="3600" b="1" dirty="0">
+                <a:solidFill>
+                  <a:srgbClr val="990011"/>
+                </a:solidFill>
+                <a:latin typeface="Times New Roman" pitchFamily="34" charset="0"/>
+                <a:ea typeface="Times New Roman" pitchFamily="34" charset="-122"/>
+                <a:cs typeface="Times New Roman" pitchFamily="34" charset="-120"/>
+              </a:rPr>
+              <a:t>References (continued)</a:t>
+            </a:r>
+            <a:endParaRPr lang="en-US" sz="3600" dirty="0"/>
+          </a:p>
+        </p:txBody>
+      </p:sp>
+      <p:sp>
+        <p:nvSpPr>
+          <p:cNvPr id="5" name="Text 2"/>
+          <p:cNvSpPr/>
+          <p:nvPr/>
+        </p:nvSpPr>
+        <p:spPr>
+          <a:xfrm>
+            <a:off x="5349240" y="1783080"/>
+            <a:ext cx="6522415" cy="4663440"/>
+          </a:xfrm>
+          <a:prstGeom prst="rect">
+            <a:avLst/>
+          </a:prstGeom>
+          <a:noFill/>
+          <a:ln/>
+        </p:spPr>
+        <p:txBody>
+          <a:bodyPr wrap="square" lIns="0" tIns="0" rIns="0" bIns="0" rtlCol="0" anchor="t"/>
+          <a:lstStyle/>
+          <a:p>
+            <a:pPr algn="l" marL="342900" indent="-342900">
+              <a:spcAft>
+                <a:spcPts val="800"/>
+              </a:spcAft>
+              <a:buSzPct val="100000"/>
+              <a:buChar char="•"/>
+            </a:pPr>
+            <a:r>
+              <a:rPr lang="en-US" sz="1800" dirty="0">
+                <a:solidFill>
+                  <a:srgbClr val="111111"/>
+                </a:solidFill>
+                <a:latin typeface="Calibri" pitchFamily="34" charset="0"/>
+                <a:ea typeface="Calibri" pitchFamily="34" charset="-122"/>
+                <a:cs typeface="Calibri" pitchFamily="34" charset="-120"/>
+              </a:rPr>
+              <a:t>Photo, board summary (Examples): “Lake Chad: almost gone” by GRIDArendal, CC BY-NC-SA 2.0, via Flickr (https://www.flickr.com/photos/148768555@N05/32323646926)</a:t>
+            </a:r>
+            <a:endParaRPr lang="en-US" sz="1800" dirty="0"/>
+          </a:p>
+          <a:p>
+            <a:pPr algn="l" marL="342900" indent="-342900">
+              <a:spcAft>
+                <a:spcPts val="800"/>
+              </a:spcAft>
+              <a:buSzPct val="100000"/>
+              <a:buChar char="•"/>
+            </a:pPr>
+            <a:r>
+              <a:rPr lang="en-US" sz="1800" dirty="0">
+                <a:solidFill>
+                  <a:srgbClr val="111111"/>
+                </a:solidFill>
+                <a:latin typeface="Calibri" pitchFamily="34" charset="0"/>
+                <a:ea typeface="Calibri" pitchFamily="34" charset="-122"/>
+                <a:cs typeface="Calibri" pitchFamily="34" charset="-120"/>
+              </a:rPr>
+              <a:t>Diagrams and animations: drawn for this lesson (Geography Department).</a:t>
+            </a:r>
+            <a:endParaRPr lang="en-US" sz="1800" dirty="0"/>
+          </a:p>
+        </p:txBody>
+      </p:sp>
+      <p:sp>
+        <p:nvSpPr>
+          <p:cNvPr id="25" name="Slide Number Placeholder 0"/>
+          <p:cNvSpPr>
+            <a:spLocks noGrp="1"/>
+          </p:cNvSpPr>
+          <p:nvPr>
+            <p:ph type="sldNum" sz="quarter" idx="4294967295"/>
+          </p:nvPr>
+        </p:nvSpPr>
+        <p:spPr>
+          <a:xfrm>
+            <a:off x="27432" y="91440"/>
+            <a:ext cx="585216" cy="475488"/>
+          </a:xfrm>
+          <a:prstGeom prst="rect">
+            <a:avLst/>
+          </a:prstGeom>
+          <a:extLst>
+            <a:ext uri="{C572A759-6A51-4108-AA02-DFA0A04FC94B}">
+              <ma14:wrappingTextBoxFlag xmlns:ma14="http://schemas.microsoft.com/office/mac/drawingml/2011/main" val="0"/>
+            </a:ext>
+          </a:extLst>
+        </p:spPr>
+        <p:txBody>
+          <a:bodyPr/>
+          <a:lstStyle>
+            <a:lvl1pPr>
+              <a:defRPr sz="2000">
+                <a:solidFill>
+                  <a:srgbClr val="FFFFFF"/>
+                </a:solidFill>
+                <a:latin typeface="Calibri"/>
+                <a:ea typeface="Calibri"/>
+                <a:cs typeface="Calibri"/>
+              </a:defRPr>
+            </a:lvl1pPr>
+          </a:lstStyle>
+          <a:p>
+            <a:pPr algn="ctr"/>
+            <a:fld id="{F7021451-1387-4CA6-816F-3879F97B5CBC}" type="slidenum">
+              <a:rPr b="1" lang="en-US"/>
+              <a:t>58</a:t>
             </a:fld>
             <a:endParaRPr lang="en-US"/>
           </a:p>
@@ -21416,7 +23689,7 @@
         <p:spPr>
           <a:xfrm>
             <a:off x="0" y="658368"/>
-            <a:ext cx="3840480" cy="5833872"/>
+            <a:ext cx="2468880" cy="5833872"/>
           </a:xfrm>
           <a:prstGeom prst="rect">
             <a:avLst/>
@@ -21431,8 +23704,8 @@
         </p:nvSpPr>
         <p:spPr>
           <a:xfrm>
-            <a:off x="4069080" y="1005840"/>
-            <a:ext cx="7802575" cy="731520"/>
+            <a:off x="2697480" y="1005840"/>
+            <a:ext cx="9174175" cy="731520"/>
           </a:xfrm>
           <a:prstGeom prst="rect">
             <a:avLst/>
@@ -21472,8 +23745,8 @@
         </p:nvSpPr>
         <p:spPr>
           <a:xfrm>
-            <a:off x="4069080" y="1783080"/>
-            <a:ext cx="7802575" cy="4663440"/>
+            <a:off x="2697480" y="1783080"/>
+            <a:ext cx="9174175" cy="4663440"/>
           </a:xfrm>
           <a:prstGeom prst="rect">
             <a:avLst/>
@@ -21500,7 +23773,7 @@
                 <a:ea typeface="Times New Roman" pitchFamily="34" charset="-122"/>
                 <a:cs typeface="Times New Roman" pitchFamily="34" charset="-120"/>
               </a:rPr>
-              <a:t>During a walk near the River Benue, Fadimatou sees trees, grass, birds, fish, sand and water. Her teacher tells her that all these things together form the natural environment and that they depend on one another.</a:t>
+              <a:t>During a walk near the River Benue, Fadimatou sees trees, grass, birds, fish, sand and water. Her teacher says that all these things form the natural environment. Fadimatou asks: "What is the natural environment made of, and how do its parts depend on one another?"</a:t>
             </a:r>
             <a:endParaRPr lang="en-US" sz="4000" dirty="0"/>
           </a:p>

--- a/lecons/F1/07_F1_M2_L04_The_Notion_of_the_Environment.pptx
+++ b/lecons/F1/07_F1_M2_L04_The_Notion_of_the_Environment.pptx
@@ -3023,7 +3023,7 @@
           <a:p>
             <a:r>
               <a:rPr lang="en-US" dirty="0"/>
-              <a:t>We continue with the definitions. On this slide we have Resources. Write each point on a new line, with the key term first, and explain it in your own words when we revise.</a:t>
+              <a:t>We continue with the definitions. On this slide we have Resources and Ecosystem. Write each point on a new line, with the key term first, and explain it in your own words when we revise.</a:t>
             </a:r>
             <a:endParaRPr lang="en-US" dirty="0"/>
           </a:p>
@@ -3727,7 +3727,7 @@
           <a:p>
             <a:r>
               <a:rPr lang="en-US" dirty="0"/>
-              <a:t>Let us copy Ecosystems. Ecosystems are explained as follows. Copy the point on Ecosystem on the left, then draw the diagram on the right: the components of an ecosystem. Give it a title and label it clearly.</a:t>
+              <a:t>Let us copy Ecosystems. The components and examples of an ecosystem are the following. Copy the point on Living components on the left, then draw the diagram on the right: the components of an ecosystem. Give it a title and label it clearly.</a:t>
             </a:r>
             <a:endParaRPr lang="en-US" dirty="0"/>
           </a:p>
@@ -3815,7 +3815,7 @@
           <a:p>
             <a:r>
               <a:rPr lang="en-US" dirty="0"/>
-              <a:t>We continue with Ecosystems. On this slide we have Living components and Non-living components. Write each point on a new line, with the key term first, and explain it in your own words when we revise.</a:t>
+              <a:t>We continue with Ecosystems. On this slide we have Non-living components. Write each point on a new line, with the key term first, and explain it in your own words when we revise.</a:t>
             </a:r>
             <a:endParaRPr lang="en-US" dirty="0"/>
           </a:p>
@@ -14123,7 +14123,7 @@
         <p:spPr>
           <a:xfrm>
             <a:off x="0" y="658368"/>
-            <a:ext cx="5120640" cy="5833872"/>
+            <a:ext cx="2468880" cy="5833872"/>
           </a:xfrm>
           <a:prstGeom prst="rect">
             <a:avLst/>
@@ -14138,8 +14138,8 @@
         </p:nvSpPr>
         <p:spPr>
           <a:xfrm>
-            <a:off x="5349240" y="1005840"/>
-            <a:ext cx="6522415" cy="731520"/>
+            <a:off x="2697480" y="1005840"/>
+            <a:ext cx="9174175" cy="731520"/>
           </a:xfrm>
           <a:prstGeom prst="rect">
             <a:avLst/>
@@ -14179,8 +14179,8 @@
         </p:nvSpPr>
         <p:spPr>
           <a:xfrm>
-            <a:off x="5349240" y="1783080"/>
-            <a:ext cx="6522415" cy="4663440"/>
+            <a:off x="2697480" y="1783080"/>
+            <a:ext cx="9174175" cy="4663440"/>
           </a:xfrm>
           <a:prstGeom prst="rect">
             <a:avLst/>
@@ -14225,6 +14225,43 @@
                 <a:cs typeface="Times New Roman" pitchFamily="34" charset="-120"/>
               </a:rPr>
               <a:t>They are the useful things that people get from the environment, such as water, soil and wood.</a:t>
+            </a:r>
+            <a:endParaRPr lang="en-US" sz="4000" dirty="0"/>
+          </a:p>
+          <a:p>
+            <a:pPr algn="l" indent="0" marL="0">
+              <a:spcAft>
+                <a:spcPts val="800"/>
+              </a:spcAft>
+              <a:buNone/>
+            </a:pPr>
+            <a:r>
+              <a:rPr lang="en-US" sz="4000" b="1" dirty="0">
+                <a:solidFill>
+                  <a:srgbClr val="111111"/>
+                </a:solidFill>
+                <a:latin typeface="Times New Roman" pitchFamily="34" charset="0"/>
+                <a:ea typeface="Times New Roman" pitchFamily="34" charset="-122"/>
+                <a:cs typeface="Times New Roman" pitchFamily="34" charset="-120"/>
+              </a:rPr>
+              <a:t>Ecosystem: </a:t>
+            </a:r>
+            <a:pPr algn="l" indent="0" marL="0">
+              <a:spcAft>
+                <a:spcPts val="800"/>
+              </a:spcAft>
+              <a:buNone/>
+            </a:pPr>
+            <a:r>
+              <a:rPr lang="en-US" sz="4000" dirty="0">
+                <a:solidFill>
+                  <a:srgbClr val="111111"/>
+                </a:solidFill>
+                <a:latin typeface="Times New Roman" pitchFamily="34" charset="0"/>
+                <a:ea typeface="Times New Roman" pitchFamily="34" charset="-122"/>
+                <a:cs typeface="Times New Roman" pitchFamily="34" charset="-120"/>
+              </a:rPr>
+              <a:t>It is a community of living things and their non-living surroundings that depend on one another.</a:t>
             </a:r>
             <a:endParaRPr lang="en-US" sz="4000" dirty="0"/>
           </a:p>
@@ -16328,7 +16365,7 @@
                 <a:ea typeface="Times New Roman" pitchFamily="34" charset="-122"/>
                 <a:cs typeface="Times New Roman" pitchFamily="34" charset="-120"/>
               </a:rPr>
-              <a:t>Ecosystems are explained as follows:</a:t>
+              <a:t>The components and examples of an ecosystem are the following:</a:t>
             </a:r>
             <a:endParaRPr lang="en-US" sz="3600" dirty="0"/>
           </a:p>
@@ -16348,7 +16385,7 @@
                 <a:ea typeface="Times New Roman" pitchFamily="34" charset="-122"/>
                 <a:cs typeface="Times New Roman" pitchFamily="34" charset="-120"/>
               </a:rPr>
-              <a:t>Ecosystem: </a:t>
+              <a:t>Living components: </a:t>
             </a:r>
             <a:pPr algn="l" indent="0" marL="0">
               <a:spcAft>
@@ -16365,7 +16402,7 @@
                 <a:ea typeface="Times New Roman" pitchFamily="34" charset="-122"/>
                 <a:cs typeface="Times New Roman" pitchFamily="34" charset="-120"/>
               </a:rPr>
-              <a:t>It is a community of living things and their non-living surroundings that depend on one another.</a:t>
+              <a:t>They are plants, animals and people.</a:t>
             </a:r>
             <a:endParaRPr lang="en-US" sz="3600" dirty="0"/>
           </a:p>
@@ -16631,43 +16668,6 @@
         <p:txBody>
           <a:bodyPr wrap="square" lIns="0" tIns="0" rIns="0" bIns="0" rtlCol="0" anchor="t"/>
           <a:lstStyle/>
-          <a:p>
-            <a:pPr algn="l" indent="0" marL="0">
-              <a:spcAft>
-                <a:spcPts val="800"/>
-              </a:spcAft>
-              <a:buNone/>
-            </a:pPr>
-            <a:r>
-              <a:rPr lang="en-US" sz="4000" b="1" dirty="0">
-                <a:solidFill>
-                  <a:srgbClr val="111111"/>
-                </a:solidFill>
-                <a:latin typeface="Times New Roman" pitchFamily="34" charset="0"/>
-                <a:ea typeface="Times New Roman" pitchFamily="34" charset="-122"/>
-                <a:cs typeface="Times New Roman" pitchFamily="34" charset="-120"/>
-              </a:rPr>
-              <a:t>Living components: </a:t>
-            </a:r>
-            <a:pPr algn="l" indent="0" marL="0">
-              <a:spcAft>
-                <a:spcPts val="800"/>
-              </a:spcAft>
-              <a:buNone/>
-            </a:pPr>
-            <a:r>
-              <a:rPr lang="en-US" sz="4000" dirty="0">
-                <a:solidFill>
-                  <a:srgbClr val="111111"/>
-                </a:solidFill>
-                <a:latin typeface="Times New Roman" pitchFamily="34" charset="0"/>
-                <a:ea typeface="Times New Roman" pitchFamily="34" charset="-122"/>
-                <a:cs typeface="Times New Roman" pitchFamily="34" charset="-120"/>
-              </a:rPr>
-              <a:t>They are plants, animals and people.</a:t>
-            </a:r>
-            <a:endParaRPr lang="en-US" sz="4000" dirty="0"/>
-          </a:p>
           <a:p>
             <a:pPr algn="l" indent="0" marL="0">
               <a:spcAft>

--- a/lecons/F1/07_F1_M2_L04_The_Notion_of_the_Environment.pptx
+++ b/lecons/F1/07_F1_M2_L04_The_Notion_of_the_Environment.pptx
@@ -3463,7 +3463,7 @@
           <a:p>
             <a:r>
               <a:rPr lang="en-US" dirty="0"/>
-              <a:t>Before we start the new lesson, let us correct the homework I gave you at the end of Practical Work 3: Calculation of Time. The question was: When it is 09:00 in Garoua (GMT + 1), what time is it in New York (GMT − 5)? Take out your exercise books.</a:t>
+              <a:t>Before we start the new lesson, let us correct the homework I gave you at the end of Practical Work 3: Calculation of Time. The question was: List four components of the natural environment. Take out your exercise books.</a:t>
             </a:r>
             <a:endParaRPr lang="en-US" dirty="0"/>
           </a:p>
@@ -4431,7 +4431,7 @@
           <a:p>
             <a:r>
               <a:rPr lang="en-US" dirty="0"/>
-              <a:t>Here is a good answer. Garoua is 6 hours ahead of New York (+1 − (−5) = 6), so it is 09:00 − 6 h = 03:00 in New York. Compare it with your own answer and correct your work in red.</a:t>
+              <a:t>Here is a good answer. Climate, relief, soil and drainage (also flora and fauna). Compare it with your own answer and correct your work in red.</a:t>
             </a:r>
             <a:endParaRPr lang="en-US" dirty="0"/>
           </a:p>
@@ -4607,7 +4607,7 @@
           <a:p>
             <a:r>
               <a:rPr lang="en-US" dirty="0"/>
-              <a:t>For your homework: List five living things and five non-living things in your school compound. We shall correct it at the beginning of our next lesson.</a:t>
+              <a:t>For your homework: Name the two natural regions of Cameroon. We shall correct it at the beginning of our next lesson.</a:t>
             </a:r>
             <a:endParaRPr lang="en-US" dirty="0"/>
           </a:p>
@@ -15620,7 +15620,7 @@
                 <a:ea typeface="Times New Roman" pitchFamily="34" charset="-122"/>
                 <a:cs typeface="Times New Roman" pitchFamily="34" charset="-120"/>
               </a:rPr>
-              <a:t>When it is 09:00 in Garoua (GMT + 1), what time is it in New York (GMT − 5)?</a:t>
+              <a:t>List four components of the natural environment.</a:t>
             </a:r>
             <a:endParaRPr lang="en-US" sz="4000" dirty="0"/>
           </a:p>
@@ -18334,7 +18334,7 @@
                 <a:ea typeface="Times New Roman" pitchFamily="34" charset="-122"/>
                 <a:cs typeface="Times New Roman" pitchFamily="34" charset="-120"/>
               </a:rPr>
-              <a:t>Garoua is 6 hours ahead of New York (+1 − (−5) = 6), so it is 09:00 − 6 h = 03:00 in New York.</a:t>
+              <a:t>Climate, relief, soil and drainage (also flora and fauna).</a:t>
             </a:r>
             <a:endParaRPr lang="en-US" sz="4000" dirty="0"/>
           </a:p>
@@ -18774,7 +18774,7 @@
                 <a:ea typeface="Times New Roman" pitchFamily="34" charset="-122"/>
                 <a:cs typeface="Times New Roman" pitchFamily="34" charset="-120"/>
               </a:rPr>
-              <a:t>List five living things and five non-living things in your school compound.</a:t>
+              <a:t>Name the two natural regions of Cameroon.</a:t>
             </a:r>
             <a:endParaRPr lang="en-US" sz="4000" dirty="0"/>
           </a:p>
@@ -21438,7 +21438,7 @@
                           <a:ea typeface="Calibri" pitchFamily="34" charset="-122"/>
                           <a:cs typeface="Calibri" pitchFamily="34" charset="-120"/>
                         </a:rPr>
-                        <a:t>List five living things and five non-living things in your school compound.</a:t>
+                        <a:t>Name the two natural regions of Cameroon.</a:t>
                       </a:r>
                       <a:endParaRPr lang="en-US" sz="1600" dirty="0">
                         <a:latin typeface="Calibri" charset="0"/>
